--- a/docs/conviction-pitch-deck.pptx
+++ b/docs/conviction-pitch-deck.pptx
@@ -3187,16 +3187,40 @@
           </a:p>
         </p:txBody>
       </p:sp>
-      <p:sp>
-        <p:nvSpPr>
-          <p:cNvPr id="4" name="TextBox 3"/>
-          <p:cNvSpPr txBox="1"/>
-          <p:nvPr/>
-        </p:nvSpPr>
-        <p:spPr>
-          <a:xfrm>
-            <a:off x="548640" y="548640"/>
-            <a:ext cx="10972800" cy="365760"/>
+      <p:pic>
+        <p:nvPicPr>
+          <p:cNvPr id="4" name="Picture 3" descr="banner.png"/>
+          <p:cNvPicPr>
+            <a:picLocks noChangeAspect="1"/>
+          </p:cNvPicPr>
+          <p:nvPr/>
+        </p:nvPicPr>
+        <p:blipFill>
+          <a:blip r:embed="rId2"/>
+          <a:stretch>
+            <a:fillRect/>
+          </a:stretch>
+        </p:blipFill>
+        <p:spPr>
+          <a:xfrm>
+            <a:off x="608990" y="640080"/>
+            <a:ext cx="10972800" cy="2636044"/>
+          </a:xfrm>
+          <a:prstGeom prst="rect">
+            <a:avLst/>
+          </a:prstGeom>
+        </p:spPr>
+      </p:pic>
+      <p:sp>
+        <p:nvSpPr>
+          <p:cNvPr id="5" name="TextBox 4"/>
+          <p:cNvSpPr txBox="1"/>
+          <p:nvPr/>
+        </p:nvSpPr>
+        <p:spPr>
+          <a:xfrm>
+            <a:off x="548640" y="3657600"/>
+            <a:ext cx="11064240" cy="457200"/>
           </a:xfrm>
           <a:prstGeom prst="rect">
             <a:avLst/>
@@ -3209,7 +3233,7 @@
           </a:bodyPr>
           <a:lstStyle/>
           <a:p>
-            <a:pPr algn="l">
+            <a:pPr algn="ctr">
               <a:lnSpc>
                 <a:spcPct val="120000"/>
               </a:lnSpc>
@@ -3219,7 +3243,7 @@
                 <a:solidFill>
                   <a:srgbClr val="6B6B6B"/>
                 </a:solidFill>
-                <a:latin typeface="JetBrains Mono"/>
+                <a:latin typeface="Liberation Mono"/>
               </a:rPr>
               <a:t>MAGICBLOCK BLITZ V8 · PATH A</a:t>
             </a:r>
@@ -3228,135 +3252,53 @@
       </p:sp>
       <p:sp>
         <p:nvSpPr>
-          <p:cNvPr id="5" name="Oval 4"/>
+          <p:cNvPr id="6" name="TextBox 5"/>
+          <p:cNvSpPr txBox="1"/>
+          <p:nvPr/>
+        </p:nvSpPr>
+        <p:spPr>
+          <a:xfrm>
+            <a:off x="548640" y="4160520"/>
+            <a:ext cx="11064240" cy="777240"/>
+          </a:xfrm>
+          <a:prstGeom prst="rect">
+            <a:avLst/>
+          </a:prstGeom>
+          <a:noFill/>
+        </p:spPr>
+        <p:txBody>
+          <a:bodyPr wrap="square" anchor="t" lIns="0" rIns="0" tIns="0" bIns="0">
+            <a:normAutofit/>
+          </a:bodyPr>
+          <a:lstStyle/>
+          <a:p>
+            <a:pPr algn="ctr">
+              <a:lnSpc>
+                <a:spcPct val="120000"/>
+              </a:lnSpc>
+            </a:pPr>
+            <a:r>
+              <a:rPr sz="2800" b="0" i="1">
+                <a:solidFill>
+                  <a:srgbClr val="F5F5F0"/>
+                </a:solidFill>
+                <a:latin typeface="Liberation Sans"/>
+              </a:rPr>
+              <a:t>A real-time risk duel on Solana.</a:t>
+            </a:r>
+          </a:p>
+        </p:txBody>
+      </p:sp>
+      <p:sp>
+        <p:nvSpPr>
+          <p:cNvPr id="7" name="Rounded Rectangle 6"/>
           <p:cNvSpPr/>
           <p:nvPr/>
         </p:nvSpPr>
         <p:spPr>
           <a:xfrm>
-            <a:off x="548640" y="1554480"/>
-            <a:ext cx="164592" cy="164592"/>
-          </a:xfrm>
-          <a:prstGeom prst="ellipse">
-            <a:avLst/>
-          </a:prstGeom>
-          <a:solidFill>
-            <a:srgbClr val="00FF85"/>
-          </a:solidFill>
-          <a:ln>
-            <a:noFill/>
-          </a:ln>
-        </p:spPr>
-        <p:style>
-          <a:lnRef idx="1">
-            <a:schemeClr val="accent1"/>
-          </a:lnRef>
-          <a:fillRef idx="3">
-            <a:schemeClr val="accent1"/>
-          </a:fillRef>
-          <a:effectRef idx="2">
-            <a:schemeClr val="accent1"/>
-          </a:effectRef>
-          <a:fontRef idx="minor">
-            <a:schemeClr val="lt1"/>
-          </a:fontRef>
-        </p:style>
-        <p:txBody>
-          <a:bodyPr rtlCol="0" anchor="ctr"/>
-          <a:lstStyle/>
-          <a:p>
-            <a:pPr algn="ctr"/>
-          </a:p>
-        </p:txBody>
-      </p:sp>
-      <p:sp>
-        <p:nvSpPr>
-          <p:cNvPr id="6" name="TextBox 5"/>
-          <p:cNvSpPr txBox="1"/>
-          <p:nvPr/>
-        </p:nvSpPr>
-        <p:spPr>
-          <a:xfrm>
-            <a:off x="822960" y="1371600"/>
-            <a:ext cx="10972800" cy="1371600"/>
-          </a:xfrm>
-          <a:prstGeom prst="rect">
-            <a:avLst/>
-          </a:prstGeom>
-          <a:noFill/>
-        </p:spPr>
-        <p:txBody>
-          <a:bodyPr wrap="square" anchor="t" lIns="0" rIns="0" tIns="0" bIns="0">
-            <a:spAutoFit/>
-          </a:bodyPr>
-          <a:lstStyle/>
-          <a:p>
-            <a:pPr algn="l">
-              <a:lnSpc>
-                <a:spcPct val="120000"/>
-              </a:lnSpc>
-            </a:pPr>
-            <a:r>
-              <a:rPr sz="7200" b="1" i="0">
-                <a:solidFill>
-                  <a:srgbClr val="F5F5F0"/>
-                </a:solidFill>
-                <a:latin typeface="Oxanium"/>
-              </a:rPr>
-              <a:t>Conviction</a:t>
-            </a:r>
-          </a:p>
-        </p:txBody>
-      </p:sp>
-      <p:sp>
-        <p:nvSpPr>
-          <p:cNvPr id="7" name="TextBox 6"/>
-          <p:cNvSpPr txBox="1"/>
-          <p:nvPr/>
-        </p:nvSpPr>
-        <p:spPr>
-          <a:xfrm>
-            <a:off x="548640" y="2834640"/>
-            <a:ext cx="10972800" cy="548640"/>
-          </a:xfrm>
-          <a:prstGeom prst="rect">
-            <a:avLst/>
-          </a:prstGeom>
-          <a:noFill/>
-        </p:spPr>
-        <p:txBody>
-          <a:bodyPr wrap="square" anchor="t" lIns="0" rIns="0" tIns="0" bIns="0">
-            <a:spAutoFit/>
-          </a:bodyPr>
-          <a:lstStyle/>
-          <a:p>
-            <a:pPr algn="l">
-              <a:lnSpc>
-                <a:spcPct val="120000"/>
-              </a:lnSpc>
-            </a:pPr>
-            <a:r>
-              <a:rPr sz="2200" b="0" i="1">
-                <a:solidFill>
-                  <a:srgbClr val="A0A0A0"/>
-                </a:solidFill>
-                <a:latin typeface="Inter"/>
-              </a:rPr>
-              <a:t>A real-time risk duel on Solana.</a:t>
-            </a:r>
-          </a:p>
-        </p:txBody>
-      </p:sp>
-      <p:sp>
-        <p:nvSpPr>
-          <p:cNvPr id="8" name="Rounded Rectangle 7"/>
-          <p:cNvSpPr/>
-          <p:nvPr/>
-        </p:nvSpPr>
-        <p:spPr>
-          <a:xfrm>
-            <a:off x="548640" y="3703320"/>
-            <a:ext cx="1225296" cy="457200"/>
+            <a:off x="3044037" y="5166360"/>
+            <a:ext cx="1225296" cy="310896"/>
           </a:xfrm>
           <a:prstGeom prst="roundRect">
             <a:avLst/>
@@ -3385,7 +3327,7 @@
           </a:fontRef>
         </p:style>
         <p:txBody>
-          <a:bodyPr rtlCol="0" anchor="ctr" lIns="146304" rIns="146304" tIns="73152" bIns="73152" wrap="none"/>
+          <a:bodyPr rtlCol="0" anchor="ctr" lIns="146304" rIns="146304" tIns="54864" bIns="54864" wrap="none"/>
           <a:lstStyle/>
           <a:p>
             <a:pPr algn="ctr"/>
@@ -3394,7 +3336,7 @@
                 <a:solidFill>
                   <a:srgbClr val="00FF85"/>
                 </a:solidFill>
-                <a:latin typeface="JetBrains Mono"/>
+                <a:latin typeface="Liberation Mono"/>
               </a:rPr>
               <a:t>TEAM VS TEAM</a:t>
             </a:r>
@@ -3403,14 +3345,14 @@
       </p:sp>
       <p:sp>
         <p:nvSpPr>
-          <p:cNvPr id="9" name="Rounded Rectangle 8"/>
+          <p:cNvPr id="8" name="Rounded Rectangle 7"/>
           <p:cNvSpPr/>
           <p:nvPr/>
         </p:nvSpPr>
         <p:spPr>
           <a:xfrm>
-            <a:off x="1920240" y="3703320"/>
-            <a:ext cx="1613916" cy="457200"/>
+            <a:off x="4543653" y="5166360"/>
+            <a:ext cx="1613916" cy="310896"/>
           </a:xfrm>
           <a:prstGeom prst="roundRect">
             <a:avLst/>
@@ -3439,7 +3381,7 @@
           </a:fontRef>
         </p:style>
         <p:txBody>
-          <a:bodyPr rtlCol="0" anchor="ctr" lIns="146304" rIns="146304" tIns="73152" bIns="73152" wrap="none"/>
+          <a:bodyPr rtlCol="0" anchor="ctr" lIns="146304" rIns="146304" tIns="54864" bIns="54864" wrap="none"/>
           <a:lstStyle/>
           <a:p>
             <a:pPr algn="ctr"/>
@@ -3448,7 +3390,7 @@
                 <a:solidFill>
                   <a:srgbClr val="4A9EFF"/>
                 </a:solidFill>
-                <a:latin typeface="JetBrains Mono"/>
+                <a:latin typeface="Liberation Mono"/>
               </a:rPr>
               <a:t>HIDDEN THRESHOLDS</a:t>
             </a:r>
@@ -3457,14 +3399,14 @@
       </p:sp>
       <p:sp>
         <p:nvSpPr>
-          <p:cNvPr id="10" name="Rounded Rectangle 9"/>
+          <p:cNvPr id="9" name="Rounded Rectangle 8"/>
           <p:cNvSpPr/>
           <p:nvPr/>
         </p:nvSpPr>
         <p:spPr>
           <a:xfrm>
-            <a:off x="3680460" y="3703320"/>
-            <a:ext cx="992124" cy="457200"/>
+            <a:off x="6431889" y="5166360"/>
+            <a:ext cx="992124" cy="310896"/>
           </a:xfrm>
           <a:prstGeom prst="roundRect">
             <a:avLst/>
@@ -3493,7 +3435,7 @@
           </a:fontRef>
         </p:style>
         <p:txBody>
-          <a:bodyPr rtlCol="0" anchor="ctr" lIns="146304" rIns="146304" tIns="73152" bIns="73152" wrap="none"/>
+          <a:bodyPr rtlCol="0" anchor="ctr" lIns="146304" rIns="146304" tIns="54864" bIns="54864" wrap="none"/>
           <a:lstStyle/>
           <a:p>
             <a:pPr algn="ctr"/>
@@ -3502,7 +3444,7 @@
                 <a:solidFill>
                   <a:srgbClr val="FFD23F"/>
                 </a:solidFill>
-                <a:latin typeface="JetBrains Mono"/>
+                <a:latin typeface="Liberation Mono"/>
               </a:rPr>
               <a:t>VRF CHAOS</a:t>
             </a:r>
@@ -3511,14 +3453,14 @@
       </p:sp>
       <p:sp>
         <p:nvSpPr>
-          <p:cNvPr id="11" name="Rounded Rectangle 10"/>
+          <p:cNvPr id="10" name="Rounded Rectangle 9"/>
           <p:cNvSpPr/>
           <p:nvPr/>
         </p:nvSpPr>
         <p:spPr>
           <a:xfrm>
-            <a:off x="4818888" y="3703320"/>
-            <a:ext cx="1613916" cy="457200"/>
+            <a:off x="7698333" y="5166360"/>
+            <a:ext cx="1613916" cy="310896"/>
           </a:xfrm>
           <a:prstGeom prst="roundRect">
             <a:avLst/>
@@ -3547,7 +3489,7 @@
           </a:fontRef>
         </p:style>
         <p:txBody>
-          <a:bodyPr rtlCol="0" anchor="ctr" lIns="146304" rIns="146304" tIns="73152" bIns="73152" wrap="none"/>
+          <a:bodyPr rtlCol="0" anchor="ctr" lIns="146304" rIns="146304" tIns="54864" bIns="54864" wrap="none"/>
           <a:lstStyle/>
           <a:p>
             <a:pPr algn="ctr"/>
@@ -3556,7 +3498,7 @@
                 <a:solidFill>
                   <a:srgbClr val="9D4EDD"/>
                 </a:solidFill>
-                <a:latin typeface="JetBrains Mono"/>
+                <a:latin typeface="Liberation Mono"/>
               </a:rPr>
               <a:t>GOVERNANCE-DRIVEN</a:t>
             </a:r>
@@ -3565,14 +3507,53 @@
       </p:sp>
       <p:sp>
         <p:nvSpPr>
+          <p:cNvPr id="11" name="TextBox 10"/>
+          <p:cNvSpPr txBox="1"/>
+          <p:nvPr/>
+        </p:nvSpPr>
+        <p:spPr>
+          <a:xfrm>
+            <a:off x="548640" y="5989320"/>
+            <a:ext cx="11064240" cy="320040"/>
+          </a:xfrm>
+          <a:prstGeom prst="rect">
+            <a:avLst/>
+          </a:prstGeom>
+          <a:noFill/>
+        </p:spPr>
+        <p:txBody>
+          <a:bodyPr wrap="square" anchor="t" lIns="0" rIns="0" tIns="0" bIns="0">
+            <a:spAutoFit/>
+          </a:bodyPr>
+          <a:lstStyle/>
+          <a:p>
+            <a:pPr algn="ctr">
+              <a:lnSpc>
+                <a:spcPct val="120000"/>
+              </a:lnSpc>
+            </a:pPr>
+            <a:r>
+              <a:rPr sz="1200" b="0" i="0">
+                <a:solidFill>
+                  <a:srgbClr val="A0A0A0"/>
+                </a:solidFill>
+                <a:latin typeface="Liberation Mono"/>
+              </a:rPr>
+              <a:t>LIVE  conviction-nine.vercel.app  ·  Rujul · Sep 2026</a:t>
+            </a:r>
+          </a:p>
+        </p:txBody>
+      </p:sp>
+      <p:sp>
+        <p:nvSpPr>
           <p:cNvPr id="12" name="TextBox 11"/>
           <p:cNvSpPr txBox="1"/>
           <p:nvPr/>
         </p:nvSpPr>
         <p:spPr>
           <a:xfrm>
-            <a:off x="548640" y="5852160"/>
-            <a:ext cx="10972800" cy="274320"/>
+            <a:off x="548640" y="6355080"/>
+            <a:ext cx="11064240" cy="320040"/>
           </a:xfrm>
           <a:prstGeom prst="rect">
             <a:avLst/>
@@ -3585,58 +3566,19 @@
           </a:bodyPr>
           <a:lstStyle/>
           <a:p>
-            <a:pPr algn="l">
+            <a:pPr algn="ctr">
               <a:lnSpc>
                 <a:spcPct val="120000"/>
               </a:lnSpc>
             </a:pPr>
             <a:r>
-              <a:rPr sz="1400" b="0" i="0">
-                <a:solidFill>
-                  <a:srgbClr val="F5F5F0"/>
-                </a:solidFill>
-                <a:latin typeface="Inter"/>
-              </a:rPr>
-              <a:t>Rujul · @rujulmatta</a:t>
-            </a:r>
-          </a:p>
-        </p:txBody>
-      </p:sp>
-      <p:sp>
-        <p:nvSpPr>
-          <p:cNvPr id="13" name="TextBox 12"/>
-          <p:cNvSpPr txBox="1"/>
-          <p:nvPr/>
-        </p:nvSpPr>
-        <p:spPr>
-          <a:xfrm>
-            <a:off x="548640" y="6217920"/>
-            <a:ext cx="10972800" cy="274320"/>
-          </a:xfrm>
-          <a:prstGeom prst="rect">
-            <a:avLst/>
-          </a:prstGeom>
-          <a:noFill/>
-        </p:spPr>
-        <p:txBody>
-          <a:bodyPr wrap="square" anchor="t" lIns="0" rIns="0" tIns="0" bIns="0">
-            <a:spAutoFit/>
-          </a:bodyPr>
-          <a:lstStyle/>
-          <a:p>
-            <a:pPr algn="l">
-              <a:lnSpc>
-                <a:spcPct val="120000"/>
-              </a:lnSpc>
-            </a:pPr>
-            <a:r>
-              <a:rPr sz="1200" b="0" i="0">
+              <a:rPr sz="1100" b="0" i="0">
                 <a:solidFill>
                   <a:srgbClr val="6B6B6B"/>
                 </a:solidFill>
-                <a:latin typeface="JetBrains Mono"/>
-              </a:rPr>
-              <a:t>conviction-nine.vercel.app · Sep 2026</a:t>
+                <a:latin typeface="Liberation Mono"/>
+              </a:rPr>
+              <a:t>Fh6b…JHJbH  ·  devnet</a:t>
             </a:r>
           </a:p>
         </p:txBody>
@@ -3754,7 +3696,7 @@
         <p:spPr>
           <a:xfrm>
             <a:off x="548640" y="411480"/>
-            <a:ext cx="10972800" cy="365760"/>
+            <a:ext cx="10972800" cy="292608"/>
           </a:xfrm>
           <a:prstGeom prst="rect">
             <a:avLst/>
@@ -3773,13 +3715,13 @@
               </a:lnSpc>
             </a:pPr>
             <a:r>
-              <a:rPr sz="1100" b="1" i="0">
+              <a:rPr sz="1000" b="1" i="0">
                 <a:solidFill>
                   <a:srgbClr val="FFD23F"/>
                 </a:solidFill>
-                <a:latin typeface="JetBrains Mono"/>
-              </a:rPr>
-              <a:t>09 · UPCOMING</a:t>
+                <a:latin typeface="Liberation Mono"/>
+              </a:rPr>
+              <a:t>09  ·  UPCOMING</a:t>
             </a:r>
           </a:p>
         </p:txBody>
@@ -3793,16 +3735,16 @@
         <p:spPr>
           <a:xfrm>
             <a:off x="548640" y="777240"/>
-            <a:ext cx="10972800" cy="914400"/>
-          </a:xfrm>
-          <a:prstGeom prst="rect">
-            <a:avLst/>
-          </a:prstGeom>
-          <a:noFill/>
-        </p:spPr>
-        <p:txBody>
-          <a:bodyPr wrap="square" anchor="t" lIns="0" rIns="0" tIns="0" bIns="0">
-            <a:spAutoFit/>
+            <a:ext cx="11064240" cy="868680"/>
+          </a:xfrm>
+          <a:prstGeom prst="rect">
+            <a:avLst/>
+          </a:prstGeom>
+          <a:noFill/>
+        </p:spPr>
+        <p:txBody>
+          <a:bodyPr wrap="square" anchor="t" lIns="0" rIns="0" tIns="0" bIns="0">
+            <a:normAutofit/>
           </a:bodyPr>
           <a:lstStyle/>
           <a:p>
@@ -3812,11 +3754,11 @@
               </a:lnSpc>
             </a:pPr>
             <a:r>
-              <a:rPr sz="4000" b="1" i="0">
+              <a:rPr sz="3600" b="1" i="0">
                 <a:solidFill>
                   <a:srgbClr val="F5F5F0"/>
                 </a:solidFill>
-                <a:latin typeface="Oxanium"/>
+                <a:latin typeface="Liberation Sans"/>
               </a:rPr>
               <a:t>Spectator PER-sealed bids.</a:t>
             </a:r>
@@ -3831,17 +3773,17 @@
         </p:nvSpPr>
         <p:spPr>
           <a:xfrm>
-            <a:off x="548640" y="2011680"/>
-            <a:ext cx="10972800" cy="457200"/>
-          </a:xfrm>
-          <a:prstGeom prst="rect">
-            <a:avLst/>
-          </a:prstGeom>
-          <a:noFill/>
-        </p:spPr>
-        <p:txBody>
-          <a:bodyPr wrap="square" anchor="t" lIns="0" rIns="0" tIns="0" bIns="0">
-            <a:spAutoFit/>
+            <a:off x="548640" y="1691640"/>
+            <a:ext cx="11064240" cy="502920"/>
+          </a:xfrm>
+          <a:prstGeom prst="rect">
+            <a:avLst/>
+          </a:prstGeom>
+          <a:noFill/>
+        </p:spPr>
+        <p:txBody>
+          <a:bodyPr wrap="square" anchor="t" lIns="0" rIns="0" tIns="0" bIns="0">
+            <a:normAutofit/>
           </a:bodyPr>
           <a:lstStyle/>
           <a:p>
@@ -3855,7 +3797,7 @@
                 <a:solidFill>
                   <a:srgbClr val="A0A0A0"/>
                 </a:solidFill>
-                <a:latin typeface="Inter"/>
+                <a:latin typeface="Liberation Sans"/>
               </a:rPr>
               <a:t>A prediction market that runs alongside the round.</a:t>
             </a:r>
@@ -3870,8 +3812,8 @@
         </p:nvSpPr>
         <p:spPr>
           <a:xfrm>
-            <a:off x="548640" y="2743200"/>
-            <a:ext cx="45720" cy="548640"/>
+            <a:off x="548640" y="2834640"/>
+            <a:ext cx="54864" cy="640080"/>
           </a:xfrm>
           <a:prstGeom prst="rect">
             <a:avLst/>
@@ -3913,8 +3855,8 @@
         </p:nvSpPr>
         <p:spPr>
           <a:xfrm>
-            <a:off x="777240" y="2715768"/>
-            <a:ext cx="1463040" cy="274320"/>
+            <a:off x="822960" y="2807208"/>
+            <a:ext cx="1463040" cy="292608"/>
           </a:xfrm>
           <a:prstGeom prst="rect">
             <a:avLst/>
@@ -3937,7 +3879,7 @@
                 <a:solidFill>
                   <a:srgbClr val="FFD23F"/>
                 </a:solidFill>
-                <a:latin typeface="JetBrains Mono"/>
+                <a:latin typeface="Liberation Mono"/>
               </a:rPr>
               <a:t>1. PLACE</a:t>
             </a:r>
@@ -3952,17 +3894,17 @@
         </p:nvSpPr>
         <p:spPr>
           <a:xfrm>
-            <a:off x="2286000" y="2697480"/>
-            <a:ext cx="9418320" cy="548640"/>
-          </a:xfrm>
-          <a:prstGeom prst="rect">
-            <a:avLst/>
-          </a:prstGeom>
-          <a:noFill/>
-        </p:spPr>
-        <p:txBody>
-          <a:bodyPr wrap="square" anchor="t" lIns="0" rIns="0" tIns="0" bIns="0">
-            <a:spAutoFit/>
+            <a:off x="2377440" y="2788920"/>
+            <a:ext cx="9144000" cy="640080"/>
+          </a:xfrm>
+          <a:prstGeom prst="rect">
+            <a:avLst/>
+          </a:prstGeom>
+          <a:noFill/>
+        </p:spPr>
+        <p:txBody>
+          <a:bodyPr wrap="square" anchor="t" lIns="0" rIns="0" tIns="0" bIns="0">
+            <a:normAutofit/>
           </a:bodyPr>
           <a:lstStyle/>
           <a:p>
@@ -3976,9 +3918,9 @@
                 <a:solidFill>
                   <a:srgbClr val="F5F5F0"/>
                 </a:solidFill>
-                <a:latin typeface="Inter"/>
-              </a:rPr>
-              <a:t>Spectators commit a hashed prediction + amount to /spectate/[id]. The bid is sealed behind a PER member-set so the rival can't see the prediction pool.</a:t>
+                <a:latin typeface="Liberation Sans"/>
+              </a:rPr>
+              <a:t>Spectators commit a hashed prediction + amount to /spectate/[id]. The bid is sealed behind a PER member-set so the rival can't see the pool.</a:t>
             </a:r>
           </a:p>
         </p:txBody>
@@ -3991,8 +3933,8 @@
         </p:nvSpPr>
         <p:spPr>
           <a:xfrm>
-            <a:off x="548640" y="3429000"/>
-            <a:ext cx="45720" cy="548640"/>
+            <a:off x="548640" y="3547872"/>
+            <a:ext cx="54864" cy="640080"/>
           </a:xfrm>
           <a:prstGeom prst="rect">
             <a:avLst/>
@@ -4034,8 +3976,8 @@
         </p:nvSpPr>
         <p:spPr>
           <a:xfrm>
-            <a:off x="777240" y="3401568"/>
-            <a:ext cx="1463040" cy="274320"/>
+            <a:off x="822960" y="3520440"/>
+            <a:ext cx="1463040" cy="292608"/>
           </a:xfrm>
           <a:prstGeom prst="rect">
             <a:avLst/>
@@ -4058,7 +4000,7 @@
                 <a:solidFill>
                   <a:srgbClr val="FFD23F"/>
                 </a:solidFill>
-                <a:latin typeface="JetBrains Mono"/>
+                <a:latin typeface="Liberation Mono"/>
               </a:rPr>
               <a:t>2. WAIT</a:t>
             </a:r>
@@ -4073,17 +4015,17 @@
         </p:nvSpPr>
         <p:spPr>
           <a:xfrm>
-            <a:off x="2286000" y="3383280"/>
-            <a:ext cx="9418320" cy="548640"/>
-          </a:xfrm>
-          <a:prstGeom prst="rect">
-            <a:avLst/>
-          </a:prstGeom>
-          <a:noFill/>
-        </p:spPr>
-        <p:txBody>
-          <a:bodyPr wrap="square" anchor="t" lIns="0" rIns="0" tIns="0" bIns="0">
-            <a:spAutoFit/>
+            <a:off x="2377440" y="3502152"/>
+            <a:ext cx="9144000" cy="640080"/>
+          </a:xfrm>
+          <a:prstGeom prst="rect">
+            <a:avLst/>
+          </a:prstGeom>
+          <a:noFill/>
+        </p:spPr>
+        <p:txBody>
+          <a:bodyPr wrap="square" anchor="t" lIns="0" rIns="0" tIns="0" bIns="0">
+            <a:normAutofit/>
           </a:bodyPr>
           <a:lstStyle/>
           <a:p>
@@ -4097,7 +4039,7 @@
                 <a:solidFill>
                   <a:srgbClr val="F5F5F0"/>
                 </a:solidFill>
-                <a:latin typeface="Inter"/>
+                <a:latin typeface="Liberation Sans"/>
               </a:rPr>
               <a:t>Round plays out. Bids stay sealed.</a:t>
             </a:r>
@@ -4112,8 +4054,8 @@
         </p:nvSpPr>
         <p:spPr>
           <a:xfrm>
-            <a:off x="548640" y="4114800"/>
-            <a:ext cx="45720" cy="548640"/>
+            <a:off x="548640" y="4261104"/>
+            <a:ext cx="54864" cy="640080"/>
           </a:xfrm>
           <a:prstGeom prst="rect">
             <a:avLst/>
@@ -4155,8 +4097,8 @@
         </p:nvSpPr>
         <p:spPr>
           <a:xfrm>
-            <a:off x="777240" y="4087368"/>
-            <a:ext cx="1463040" cy="274320"/>
+            <a:off x="822960" y="4233672"/>
+            <a:ext cx="1463040" cy="292608"/>
           </a:xfrm>
           <a:prstGeom prst="rect">
             <a:avLst/>
@@ -4179,7 +4121,7 @@
                 <a:solidFill>
                   <a:srgbClr val="FFD23F"/>
                 </a:solidFill>
-                <a:latin typeface="JetBrains Mono"/>
+                <a:latin typeface="Liberation Mono"/>
               </a:rPr>
               <a:t>3. REVEAL</a:t>
             </a:r>
@@ -4194,17 +4136,17 @@
         </p:nvSpPr>
         <p:spPr>
           <a:xfrm>
-            <a:off x="2286000" y="4069080"/>
-            <a:ext cx="9418320" cy="548640"/>
-          </a:xfrm>
-          <a:prstGeom prst="rect">
-            <a:avLst/>
-          </a:prstGeom>
-          <a:noFill/>
-        </p:spPr>
-        <p:txBody>
-          <a:bodyPr wrap="square" anchor="t" lIns="0" rIns="0" tIns="0" bIns="0">
-            <a:spAutoFit/>
+            <a:off x="2377440" y="4215384"/>
+            <a:ext cx="9144000" cy="640080"/>
+          </a:xfrm>
+          <a:prstGeom prst="rect">
+            <a:avLst/>
+          </a:prstGeom>
+          <a:noFill/>
+        </p:spPr>
+        <p:txBody>
+          <a:bodyPr wrap="square" anchor="t" lIns="0" rIns="0" tIns="0" bIns="0">
+            <a:normAutofit/>
           </a:bodyPr>
           <a:lstStyle/>
           <a:p>
@@ -4218,7 +4160,7 @@
                 <a:solidFill>
                   <a:srgbClr val="F5F5F0"/>
                 </a:solidFill>
-                <a:latin typeface="Inter"/>
+                <a:latin typeface="Liberation Sans"/>
               </a:rPr>
               <a:t>At reveal_round, PER opens. Preimages are checked against on-chain outcomes (first-fold, last-holding, chaos-count, perfect-round).</a:t>
             </a:r>
@@ -4233,8 +4175,8 @@
         </p:nvSpPr>
         <p:spPr>
           <a:xfrm>
-            <a:off x="548640" y="4800600"/>
-            <a:ext cx="45720" cy="548640"/>
+            <a:off x="548640" y="4974336"/>
+            <a:ext cx="54864" cy="640080"/>
           </a:xfrm>
           <a:prstGeom prst="rect">
             <a:avLst/>
@@ -4276,8 +4218,8 @@
         </p:nvSpPr>
         <p:spPr>
           <a:xfrm>
-            <a:off x="777240" y="4773168"/>
-            <a:ext cx="1463040" cy="274320"/>
+            <a:off x="822960" y="4946904"/>
+            <a:ext cx="1463040" cy="292608"/>
           </a:xfrm>
           <a:prstGeom prst="rect">
             <a:avLst/>
@@ -4300,7 +4242,7 @@
                 <a:solidFill>
                   <a:srgbClr val="FFD23F"/>
                 </a:solidFill>
-                <a:latin typeface="JetBrains Mono"/>
+                <a:latin typeface="Liberation Mono"/>
               </a:rPr>
               <a:t>4. SETTLE</a:t>
             </a:r>
@@ -4315,17 +4257,17 @@
         </p:nvSpPr>
         <p:spPr>
           <a:xfrm>
-            <a:off x="2286000" y="4754880"/>
-            <a:ext cx="9418320" cy="548640"/>
-          </a:xfrm>
-          <a:prstGeom prst="rect">
-            <a:avLst/>
-          </a:prstGeom>
-          <a:noFill/>
-        </p:spPr>
-        <p:txBody>
-          <a:bodyPr wrap="square" anchor="t" lIns="0" rIns="0" tIns="0" bIns="0">
-            <a:spAutoFit/>
+            <a:off x="2377440" y="4928616"/>
+            <a:ext cx="9144000" cy="640080"/>
+          </a:xfrm>
+          <a:prstGeom prst="rect">
+            <a:avLst/>
+          </a:prstGeom>
+          <a:noFill/>
+        </p:spPr>
+        <p:txBody>
+          <a:bodyPr wrap="square" anchor="t" lIns="0" rIns="0" tIns="0" bIns="0">
+            <a:normAutofit/>
           </a:bodyPr>
           <a:lstStyle/>
           <a:p>
@@ -4339,9 +4281,9 @@
                 <a:solidFill>
                   <a:srgbClr val="F5F5F0"/>
                 </a:solidFill>
-                <a:latin typeface="Inter"/>
-              </a:rPr>
-              <a:t>Correct bids win the pool (minus a small house cut). FTR minted to top predictors earns the "Whale Watcher" badge.</a:t>
+                <a:latin typeface="Liberation Sans"/>
+              </a:rPr>
+              <a:t>Correct bids win the pool (minus a small house cut). Top predictors earn the "Whale Watcher" badge.</a:t>
             </a:r>
           </a:p>
         </p:txBody>
@@ -4354,8 +4296,8 @@
         </p:nvSpPr>
         <p:spPr>
           <a:xfrm>
-            <a:off x="548640" y="5760720"/>
-            <a:ext cx="11064240" cy="868680"/>
+            <a:off x="548640" y="5852160"/>
+            <a:ext cx="11064240" cy="777240"/>
           </a:xfrm>
           <a:prstGeom prst="rect">
             <a:avLst/>
@@ -4397,8 +4339,8 @@
         </p:nvSpPr>
         <p:spPr>
           <a:xfrm>
-            <a:off x="777240" y="5852160"/>
-            <a:ext cx="10515600" cy="320040"/>
+            <a:off x="777240" y="5943600"/>
+            <a:ext cx="10515600" cy="292608"/>
           </a:xfrm>
           <a:prstGeom prst="rect">
             <a:avLst/>
@@ -4417,11 +4359,11 @@
               </a:lnSpc>
             </a:pPr>
             <a:r>
-              <a:rPr sz="1100" b="1" i="0">
+              <a:rPr sz="1000" b="1" i="0">
                 <a:solidFill>
                   <a:srgbClr val="FFD23F"/>
                 </a:solidFill>
-                <a:latin typeface="JetBrains Mono"/>
+                <a:latin typeface="Liberation Mono"/>
               </a:rPr>
               <a:t>WHY IT MATTERS</a:t>
             </a:r>
@@ -4436,8 +4378,8 @@
         </p:nvSpPr>
         <p:spPr>
           <a:xfrm>
-            <a:off x="777240" y="6172200"/>
-            <a:ext cx="10515600" cy="457200"/>
+            <a:off x="777240" y="6236208"/>
+            <a:ext cx="10515600" cy="365760"/>
           </a:xfrm>
           <a:prstGeom prst="rect">
             <a:avLst/>
@@ -4456,11 +4398,11 @@
               </a:lnSpc>
             </a:pPr>
             <a:r>
-              <a:rPr sz="1300" b="0" i="1">
+              <a:rPr sz="1200" b="0" i="1">
                 <a:solidFill>
                   <a:srgbClr val="F5F5F0"/>
                 </a:solidFill>
-                <a:latin typeface="Inter"/>
+                <a:latin typeface="Liberation Sans"/>
               </a:rPr>
               <a:t>Spectator bids are the second economy. They make the watch-as-good-as-play thesis real.</a:t>
             </a:r>
@@ -4580,7 +4522,7 @@
         <p:spPr>
           <a:xfrm>
             <a:off x="548640" y="411480"/>
-            <a:ext cx="10972800" cy="365760"/>
+            <a:ext cx="10972800" cy="292608"/>
           </a:xfrm>
           <a:prstGeom prst="rect">
             <a:avLst/>
@@ -4599,13 +4541,13 @@
               </a:lnSpc>
             </a:pPr>
             <a:r>
-              <a:rPr sz="1100" b="1" i="0">
+              <a:rPr sz="1000" b="1" i="0">
                 <a:solidFill>
                   <a:srgbClr val="00FF85"/>
                 </a:solidFill>
-                <a:latin typeface="JetBrains Mono"/>
-              </a:rPr>
-              <a:t>10 · UPCOMING</a:t>
+                <a:latin typeface="Liberation Mono"/>
+              </a:rPr>
+              <a:t>10  ·  UPCOMING</a:t>
             </a:r>
           </a:p>
         </p:txBody>
@@ -4619,16 +4561,16 @@
         <p:spPr>
           <a:xfrm>
             <a:off x="548640" y="777240"/>
-            <a:ext cx="10972800" cy="914400"/>
-          </a:xfrm>
-          <a:prstGeom prst="rect">
-            <a:avLst/>
-          </a:prstGeom>
-          <a:noFill/>
-        </p:spPr>
-        <p:txBody>
-          <a:bodyPr wrap="square" anchor="t" lIns="0" rIns="0" tIns="0" bIns="0">
-            <a:spAutoFit/>
+            <a:ext cx="11064240" cy="868680"/>
+          </a:xfrm>
+          <a:prstGeom prst="rect">
+            <a:avLst/>
+          </a:prstGeom>
+          <a:noFill/>
+        </p:spPr>
+        <p:txBody>
+          <a:bodyPr wrap="square" anchor="t" lIns="0" rIns="0" tIns="0" bIns="0">
+            <a:normAutofit/>
           </a:bodyPr>
           <a:lstStyle/>
           <a:p>
@@ -4638,11 +4580,11 @@
               </a:lnSpc>
             </a:pPr>
             <a:r>
-              <a:rPr sz="4000" b="1" i="0">
+              <a:rPr sz="3600" b="1" i="0">
                 <a:solidFill>
                   <a:srgbClr val="F5F5F0"/>
                 </a:solidFill>
-                <a:latin typeface="Oxanium"/>
+                <a:latin typeface="Liberation Sans"/>
               </a:rPr>
               <a:t>Token universe governance.</a:t>
             </a:r>
@@ -4657,17 +4599,17 @@
         </p:nvSpPr>
         <p:spPr>
           <a:xfrm>
-            <a:off x="548640" y="2011680"/>
-            <a:ext cx="10972800" cy="457200"/>
-          </a:xfrm>
-          <a:prstGeom prst="rect">
-            <a:avLst/>
-          </a:prstGeom>
-          <a:noFill/>
-        </p:spPr>
-        <p:txBody>
-          <a:bodyPr wrap="square" anchor="t" lIns="0" rIns="0" tIns="0" bIns="0">
-            <a:spAutoFit/>
+            <a:off x="548640" y="1691640"/>
+            <a:ext cx="11064240" cy="502920"/>
+          </a:xfrm>
+          <a:prstGeom prst="rect">
+            <a:avLst/>
+          </a:prstGeom>
+          <a:noFill/>
+        </p:spPr>
+        <p:txBody>
+          <a:bodyPr wrap="square" anchor="t" lIns="0" rIns="0" tIns="0" bIns="0">
+            <a:normAutofit/>
           </a:bodyPr>
           <a:lstStyle/>
           <a:p>
@@ -4681,7 +4623,7 @@
                 <a:solidFill>
                   <a:srgbClr val="A0A0A0"/>
                 </a:solidFill>
-                <a:latin typeface="Inter"/>
+                <a:latin typeface="Liberation Sans"/>
               </a:rPr>
               <a:t>FTR holders curate which SPL mints are eligible to be picked.</a:t>
             </a:r>
@@ -4696,8 +4638,8 @@
         </p:nvSpPr>
         <p:spPr>
           <a:xfrm>
-            <a:off x="548640" y="2743200"/>
-            <a:ext cx="45720" cy="548640"/>
+            <a:off x="548640" y="2834640"/>
+            <a:ext cx="54864" cy="640080"/>
           </a:xfrm>
           <a:prstGeom prst="rect">
             <a:avLst/>
@@ -4739,8 +4681,8 @@
         </p:nvSpPr>
         <p:spPr>
           <a:xfrm>
-            <a:off x="777240" y="2715768"/>
-            <a:ext cx="1463040" cy="274320"/>
+            <a:off x="822960" y="2807208"/>
+            <a:ext cx="1463040" cy="292608"/>
           </a:xfrm>
           <a:prstGeom prst="rect">
             <a:avLst/>
@@ -4763,7 +4705,7 @@
                 <a:solidFill>
                   <a:srgbClr val="00FF85"/>
                 </a:solidFill>
-                <a:latin typeface="JetBrains Mono"/>
+                <a:latin typeface="Liberation Mono"/>
               </a:rPr>
               <a:t>1. PROPOSE</a:t>
             </a:r>
@@ -4778,17 +4720,17 @@
         </p:nvSpPr>
         <p:spPr>
           <a:xfrm>
-            <a:off x="2286000" y="2697480"/>
-            <a:ext cx="9418320" cy="548640"/>
-          </a:xfrm>
-          <a:prstGeom prst="rect">
-            <a:avLst/>
-          </a:prstGeom>
-          <a:noFill/>
-        </p:spPr>
-        <p:txBody>
-          <a:bodyPr wrap="square" anchor="t" lIns="0" rIns="0" tIns="0" bIns="0">
-            <a:spAutoFit/>
+            <a:off x="2377440" y="2788920"/>
+            <a:ext cx="9144000" cy="640080"/>
+          </a:xfrm>
+          <a:prstGeom prst="rect">
+            <a:avLst/>
+          </a:prstGeom>
+          <a:noFill/>
+        </p:spPr>
+        <p:txBody>
+          <a:bodyPr wrap="square" anchor="t" lIns="0" rIns="0" tIns="0" bIns="0">
+            <a:normAutofit/>
           </a:bodyPr>
           <a:lstStyle/>
           <a:p>
@@ -4802,7 +4744,7 @@
                 <a:solidFill>
                   <a:srgbClr val="F5F5F0"/>
                 </a:solidFill>
-                <a:latin typeface="Inter"/>
+                <a:latin typeface="Liberation Sans"/>
               </a:rPr>
               <a:t>Any FTR holder calls proposeAddToken with a SPL mint address + a short rationale. The proposal hits the chain immediately.</a:t>
             </a:r>
@@ -4817,8 +4759,8 @@
         </p:nvSpPr>
         <p:spPr>
           <a:xfrm>
-            <a:off x="548640" y="3429000"/>
-            <a:ext cx="45720" cy="548640"/>
+            <a:off x="548640" y="3547872"/>
+            <a:ext cx="54864" cy="640080"/>
           </a:xfrm>
           <a:prstGeom prst="rect">
             <a:avLst/>
@@ -4860,8 +4802,8 @@
         </p:nvSpPr>
         <p:spPr>
           <a:xfrm>
-            <a:off x="777240" y="3401568"/>
-            <a:ext cx="1463040" cy="274320"/>
+            <a:off x="822960" y="3520440"/>
+            <a:ext cx="1463040" cy="292608"/>
           </a:xfrm>
           <a:prstGeom prst="rect">
             <a:avLst/>
@@ -4884,7 +4826,7 @@
                 <a:solidFill>
                   <a:srgbClr val="00FF85"/>
                 </a:solidFill>
-                <a:latin typeface="JetBrains Mono"/>
+                <a:latin typeface="Liberation Mono"/>
               </a:rPr>
               <a:t>2. VOTE</a:t>
             </a:r>
@@ -4899,17 +4841,17 @@
         </p:nvSpPr>
         <p:spPr>
           <a:xfrm>
-            <a:off x="2286000" y="3383280"/>
-            <a:ext cx="9418320" cy="548640"/>
-          </a:xfrm>
-          <a:prstGeom prst="rect">
-            <a:avLst/>
-          </a:prstGeom>
-          <a:noFill/>
-        </p:spPr>
-        <p:txBody>
-          <a:bodyPr wrap="square" anchor="t" lIns="0" rIns="0" tIns="0" bIns="0">
-            <a:spAutoFit/>
+            <a:off x="2377440" y="3502152"/>
+            <a:ext cx="9144000" cy="640080"/>
+          </a:xfrm>
+          <a:prstGeom prst="rect">
+            <a:avLst/>
+          </a:prstGeom>
+          <a:noFill/>
+        </p:spPr>
+        <p:txBody>
+          <a:bodyPr wrap="square" anchor="t" lIns="0" rIns="0" tIns="0" bIns="0">
+            <a:normAutofit/>
           </a:bodyPr>
           <a:lstStyle/>
           <a:p>
@@ -4923,7 +4865,7 @@
                 <a:solidFill>
                   <a:srgbClr val="F5F5F0"/>
                 </a:solidFill>
-                <a:latin typeface="Inter"/>
+                <a:latin typeface="Liberation Sans"/>
               </a:rPr>
               <a:t>FTR-weighted vote over a 7-day window. voteOnToken with support_yes / support_no. Quorum = 5% of circulating FTR.</a:t>
             </a:r>
@@ -4938,8 +4880,8 @@
         </p:nvSpPr>
         <p:spPr>
           <a:xfrm>
-            <a:off x="548640" y="4114800"/>
-            <a:ext cx="45720" cy="548640"/>
+            <a:off x="548640" y="4261104"/>
+            <a:ext cx="54864" cy="640080"/>
           </a:xfrm>
           <a:prstGeom prst="rect">
             <a:avLst/>
@@ -4981,8 +4923,8 @@
         </p:nvSpPr>
         <p:spPr>
           <a:xfrm>
-            <a:off x="777240" y="4087368"/>
-            <a:ext cx="1463040" cy="274320"/>
+            <a:off x="822960" y="4233672"/>
+            <a:ext cx="1463040" cy="292608"/>
           </a:xfrm>
           <a:prstGeom prst="rect">
             <a:avLst/>
@@ -5005,7 +4947,7 @@
                 <a:solidFill>
                   <a:srgbClr val="00FF85"/>
                 </a:solidFill>
-                <a:latin typeface="JetBrains Mono"/>
+                <a:latin typeface="Liberation Mono"/>
               </a:rPr>
               <a:t>3. ADD OR REJECT</a:t>
             </a:r>
@@ -5020,17 +4962,17 @@
         </p:nvSpPr>
         <p:spPr>
           <a:xfrm>
-            <a:off x="2286000" y="4069080"/>
-            <a:ext cx="9418320" cy="548640"/>
-          </a:xfrm>
-          <a:prstGeom prst="rect">
-            <a:avLst/>
-          </a:prstGeom>
-          <a:noFill/>
-        </p:spPr>
-        <p:txBody>
-          <a:bodyPr wrap="square" anchor="t" lIns="0" rIns="0" tIns="0" bIns="0">
-            <a:spAutoFit/>
+            <a:off x="2377440" y="4215384"/>
+            <a:ext cx="9144000" cy="640080"/>
+          </a:xfrm>
+          <a:prstGeom prst="rect">
+            <a:avLst/>
+          </a:prstGeom>
+          <a:noFill/>
+        </p:spPr>
+        <p:txBody>
+          <a:bodyPr wrap="square" anchor="t" lIns="0" rIns="0" tIns="0" bIns="0">
+            <a:normAutofit/>
           </a:bodyPr>
           <a:lstStyle/>
           <a:p>
@@ -5044,7 +4986,7 @@
                 <a:solidFill>
                   <a:srgbClr val="F5F5F0"/>
                 </a:solidFill>
-                <a:latin typeface="Inter"/>
+                <a:latin typeface="Liberation Sans"/>
               </a:rPr>
               <a:t>tallyTokenProposal either appends the mint to TOKEN_UNIVERSE or rejects. Both branches emit a ProposalClosed event.</a:t>
             </a:r>
@@ -5059,8 +5001,8 @@
         </p:nvSpPr>
         <p:spPr>
           <a:xfrm>
-            <a:off x="548640" y="4800600"/>
-            <a:ext cx="45720" cy="548640"/>
+            <a:off x="548640" y="4974336"/>
+            <a:ext cx="54864" cy="640080"/>
           </a:xfrm>
           <a:prstGeom prst="rect">
             <a:avLst/>
@@ -5102,8 +5044,8 @@
         </p:nvSpPr>
         <p:spPr>
           <a:xfrm>
-            <a:off x="777240" y="4773168"/>
-            <a:ext cx="1463040" cy="274320"/>
+            <a:off x="822960" y="4946904"/>
+            <a:ext cx="1463040" cy="292608"/>
           </a:xfrm>
           <a:prstGeom prst="rect">
             <a:avLst/>
@@ -5126,7 +5068,7 @@
                 <a:solidFill>
                   <a:srgbClr val="00FF85"/>
                 </a:solidFill>
-                <a:latin typeface="JetBrains Mono"/>
+                <a:latin typeface="Liberation Mono"/>
               </a:rPr>
               <a:t>4. CURATED UNIVERSE</a:t>
             </a:r>
@@ -5141,17 +5083,17 @@
         </p:nvSpPr>
         <p:spPr>
           <a:xfrm>
-            <a:off x="2286000" y="4754880"/>
-            <a:ext cx="9418320" cy="548640"/>
-          </a:xfrm>
-          <a:prstGeom prst="rect">
-            <a:avLst/>
-          </a:prstGeom>
-          <a:noFill/>
-        </p:spPr>
-        <p:txBody>
-          <a:bodyPr wrap="square" anchor="t" lIns="0" rIns="0" tIns="0" bIns="0">
-            <a:spAutoFit/>
+            <a:off x="2377440" y="4928616"/>
+            <a:ext cx="9144000" cy="640080"/>
+          </a:xfrm>
+          <a:prstGeom prst="rect">
+            <a:avLst/>
+          </a:prstGeom>
+          <a:noFill/>
+        </p:spPr>
+        <p:txBody>
+          <a:bodyPr wrap="square" anchor="t" lIns="0" rIns="0" tIns="0" bIns="0">
+            <a:normAutofit/>
           </a:bodyPr>
           <a:lstStyle/>
           <a:p>
@@ -5165,7 +5107,7 @@
                 <a:solidFill>
                   <a:srgbClr val="F5F5F0"/>
                 </a:solidFill>
-                <a:latin typeface="Inter"/>
+                <a:latin typeface="Liberation Sans"/>
               </a:rPr>
               <a:t>Newly added mints are eligible for villains, basket slots, and chaos events from the next round onwards.</a:t>
             </a:r>
@@ -5180,8 +5122,8 @@
         </p:nvSpPr>
         <p:spPr>
           <a:xfrm>
-            <a:off x="548640" y="5760720"/>
-            <a:ext cx="11064240" cy="868680"/>
+            <a:off x="548640" y="5852160"/>
+            <a:ext cx="11064240" cy="777240"/>
           </a:xfrm>
           <a:prstGeom prst="rect">
             <a:avLst/>
@@ -5223,8 +5165,8 @@
         </p:nvSpPr>
         <p:spPr>
           <a:xfrm>
-            <a:off x="777240" y="5852160"/>
-            <a:ext cx="10515600" cy="320040"/>
+            <a:off x="777240" y="5943600"/>
+            <a:ext cx="10515600" cy="292608"/>
           </a:xfrm>
           <a:prstGeom prst="rect">
             <a:avLst/>
@@ -5243,11 +5185,11 @@
               </a:lnSpc>
             </a:pPr>
             <a:r>
-              <a:rPr sz="1100" b="1" i="0">
+              <a:rPr sz="1000" b="1" i="0">
                 <a:solidFill>
                   <a:srgbClr val="00FF85"/>
                 </a:solidFill>
-                <a:latin typeface="JetBrains Mono"/>
+                <a:latin typeface="Liberation Mono"/>
               </a:rPr>
               <a:t>WHY IT MATTERS</a:t>
             </a:r>
@@ -5262,8 +5204,8 @@
         </p:nvSpPr>
         <p:spPr>
           <a:xfrm>
-            <a:off x="777240" y="6172200"/>
-            <a:ext cx="10515600" cy="457200"/>
+            <a:off x="777240" y="6236208"/>
+            <a:ext cx="10515600" cy="365760"/>
           </a:xfrm>
           <a:prstGeom prst="rect">
             <a:avLst/>
@@ -5282,11 +5224,11 @@
               </a:lnSpc>
             </a:pPr>
             <a:r>
-              <a:rPr sz="1300" b="0" i="1">
+              <a:rPr sz="1200" b="0" i="1">
                 <a:solidFill>
                   <a:srgbClr val="F5F5F0"/>
                 </a:solidFill>
-                <a:latin typeface="Inter"/>
+                <a:latin typeface="Liberation Sans"/>
               </a:rPr>
               <a:t>The 25-token universe isn't a one-time decision — it's a continuous, token-holder-curated feed.</a:t>
             </a:r>
@@ -5406,7 +5348,7 @@
         <p:spPr>
           <a:xfrm>
             <a:off x="548640" y="411480"/>
-            <a:ext cx="10972800" cy="365760"/>
+            <a:ext cx="10972800" cy="292608"/>
           </a:xfrm>
           <a:prstGeom prst="rect">
             <a:avLst/>
@@ -5425,13 +5367,13 @@
               </a:lnSpc>
             </a:pPr>
             <a:r>
-              <a:rPr sz="1100" b="1" i="0">
+              <a:rPr sz="1000" b="1" i="0">
                 <a:solidFill>
                   <a:srgbClr val="4A9EFF"/>
                 </a:solidFill>
-                <a:latin typeface="JetBrains Mono"/>
-              </a:rPr>
-              <a:t>11 · UPCOMING</a:t>
+                <a:latin typeface="Liberation Mono"/>
+              </a:rPr>
+              <a:t>11  ·  UPCOMING</a:t>
             </a:r>
           </a:p>
         </p:txBody>
@@ -5445,16 +5387,16 @@
         <p:spPr>
           <a:xfrm>
             <a:off x="548640" y="777240"/>
-            <a:ext cx="10972800" cy="914400"/>
-          </a:xfrm>
-          <a:prstGeom prst="rect">
-            <a:avLst/>
-          </a:prstGeom>
-          <a:noFill/>
-        </p:spPr>
-        <p:txBody>
-          <a:bodyPr wrap="square" anchor="t" lIns="0" rIns="0" tIns="0" bIns="0">
-            <a:spAutoFit/>
+            <a:ext cx="11064240" cy="868680"/>
+          </a:xfrm>
+          <a:prstGeom prst="rect">
+            <a:avLst/>
+          </a:prstGeom>
+          <a:noFill/>
+        </p:spPr>
+        <p:txBody>
+          <a:bodyPr wrap="square" anchor="t" lIns="0" rIns="0" tIns="0" bIns="0">
+            <a:normAutofit/>
           </a:bodyPr>
           <a:lstStyle/>
           <a:p>
@@ -5464,11 +5406,11 @@
               </a:lnSpc>
             </a:pPr>
             <a:r>
-              <a:rPr sz="4000" b="1" i="0">
+              <a:rPr sz="3600" b="1" i="0">
                 <a:solidFill>
                   <a:srgbClr val="F5F5F0"/>
                 </a:solidFill>
-                <a:latin typeface="Oxanium"/>
+                <a:latin typeface="Liberation Sans"/>
               </a:rPr>
               <a:t>FTR immunity pick.</a:t>
             </a:r>
@@ -5483,17 +5425,17 @@
         </p:nvSpPr>
         <p:spPr>
           <a:xfrm>
-            <a:off x="548640" y="2011680"/>
-            <a:ext cx="10972800" cy="457200"/>
-          </a:xfrm>
-          <a:prstGeom prst="rect">
-            <a:avLst/>
-          </a:prstGeom>
-          <a:noFill/>
-        </p:spPr>
-        <p:txBody>
-          <a:bodyPr wrap="square" anchor="t" lIns="0" rIns="0" tIns="0" bIns="0">
-            <a:spAutoFit/>
+            <a:off x="548640" y="1691640"/>
+            <a:ext cx="11064240" cy="502920"/>
+          </a:xfrm>
+          <a:prstGeom prst="rect">
+            <a:avLst/>
+          </a:prstGeom>
+          <a:noFill/>
+        </p:spPr>
+        <p:txBody>
+          <a:bodyPr wrap="square" anchor="t" lIns="0" rIns="0" tIns="0" bIns="0">
+            <a:normAutofit/>
           </a:bodyPr>
           <a:lstStyle/>
           <a:p>
@@ -5507,7 +5449,7 @@
                 <a:solidFill>
                   <a:srgbClr val="A0A0A0"/>
                 </a:solidFill>
-                <a:latin typeface="Inter"/>
+                <a:latin typeface="Liberation Sans"/>
               </a:rPr>
               <a:t>FTR holders exclude one mint from VRF's reach for the round they vote on.</a:t>
             </a:r>
@@ -5522,8 +5464,8 @@
         </p:nvSpPr>
         <p:spPr>
           <a:xfrm>
-            <a:off x="548640" y="2697480"/>
-            <a:ext cx="5486400" cy="3200400"/>
+            <a:off x="548640" y="2834640"/>
+            <a:ext cx="5486400" cy="2743200"/>
           </a:xfrm>
           <a:prstGeom prst="rect">
             <a:avLst/>
@@ -5565,7 +5507,7 @@
         </p:nvSpPr>
         <p:spPr>
           <a:xfrm>
-            <a:off x="548640" y="2697480"/>
+            <a:off x="548640" y="2834640"/>
             <a:ext cx="5486400" cy="54864"/>
           </a:xfrm>
           <a:prstGeom prst="rect">
@@ -5608,7 +5550,7 @@
         </p:nvSpPr>
         <p:spPr>
           <a:xfrm>
-            <a:off x="777240" y="2834640"/>
+            <a:off x="777240" y="2971800"/>
             <a:ext cx="5029200" cy="365760"/>
           </a:xfrm>
           <a:prstGeom prst="rect">
@@ -5632,7 +5574,7 @@
                 <a:solidFill>
                   <a:srgbClr val="4A9EFF"/>
                 </a:solidFill>
-                <a:latin typeface="JetBrains Mono"/>
+                <a:latin typeface="Liberation Mono"/>
               </a:rPr>
               <a:t>VRF PICK (default)</a:t>
             </a:r>
@@ -5647,7 +5589,7 @@
         </p:nvSpPr>
         <p:spPr>
           <a:xfrm>
-            <a:off x="777240" y="3246120"/>
+            <a:off x="777240" y="3383280"/>
             <a:ext cx="5029200" cy="365760"/>
           </a:xfrm>
           <a:prstGeom prst="rect">
@@ -5671,7 +5613,7 @@
                 <a:solidFill>
                   <a:srgbClr val="F5F5F0"/>
                 </a:solidFill>
-                <a:latin typeface="Oxanium"/>
+                <a:latin typeface="Liberation Sans"/>
               </a:rPr>
               <a:t>Uniform random over 25</a:t>
             </a:r>
@@ -5686,17 +5628,17 @@
         </p:nvSpPr>
         <p:spPr>
           <a:xfrm>
-            <a:off x="777240" y="3749039"/>
-            <a:ext cx="5029200" cy="1828800"/>
-          </a:xfrm>
-          <a:prstGeom prst="rect">
-            <a:avLst/>
-          </a:prstGeom>
-          <a:noFill/>
-        </p:spPr>
-        <p:txBody>
-          <a:bodyPr wrap="square" anchor="t" lIns="0" rIns="0" tIns="0" bIns="0">
-            <a:spAutoFit/>
+            <a:off x="777240" y="3886200"/>
+            <a:ext cx="5029200" cy="1600200"/>
+          </a:xfrm>
+          <a:prstGeom prst="rect">
+            <a:avLst/>
+          </a:prstGeom>
+          <a:noFill/>
+        </p:spPr>
+        <p:txBody>
+          <a:bodyPr wrap="square" anchor="t" lIns="0" rIns="0" tIns="0" bIns="0">
+            <a:normAutofit/>
           </a:bodyPr>
           <a:lstStyle/>
           <a:p>
@@ -5706,11 +5648,11 @@
               </a:lnSpc>
             </a:pPr>
             <a:r>
-              <a:rPr sz="1200" b="0" i="0">
+              <a:rPr sz="1100" b="0" i="0">
                 <a:solidFill>
                   <a:srgbClr val="A0A0A0"/>
                 </a:solidFill>
-                <a:latin typeface="Inter"/>
+                <a:latin typeface="Liberation Sans"/>
               </a:rPr>
               <a:t>Each round, VRF rolls a uniform random index over TOKEN_UNIVERSE and the chosen mint becomes the villain.</a:t>
             </a:r>
@@ -5722,11 +5664,11 @@
               </a:lnSpc>
             </a:pPr>
             <a:r>
-              <a:rPr sz="1200" b="0" i="0">
+              <a:rPr sz="1100" b="0" i="0">
                 <a:solidFill>
                   <a:srgbClr val="A0A0A0"/>
                 </a:solidFill>
-                <a:latin typeface="Inter"/>
+                <a:latin typeface="Liberation Sans"/>
               </a:rPr>
               <a:t/>
             </a:r>
@@ -5738,13 +5680,13 @@
               </a:lnSpc>
             </a:pPr>
             <a:r>
-              <a:rPr sz="1200" b="0" i="0">
+              <a:rPr sz="1100" b="0" i="0">
                 <a:solidFill>
                   <a:srgbClr val="A0A0A0"/>
                 </a:solidFill>
-                <a:latin typeface="Inter"/>
-              </a:rPr>
-              <a:t>This is fair and provable, but means any held token can be the villain — including one you're long on.</a:t>
+                <a:latin typeface="Liberation Sans"/>
+              </a:rPr>
+              <a:t>Fair and provable, but means any held token can be the villain — including one you're long on.</a:t>
             </a:r>
           </a:p>
         </p:txBody>
@@ -5757,8 +5699,8 @@
         </p:nvSpPr>
         <p:spPr>
           <a:xfrm>
-            <a:off x="6126480" y="2697480"/>
-            <a:ext cx="5486400" cy="3200400"/>
+            <a:off x="6217920" y="2834640"/>
+            <a:ext cx="5486400" cy="2743200"/>
           </a:xfrm>
           <a:prstGeom prst="rect">
             <a:avLst/>
@@ -5800,7 +5742,7 @@
         </p:nvSpPr>
         <p:spPr>
           <a:xfrm>
-            <a:off x="6126480" y="2697480"/>
+            <a:off x="6217920" y="2834640"/>
             <a:ext cx="5486400" cy="54864"/>
           </a:xfrm>
           <a:prstGeom prst="rect">
@@ -5843,7 +5785,7 @@
         </p:nvSpPr>
         <p:spPr>
           <a:xfrm>
-            <a:off x="6355080" y="2834640"/>
+            <a:off x="6446520" y="2971800"/>
             <a:ext cx="5029200" cy="365760"/>
           </a:xfrm>
           <a:prstGeom prst="rect">
@@ -5867,7 +5809,7 @@
                 <a:solidFill>
                   <a:srgbClr val="00FF85"/>
                 </a:solidFill>
-                <a:latin typeface="JetBrains Mono"/>
+                <a:latin typeface="Liberation Mono"/>
               </a:rPr>
               <a:t>IMMUNITY PICK (FTR-gated)</a:t>
             </a:r>
@@ -5882,7 +5824,7 @@
         </p:nvSpPr>
         <p:spPr>
           <a:xfrm>
-            <a:off x="6355080" y="3246120"/>
+            <a:off x="6446520" y="3383280"/>
             <a:ext cx="5029200" cy="365760"/>
           </a:xfrm>
           <a:prstGeom prst="rect">
@@ -5906,7 +5848,7 @@
                 <a:solidFill>
                   <a:srgbClr val="F5F5F0"/>
                 </a:solidFill>
-                <a:latin typeface="Oxanium"/>
+                <a:latin typeface="Liberation Sans"/>
               </a:rPr>
               <a:t>One mint excluded per round</a:t>
             </a:r>
@@ -5921,17 +5863,17 @@
         </p:nvSpPr>
         <p:spPr>
           <a:xfrm>
-            <a:off x="6355080" y="3749039"/>
-            <a:ext cx="5029200" cy="1828800"/>
-          </a:xfrm>
-          <a:prstGeom prst="rect">
-            <a:avLst/>
-          </a:prstGeom>
-          <a:noFill/>
-        </p:spPr>
-        <p:txBody>
-          <a:bodyPr wrap="square" anchor="t" lIns="0" rIns="0" tIns="0" bIns="0">
-            <a:spAutoFit/>
+            <a:off x="6446520" y="3886200"/>
+            <a:ext cx="5029200" cy="1600200"/>
+          </a:xfrm>
+          <a:prstGeom prst="rect">
+            <a:avLst/>
+          </a:prstGeom>
+          <a:noFill/>
+        </p:spPr>
+        <p:txBody>
+          <a:bodyPr wrap="square" anchor="t" lIns="0" rIns="0" tIns="0" bIns="0">
+            <a:normAutofit/>
           </a:bodyPr>
           <a:lstStyle/>
           <a:p>
@@ -5941,11 +5883,11 @@
               </a:lnSpc>
             </a:pPr>
             <a:r>
-              <a:rPr sz="1200" b="0" i="0">
+              <a:rPr sz="1100" b="0" i="0">
                 <a:solidFill>
                   <a:srgbClr val="A0A0A0"/>
                 </a:solidFill>
-                <a:latin typeface="Inter"/>
+                <a:latin typeface="Liberation Sans"/>
               </a:rPr>
               <a:t>Before requestVillainVrf, FTR holders vote on a single mint to exclude. The VRF roll skips that index.</a:t>
             </a:r>
@@ -5957,11 +5899,11 @@
               </a:lnSpc>
             </a:pPr>
             <a:r>
-              <a:rPr sz="1200" b="0" i="0">
+              <a:rPr sz="1100" b="0" i="0">
                 <a:solidFill>
                   <a:srgbClr val="A0A0A0"/>
                 </a:solidFill>
-                <a:latin typeface="Inter"/>
+                <a:latin typeface="Liberation Sans"/>
               </a:rPr>
               <a:t/>
             </a:r>
@@ -5973,11 +5915,11 @@
               </a:lnSpc>
             </a:pPr>
             <a:r>
-              <a:rPr sz="1200" b="0" i="0">
+              <a:rPr sz="1100" b="0" i="0">
                 <a:solidFill>
                   <a:srgbClr val="A0A0A0"/>
                 </a:solidFill>
-                <a:latin typeface="Inter"/>
+                <a:latin typeface="Liberation Sans"/>
               </a:rPr>
               <a:t>FTR concentration creates strategic immunity — long-term holders can protect their position across many rounds.</a:t>
             </a:r>
@@ -5992,8 +5934,8 @@
         </p:nvSpPr>
         <p:spPr>
           <a:xfrm>
-            <a:off x="548640" y="5989320"/>
-            <a:ext cx="11064240" cy="594360"/>
+            <a:off x="548640" y="5760720"/>
+            <a:ext cx="11064240" cy="868680"/>
           </a:xfrm>
           <a:prstGeom prst="rect">
             <a:avLst/>
@@ -6035,8 +5977,8 @@
         </p:nvSpPr>
         <p:spPr>
           <a:xfrm>
-            <a:off x="777240" y="6080760"/>
-            <a:ext cx="10515600" cy="274320"/>
+            <a:off x="777240" y="5870448"/>
+            <a:ext cx="10515600" cy="292608"/>
           </a:xfrm>
           <a:prstGeom prst="rect">
             <a:avLst/>
@@ -6055,11 +5997,11 @@
               </a:lnSpc>
             </a:pPr>
             <a:r>
-              <a:rPr sz="1100" b="1" i="0">
+              <a:rPr sz="1000" b="1" i="0">
                 <a:solidFill>
                   <a:srgbClr val="4A9EFF"/>
                 </a:solidFill>
-                <a:latin typeface="JetBrains Mono"/>
+                <a:latin typeface="Liberation Mono"/>
               </a:rPr>
               <a:t>FLOW</a:t>
             </a:r>
@@ -6074,8 +6016,8 @@
         </p:nvSpPr>
         <p:spPr>
           <a:xfrm>
-            <a:off x="777240" y="6327648"/>
-            <a:ext cx="10515600" cy="274320"/>
+            <a:off x="777240" y="6163056"/>
+            <a:ext cx="10515600" cy="365760"/>
           </a:xfrm>
           <a:prstGeom prst="rect">
             <a:avLst/>
@@ -6094,11 +6036,11 @@
               </a:lnSpc>
             </a:pPr>
             <a:r>
-              <a:rPr sz="1100" b="0" i="0">
+              <a:rPr sz="1200" b="0" i="0">
                 <a:solidFill>
                   <a:srgbClr val="F5F5F0"/>
                 </a:solidFill>
-                <a:latin typeface="JetBrains Mono"/>
+                <a:latin typeface="Liberation Mono"/>
               </a:rPr>
               <a:t>FTR vote → tallyImmunityPick → excludeIndex → VRF rolls over the filtered universe</a:t>
             </a:r>
@@ -6175,7 +6117,7 @@
         <p:spPr>
           <a:xfrm>
             <a:off x="548640" y="411480"/>
-            <a:ext cx="10972800" cy="365760"/>
+            <a:ext cx="10972800" cy="292608"/>
           </a:xfrm>
           <a:prstGeom prst="rect">
             <a:avLst/>
@@ -6194,13 +6136,13 @@
               </a:lnSpc>
             </a:pPr>
             <a:r>
-              <a:rPr sz="1100" b="0" i="0">
+              <a:rPr sz="1000" b="1" i="0">
                 <a:solidFill>
                   <a:srgbClr val="6B6B6B"/>
                 </a:solidFill>
-                <a:latin typeface="JetBrains Mono"/>
-              </a:rPr>
-              <a:t>12 · THESIS</a:t>
+                <a:latin typeface="Liberation Mono"/>
+              </a:rPr>
+              <a:t>12  ·  THESIS</a:t>
             </a:r>
           </a:p>
         </p:txBody>
@@ -6214,30 +6156,30 @@
         <p:spPr>
           <a:xfrm>
             <a:off x="548640" y="777240"/>
-            <a:ext cx="10972800" cy="1280160"/>
-          </a:xfrm>
-          <a:prstGeom prst="rect">
-            <a:avLst/>
-          </a:prstGeom>
-          <a:noFill/>
-        </p:spPr>
-        <p:txBody>
-          <a:bodyPr wrap="square" anchor="t" lIns="0" rIns="0" tIns="0" bIns="0">
-            <a:spAutoFit/>
-          </a:bodyPr>
-          <a:lstStyle/>
-          <a:p>
-            <a:pPr algn="l">
-              <a:lnSpc>
-                <a:spcPct val="100000"/>
-              </a:lnSpc>
-            </a:pPr>
-            <a:r>
-              <a:rPr sz="4400" b="1" i="0">
+            <a:ext cx="11064240" cy="868680"/>
+          </a:xfrm>
+          <a:prstGeom prst="rect">
+            <a:avLst/>
+          </a:prstGeom>
+          <a:noFill/>
+        </p:spPr>
+        <p:txBody>
+          <a:bodyPr wrap="square" anchor="t" lIns="0" rIns="0" tIns="0" bIns="0">
+            <a:normAutofit/>
+          </a:bodyPr>
+          <a:lstStyle/>
+          <a:p>
+            <a:pPr algn="l">
+              <a:lnSpc>
+                <a:spcPct val="120000"/>
+              </a:lnSpc>
+            </a:pPr>
+            <a:r>
+              <a:rPr sz="3600" b="1" i="0">
                 <a:solidFill>
                   <a:srgbClr val="F5F5F0"/>
                 </a:solidFill>
-                <a:latin typeface="Oxanium"/>
+                <a:latin typeface="Liberation Sans"/>
               </a:rPr>
               <a:t>The game is the startup pitch.</a:t>
             </a:r>
@@ -6252,17 +6194,17 @@
         </p:nvSpPr>
         <p:spPr>
           <a:xfrm>
-            <a:off x="548640" y="2651760"/>
-            <a:ext cx="10972800" cy="457200"/>
-          </a:xfrm>
-          <a:prstGeom prst="rect">
-            <a:avLst/>
-          </a:prstGeom>
-          <a:noFill/>
-        </p:spPr>
-        <p:txBody>
-          <a:bodyPr wrap="square" anchor="t" lIns="0" rIns="0" tIns="0" bIns="0">
-            <a:spAutoFit/>
+            <a:off x="548640" y="2697480"/>
+            <a:ext cx="11064240" cy="502920"/>
+          </a:xfrm>
+          <a:prstGeom prst="rect">
+            <a:avLst/>
+          </a:prstGeom>
+          <a:noFill/>
+        </p:spPr>
+        <p:txBody>
+          <a:bodyPr wrap="square" anchor="t" lIns="0" rIns="0" tIns="0" bIns="0">
+            <a:normAutofit/>
           </a:bodyPr>
           <a:lstStyle/>
           <a:p>
@@ -6272,11 +6214,11 @@
               </a:lnSpc>
             </a:pPr>
             <a:r>
-              <a:rPr sz="1800" b="0" i="1">
+              <a:rPr sz="1500" b="0" i="1">
                 <a:solidFill>
                   <a:srgbClr val="A0A0A0"/>
                 </a:solidFill>
-                <a:latin typeface="Inter"/>
+                <a:latin typeface="Liberation Sans"/>
               </a:rPr>
               <a:t>Every round of Conviction is a 15-minute governance experiment. The winner shapes the next round.</a:t>
             </a:r>
@@ -6291,8 +6233,8 @@
         </p:nvSpPr>
         <p:spPr>
           <a:xfrm>
-            <a:off x="548640" y="3474720"/>
-            <a:ext cx="45720" cy="457200"/>
+            <a:off x="548640" y="3520440"/>
+            <a:ext cx="54864" cy="502920"/>
           </a:xfrm>
           <a:prstGeom prst="rect">
             <a:avLst/>
@@ -6334,8 +6276,8 @@
         </p:nvSpPr>
         <p:spPr>
           <a:xfrm>
-            <a:off x="777240" y="3429000"/>
-            <a:ext cx="10972800" cy="274320"/>
+            <a:off x="822960" y="3474720"/>
+            <a:ext cx="10972800" cy="292608"/>
           </a:xfrm>
           <a:prstGeom prst="rect">
             <a:avLst/>
@@ -6354,11 +6296,11 @@
               </a:lnSpc>
             </a:pPr>
             <a:r>
-              <a:rPr sz="1500" b="1" i="0">
+              <a:rPr sz="1400" b="1" i="0">
                 <a:solidFill>
                   <a:srgbClr val="F5F5F0"/>
                 </a:solidFill>
-                <a:latin typeface="Inter"/>
+                <a:latin typeface="Liberation Sans"/>
               </a:rPr>
               <a:t>FTR mints create an economy</a:t>
             </a:r>
@@ -6373,17 +6315,17 @@
         </p:nvSpPr>
         <p:spPr>
           <a:xfrm>
-            <a:off x="777240" y="3749039"/>
-            <a:ext cx="10972800" cy="365760"/>
-          </a:xfrm>
-          <a:prstGeom prst="rect">
-            <a:avLst/>
-          </a:prstGeom>
-          <a:noFill/>
-        </p:spPr>
-        <p:txBody>
-          <a:bodyPr wrap="square" anchor="t" lIns="0" rIns="0" tIns="0" bIns="0">
-            <a:spAutoFit/>
+            <a:off x="822960" y="3794760"/>
+            <a:ext cx="10972800" cy="320040"/>
+          </a:xfrm>
+          <a:prstGeom prst="rect">
+            <a:avLst/>
+          </a:prstGeom>
+          <a:noFill/>
+        </p:spPr>
+        <p:txBody>
+          <a:bodyPr wrap="square" anchor="t" lIns="0" rIns="0" tIns="0" bIns="0">
+            <a:normAutofit/>
           </a:bodyPr>
           <a:lstStyle/>
           <a:p>
@@ -6393,11 +6335,11 @@
               </a:lnSpc>
             </a:pPr>
             <a:r>
-              <a:rPr sz="1200" b="0" i="1">
+              <a:rPr sz="1100" b="0" i="1">
                 <a:solidFill>
                   <a:srgbClr val="A0A0A0"/>
                 </a:solidFill>
-                <a:latin typeface="Inter"/>
+                <a:latin typeface="Liberation Sans"/>
               </a:rPr>
               <a:t>Players who win rounds accumulate governance weight. Skin in the game.</a:t>
             </a:r>
@@ -6412,8 +6354,8 @@
         </p:nvSpPr>
         <p:spPr>
           <a:xfrm>
-            <a:off x="548640" y="4160520"/>
-            <a:ext cx="45720" cy="457200"/>
+            <a:off x="548640" y="4206240"/>
+            <a:ext cx="54864" cy="502920"/>
           </a:xfrm>
           <a:prstGeom prst="rect">
             <a:avLst/>
@@ -6455,8 +6397,8 @@
         </p:nvSpPr>
         <p:spPr>
           <a:xfrm>
-            <a:off x="777240" y="4114800"/>
-            <a:ext cx="10972800" cy="274320"/>
+            <a:off x="822960" y="4160520"/>
+            <a:ext cx="10972800" cy="292608"/>
           </a:xfrm>
           <a:prstGeom prst="rect">
             <a:avLst/>
@@ -6475,11 +6417,11 @@
               </a:lnSpc>
             </a:pPr>
             <a:r>
-              <a:rPr sz="1500" b="1" i="0">
+              <a:rPr sz="1400" b="1" i="0">
                 <a:solidFill>
                   <a:srgbClr val="F5F5F0"/>
                 </a:solidFill>
-                <a:latin typeface="Inter"/>
+                <a:latin typeface="Liberation Sans"/>
               </a:rPr>
               <a:t>Baskets diversify risk</a:t>
             </a:r>
@@ -6494,17 +6436,17 @@
         </p:nvSpPr>
         <p:spPr>
           <a:xfrm>
-            <a:off x="777240" y="4434840"/>
-            <a:ext cx="10972800" cy="365760"/>
-          </a:xfrm>
-          <a:prstGeom prst="rect">
-            <a:avLst/>
-          </a:prstGeom>
-          <a:noFill/>
-        </p:spPr>
-        <p:txBody>
-          <a:bodyPr wrap="square" anchor="t" lIns="0" rIns="0" tIns="0" bIns="0">
-            <a:spAutoFit/>
+            <a:off x="822960" y="4480559"/>
+            <a:ext cx="10972800" cy="320040"/>
+          </a:xfrm>
+          <a:prstGeom prst="rect">
+            <a:avLst/>
+          </a:prstGeom>
+          <a:noFill/>
+        </p:spPr>
+        <p:txBody>
+          <a:bodyPr wrap="square" anchor="t" lIns="0" rIns="0" tIns="0" bIns="0">
+            <a:normAutofit/>
           </a:bodyPr>
           <a:lstStyle/>
           <a:p>
@@ -6514,11 +6456,11 @@
               </a:lnSpc>
             </a:pPr>
             <a:r>
-              <a:rPr sz="1200" b="0" i="1">
+              <a:rPr sz="1100" b="0" i="1">
                 <a:solidFill>
                   <a:srgbClr val="A0A0A0"/>
                 </a:solidFill>
-                <a:latin typeface="Inter"/>
+                <a:latin typeface="Liberation Sans"/>
               </a:rPr>
               <a:t>A winning meta emerges as FTR holders vote on which tokens belong in TOKEN_UNIVERSE.</a:t>
             </a:r>
@@ -6533,8 +6475,8 @@
         </p:nvSpPr>
         <p:spPr>
           <a:xfrm>
-            <a:off x="548640" y="4846320"/>
-            <a:ext cx="45720" cy="457200"/>
+            <a:off x="548640" y="4892040"/>
+            <a:ext cx="54864" cy="502920"/>
           </a:xfrm>
           <a:prstGeom prst="rect">
             <a:avLst/>
@@ -6576,8 +6518,8 @@
         </p:nvSpPr>
         <p:spPr>
           <a:xfrm>
-            <a:off x="777240" y="4800600"/>
-            <a:ext cx="10972800" cy="274320"/>
+            <a:off x="822960" y="4846320"/>
+            <a:ext cx="10972800" cy="292608"/>
           </a:xfrm>
           <a:prstGeom prst="rect">
             <a:avLst/>
@@ -6596,11 +6538,11 @@
               </a:lnSpc>
             </a:pPr>
             <a:r>
-              <a:rPr sz="1500" b="1" i="0">
+              <a:rPr sz="1400" b="1" i="0">
                 <a:solidFill>
                   <a:srgbClr val="F5F5F0"/>
                 </a:solidFill>
-                <a:latin typeface="Inter"/>
+                <a:latin typeface="Liberation Sans"/>
               </a:rPr>
               <a:t>Immunity creates moats</a:t>
             </a:r>
@@ -6615,17 +6557,17 @@
         </p:nvSpPr>
         <p:spPr>
           <a:xfrm>
-            <a:off x="777240" y="5120640"/>
-            <a:ext cx="10972800" cy="365760"/>
-          </a:xfrm>
-          <a:prstGeom prst="rect">
-            <a:avLst/>
-          </a:prstGeom>
-          <a:noFill/>
-        </p:spPr>
-        <p:txBody>
-          <a:bodyPr wrap="square" anchor="t" lIns="0" rIns="0" tIns="0" bIns="0">
-            <a:spAutoFit/>
+            <a:off x="822960" y="5166359"/>
+            <a:ext cx="10972800" cy="320040"/>
+          </a:xfrm>
+          <a:prstGeom prst="rect">
+            <a:avLst/>
+          </a:prstGeom>
+          <a:noFill/>
+        </p:spPr>
+        <p:txBody>
+          <a:bodyPr wrap="square" anchor="t" lIns="0" rIns="0" tIns="0" bIns="0">
+            <a:normAutofit/>
           </a:bodyPr>
           <a:lstStyle/>
           <a:p>
@@ -6635,11 +6577,11 @@
               </a:lnSpc>
             </a:pPr>
             <a:r>
-              <a:rPr sz="1200" b="0" i="1">
+              <a:rPr sz="1100" b="0" i="1">
                 <a:solidFill>
                   <a:srgbClr val="A0A0A0"/>
                 </a:solidFill>
-                <a:latin typeface="Inter"/>
+                <a:latin typeface="Liberation Sans"/>
               </a:rPr>
               <a:t>Long-term FTR holders can protect their long positions — same mechanic as token-curated registries.</a:t>
             </a:r>
@@ -6654,8 +6596,8 @@
         </p:nvSpPr>
         <p:spPr>
           <a:xfrm>
-            <a:off x="548640" y="5532120"/>
-            <a:ext cx="45720" cy="457200"/>
+            <a:off x="548640" y="5577840"/>
+            <a:ext cx="54864" cy="502920"/>
           </a:xfrm>
           <a:prstGeom prst="rect">
             <a:avLst/>
@@ -6697,8 +6639,8 @@
         </p:nvSpPr>
         <p:spPr>
           <a:xfrm>
-            <a:off x="777240" y="5486400"/>
-            <a:ext cx="10972800" cy="274320"/>
+            <a:off x="822960" y="5532120"/>
+            <a:ext cx="10972800" cy="292608"/>
           </a:xfrm>
           <a:prstGeom prst="rect">
             <a:avLst/>
@@ -6717,11 +6659,11 @@
               </a:lnSpc>
             </a:pPr>
             <a:r>
-              <a:rPr sz="1500" b="1" i="0">
+              <a:rPr sz="1400" b="1" i="0">
                 <a:solidFill>
                   <a:srgbClr val="F5F5F0"/>
                 </a:solidFill>
-                <a:latin typeface="Inter"/>
+                <a:latin typeface="Liberation Sans"/>
               </a:rPr>
               <a:t>Spectator bids add liquidity</a:t>
             </a:r>
@@ -6736,17 +6678,17 @@
         </p:nvSpPr>
         <p:spPr>
           <a:xfrm>
-            <a:off x="777240" y="5806440"/>
-            <a:ext cx="10972800" cy="365760"/>
-          </a:xfrm>
-          <a:prstGeom prst="rect">
-            <a:avLst/>
-          </a:prstGeom>
-          <a:noFill/>
-        </p:spPr>
-        <p:txBody>
-          <a:bodyPr wrap="square" anchor="t" lIns="0" rIns="0" tIns="0" bIns="0">
-            <a:spAutoFit/>
+            <a:off x="822960" y="5852159"/>
+            <a:ext cx="10972800" cy="320040"/>
+          </a:xfrm>
+          <a:prstGeom prst="rect">
+            <a:avLst/>
+          </a:prstGeom>
+          <a:noFill/>
+        </p:spPr>
+        <p:txBody>
+          <a:bodyPr wrap="square" anchor="t" lIns="0" rIns="0" tIns="0" bIns="0">
+            <a:normAutofit/>
           </a:bodyPr>
           <a:lstStyle/>
           <a:p>
@@ -6756,11 +6698,11 @@
               </a:lnSpc>
             </a:pPr>
             <a:r>
-              <a:rPr sz="1200" b="0" i="1">
+              <a:rPr sz="1100" b="0" i="1">
                 <a:solidFill>
                   <a:srgbClr val="A0A0A0"/>
                 </a:solidFill>
-                <a:latin typeface="Inter"/>
+                <a:latin typeface="Liberation Sans"/>
               </a:rPr>
               <a:t>The prediction market becomes the second economy. Whale Watcher badge as reputation.</a:t>
             </a:r>
@@ -6923,7 +6865,7 @@
         <p:spPr>
           <a:xfrm>
             <a:off x="548640" y="777240"/>
-            <a:ext cx="10972800" cy="365760"/>
+            <a:ext cx="11064240" cy="365760"/>
           </a:xfrm>
           <a:prstGeom prst="rect">
             <a:avLst/>
@@ -6946,7 +6888,7 @@
                 <a:solidFill>
                   <a:srgbClr val="6B6B6B"/>
                 </a:solidFill>
-                <a:latin typeface="JetBrains Mono"/>
+                <a:latin typeface="Liberation Mono"/>
               </a:rPr>
               <a:t>THANKS · MAGICBLOCK BLITZ V8</a:t>
             </a:r>
@@ -6961,8 +6903,47 @@
         </p:nvSpPr>
         <p:spPr>
           <a:xfrm>
-            <a:off x="548640" y="1463040"/>
-            <a:ext cx="10972800" cy="1463040"/>
+            <a:off x="548640" y="1417320"/>
+            <a:ext cx="11064240" cy="1371600"/>
+          </a:xfrm>
+          <a:prstGeom prst="rect">
+            <a:avLst/>
+          </a:prstGeom>
+          <a:noFill/>
+        </p:spPr>
+        <p:txBody>
+          <a:bodyPr wrap="square" anchor="t" lIns="0" rIns="0" tIns="0" bIns="0">
+            <a:normAutofit/>
+          </a:bodyPr>
+          <a:lstStyle/>
+          <a:p>
+            <a:pPr algn="l">
+              <a:lnSpc>
+                <a:spcPct val="100000"/>
+              </a:lnSpc>
+            </a:pPr>
+            <a:r>
+              <a:rPr sz="7200" b="1" i="0">
+                <a:solidFill>
+                  <a:srgbClr val="F5F5F0"/>
+                </a:solidFill>
+                <a:latin typeface="Liberation Sans"/>
+              </a:rPr>
+              <a:t>Conviction.</a:t>
+            </a:r>
+          </a:p>
+        </p:txBody>
+      </p:sp>
+      <p:sp>
+        <p:nvSpPr>
+          <p:cNvPr id="7" name="TextBox 6"/>
+          <p:cNvSpPr txBox="1"/>
+          <p:nvPr/>
+        </p:nvSpPr>
+        <p:spPr>
+          <a:xfrm>
+            <a:off x="548640" y="2926080"/>
+            <a:ext cx="11064240" cy="457200"/>
           </a:xfrm>
           <a:prstGeom prst="rect">
             <a:avLst/>
@@ -6977,54 +6958,15 @@
           <a:p>
             <a:pPr algn="l">
               <a:lnSpc>
-                <a:spcPct val="100000"/>
-              </a:lnSpc>
-            </a:pPr>
-            <a:r>
-              <a:rPr sz="8800" b="1" i="0">
-                <a:solidFill>
-                  <a:srgbClr val="F5F5F0"/>
-                </a:solidFill>
-                <a:latin typeface="Oxanium"/>
-              </a:rPr>
-              <a:t>Conviction.</a:t>
-            </a:r>
-          </a:p>
-        </p:txBody>
-      </p:sp>
-      <p:sp>
-        <p:nvSpPr>
-          <p:cNvPr id="7" name="TextBox 6"/>
-          <p:cNvSpPr txBox="1"/>
-          <p:nvPr/>
-        </p:nvSpPr>
-        <p:spPr>
-          <a:xfrm>
-            <a:off x="548640" y="3108960"/>
-            <a:ext cx="10972800" cy="548640"/>
-          </a:xfrm>
-          <a:prstGeom prst="rect">
-            <a:avLst/>
-          </a:prstGeom>
-          <a:noFill/>
-        </p:spPr>
-        <p:txBody>
-          <a:bodyPr wrap="square" anchor="t" lIns="0" rIns="0" tIns="0" bIns="0">
-            <a:spAutoFit/>
-          </a:bodyPr>
-          <a:lstStyle/>
-          <a:p>
-            <a:pPr algn="l">
-              <a:lnSpc>
                 <a:spcPct val="120000"/>
               </a:lnSpc>
             </a:pPr>
             <a:r>
-              <a:rPr sz="2200" b="0" i="1">
+              <a:rPr sz="2000" b="0" i="1">
                 <a:solidFill>
                   <a:srgbClr val="A0A0A0"/>
                 </a:solidFill>
-                <a:latin typeface="Inter"/>
+                <a:latin typeface="Liberation Sans"/>
               </a:rPr>
               <a:t>Risk duel on Solana · ER · PER · VRF</a:t>
             </a:r>
@@ -7039,8 +6981,8 @@
         </p:nvSpPr>
         <p:spPr>
           <a:xfrm>
-            <a:off x="548640" y="4023360"/>
-            <a:ext cx="2779776" cy="457200"/>
+            <a:off x="548640" y="3931920"/>
+            <a:ext cx="2779776" cy="310896"/>
           </a:xfrm>
           <a:prstGeom prst="roundRect">
             <a:avLst/>
@@ -7069,7 +7011,7 @@
           </a:fontRef>
         </p:style>
         <p:txBody>
-          <a:bodyPr rtlCol="0" anchor="ctr" lIns="146304" rIns="146304" tIns="73152" bIns="73152" wrap="none"/>
+          <a:bodyPr rtlCol="0" anchor="ctr" lIns="146304" rIns="146304" tIns="54864" bIns="54864" wrap="none"/>
           <a:lstStyle/>
           <a:p>
             <a:pPr algn="ctr"/>
@@ -7078,7 +7020,7 @@
                 <a:solidFill>
                   <a:srgbClr val="00FF85"/>
                 </a:solidFill>
-                <a:latin typeface="JetBrains Mono"/>
+                <a:latin typeface="Liberation Mono"/>
               </a:rPr>
               <a:t>LIVE  conviction-nine.vercel.app</a:t>
             </a:r>
@@ -7093,8 +7035,8 @@
         </p:nvSpPr>
         <p:spPr>
           <a:xfrm>
-            <a:off x="548640" y="4526280"/>
-            <a:ext cx="3246120" cy="457200"/>
+            <a:off x="548640" y="4434840"/>
+            <a:ext cx="3246120" cy="310896"/>
           </a:xfrm>
           <a:prstGeom prst="roundRect">
             <a:avLst/>
@@ -7123,7 +7065,7 @@
           </a:fontRef>
         </p:style>
         <p:txBody>
-          <a:bodyPr rtlCol="0" anchor="ctr" lIns="146304" rIns="146304" tIns="73152" bIns="73152" wrap="none"/>
+          <a:bodyPr rtlCol="0" anchor="ctr" lIns="146304" rIns="146304" tIns="54864" bIns="54864" wrap="none"/>
           <a:lstStyle/>
           <a:p>
             <a:pPr algn="ctr"/>
@@ -7132,7 +7074,7 @@
                 <a:solidFill>
                   <a:srgbClr val="4A9EFF"/>
                 </a:solidFill>
-                <a:latin typeface="JetBrains Mono"/>
+                <a:latin typeface="Liberation Mono"/>
               </a:rPr>
               <a:t>REPO  github.com/Rujul-1105/conviction</a:t>
             </a:r>
@@ -7147,8 +7089,8 @@
         </p:nvSpPr>
         <p:spPr>
           <a:xfrm>
-            <a:off x="548640" y="5029200"/>
-            <a:ext cx="2546604" cy="457200"/>
+            <a:off x="548640" y="4937759"/>
+            <a:ext cx="2546604" cy="310896"/>
           </a:xfrm>
           <a:prstGeom prst="roundRect">
             <a:avLst/>
@@ -7177,7 +7119,7 @@
           </a:fontRef>
         </p:style>
         <p:txBody>
-          <a:bodyPr rtlCol="0" anchor="ctr" lIns="146304" rIns="146304" tIns="73152" bIns="73152" wrap="none"/>
+          <a:bodyPr rtlCol="0" anchor="ctr" lIns="146304" rIns="146304" tIns="54864" bIns="54864" wrap="none"/>
           <a:lstStyle/>
           <a:p>
             <a:pPr algn="ctr"/>
@@ -7186,7 +7128,7 @@
                 <a:solidFill>
                   <a:srgbClr val="FFD23F"/>
                 </a:solidFill>
-                <a:latin typeface="JetBrains Mono"/>
+                <a:latin typeface="Liberation Mono"/>
               </a:rPr>
               <a:t>EXPLORER  Fh6b…JHJbH (devnet)</a:t>
             </a:r>
@@ -7201,8 +7143,8 @@
         </p:nvSpPr>
         <p:spPr>
           <a:xfrm>
-            <a:off x="548640" y="6126480"/>
-            <a:ext cx="10972800" cy="365760"/>
+            <a:off x="548640" y="5943600"/>
+            <a:ext cx="11064240" cy="320040"/>
           </a:xfrm>
           <a:prstGeom prst="rect">
             <a:avLst/>
@@ -7221,13 +7163,52 @@
               </a:lnSpc>
             </a:pPr>
             <a:r>
-              <a:rPr sz="1400" b="0" i="0">
+              <a:rPr sz="1300" b="0" i="0">
                 <a:solidFill>
                   <a:srgbClr val="F5F5F0"/>
                 </a:solidFill>
-                <a:latin typeface="Inter"/>
+                <a:latin typeface="Liberation Sans"/>
               </a:rPr>
               <a:t>Rujul · @rujulmatta</a:t>
+            </a:r>
+          </a:p>
+        </p:txBody>
+      </p:sp>
+      <p:sp>
+        <p:nvSpPr>
+          <p:cNvPr id="12" name="TextBox 11"/>
+          <p:cNvSpPr txBox="1"/>
+          <p:nvPr/>
+        </p:nvSpPr>
+        <p:spPr>
+          <a:xfrm>
+            <a:off x="548640" y="6263640"/>
+            <a:ext cx="11064240" cy="320040"/>
+          </a:xfrm>
+          <a:prstGeom prst="rect">
+            <a:avLst/>
+          </a:prstGeom>
+          <a:noFill/>
+        </p:spPr>
+        <p:txBody>
+          <a:bodyPr wrap="square" anchor="t" lIns="0" rIns="0" tIns="0" bIns="0">
+            <a:spAutoFit/>
+          </a:bodyPr>
+          <a:lstStyle/>
+          <a:p>
+            <a:pPr algn="l">
+              <a:lnSpc>
+                <a:spcPct val="120000"/>
+              </a:lnSpc>
+            </a:pPr>
+            <a:r>
+              <a:rPr sz="1100" b="0" i="0">
+                <a:solidFill>
+                  <a:srgbClr val="6B6B6B"/>
+                </a:solidFill>
+                <a:latin typeface="Liberation Mono"/>
+              </a:rPr>
+              <a:t>conviction-nine.vercel.app</a:t>
             </a:r>
           </a:p>
         </p:txBody>
@@ -7302,7 +7283,7 @@
         <p:spPr>
           <a:xfrm>
             <a:off x="548640" y="411480"/>
-            <a:ext cx="10972800" cy="365760"/>
+            <a:ext cx="10972800" cy="292608"/>
           </a:xfrm>
           <a:prstGeom prst="rect">
             <a:avLst/>
@@ -7321,13 +7302,13 @@
               </a:lnSpc>
             </a:pPr>
             <a:r>
-              <a:rPr sz="1100" b="0" i="0">
+              <a:rPr sz="1000" b="1" i="0">
                 <a:solidFill>
                   <a:srgbClr val="6B6B6B"/>
                 </a:solidFill>
-                <a:latin typeface="JetBrains Mono"/>
-              </a:rPr>
-              <a:t>01 · THE PROBLEM</a:t>
+                <a:latin typeface="Liberation Mono"/>
+              </a:rPr>
+              <a:t>01  ·  THE PROBLEM</a:t>
             </a:r>
           </a:p>
         </p:txBody>
@@ -7341,16 +7322,16 @@
         <p:spPr>
           <a:xfrm>
             <a:off x="548640" y="777240"/>
-            <a:ext cx="10972800" cy="914400"/>
-          </a:xfrm>
-          <a:prstGeom prst="rect">
-            <a:avLst/>
-          </a:prstGeom>
-          <a:noFill/>
-        </p:spPr>
-        <p:txBody>
-          <a:bodyPr wrap="square" anchor="t" lIns="0" rIns="0" tIns="0" bIns="0">
-            <a:spAutoFit/>
+            <a:ext cx="11064240" cy="868680"/>
+          </a:xfrm>
+          <a:prstGeom prst="rect">
+            <a:avLst/>
+          </a:prstGeom>
+          <a:noFill/>
+        </p:spPr>
+        <p:txBody>
+          <a:bodyPr wrap="square" anchor="t" lIns="0" rIns="0" tIns="0" bIns="0">
+            <a:normAutofit/>
           </a:bodyPr>
           <a:lstStyle/>
           <a:p>
@@ -7360,11 +7341,11 @@
               </a:lnSpc>
             </a:pPr>
             <a:r>
-              <a:rPr sz="4000" b="1" i="0">
+              <a:rPr sz="3600" b="1" i="0">
                 <a:solidFill>
                   <a:srgbClr val="F5F5F0"/>
                 </a:solidFill>
-                <a:latin typeface="Oxanium"/>
+                <a:latin typeface="Liberation Sans"/>
               </a:rPr>
               <a:t>Trading games on L1 can't have secrets.</a:t>
             </a:r>
@@ -7373,53 +7354,14 @@
       </p:sp>
       <p:sp>
         <p:nvSpPr>
-          <p:cNvPr id="5" name="TextBox 4"/>
-          <p:cNvSpPr txBox="1"/>
-          <p:nvPr/>
-        </p:nvSpPr>
-        <p:spPr>
-          <a:xfrm>
-            <a:off x="548640" y="2194560"/>
-            <a:ext cx="10972800" cy="457200"/>
-          </a:xfrm>
-          <a:prstGeom prst="rect">
-            <a:avLst/>
-          </a:prstGeom>
-          <a:noFill/>
-        </p:spPr>
-        <p:txBody>
-          <a:bodyPr wrap="square" anchor="t" lIns="0" rIns="0" tIns="0" bIns="0">
-            <a:spAutoFit/>
-          </a:bodyPr>
-          <a:lstStyle/>
-          <a:p>
-            <a:pPr algn="l">
-              <a:lnSpc>
-                <a:spcPct val="120000"/>
-              </a:lnSpc>
-            </a:pPr>
-            <a:r>
-              <a:rPr sz="1600" b="0" i="1">
-                <a:solidFill>
-                  <a:srgbClr val="A0A0A0"/>
-                </a:solidFill>
-                <a:latin typeface="Inter"/>
-              </a:rPr>
-              <a:t>Three things every interesting game needs, and Solana L1 blocks all three:</a:t>
-            </a:r>
-          </a:p>
-        </p:txBody>
-      </p:sp>
-      <p:sp>
-        <p:nvSpPr>
-          <p:cNvPr id="6" name="Rectangle 5"/>
+          <p:cNvPr id="5" name="Rectangle 4"/>
           <p:cNvSpPr/>
           <p:nvPr/>
         </p:nvSpPr>
         <p:spPr>
           <a:xfrm>
-            <a:off x="548640" y="2926080"/>
-            <a:ext cx="45720" cy="731520"/>
+            <a:off x="548640" y="2560320"/>
+            <a:ext cx="54864" cy="960120"/>
           </a:xfrm>
           <a:prstGeom prst="rect">
             <a:avLst/>
@@ -7455,62 +7397,62 @@
       </p:sp>
       <p:sp>
         <p:nvSpPr>
+          <p:cNvPr id="6" name="TextBox 5"/>
+          <p:cNvSpPr txBox="1"/>
+          <p:nvPr/>
+        </p:nvSpPr>
+        <p:spPr>
+          <a:xfrm>
+            <a:off x="822960" y="2542032"/>
+            <a:ext cx="10698480" cy="411480"/>
+          </a:xfrm>
+          <a:prstGeom prst="rect">
+            <a:avLst/>
+          </a:prstGeom>
+          <a:noFill/>
+        </p:spPr>
+        <p:txBody>
+          <a:bodyPr wrap="square" anchor="t" lIns="0" rIns="0" tIns="0" bIns="0">
+            <a:spAutoFit/>
+          </a:bodyPr>
+          <a:lstStyle/>
+          <a:p>
+            <a:pPr algn="l">
+              <a:lnSpc>
+                <a:spcPct val="120000"/>
+              </a:lnSpc>
+            </a:pPr>
+            <a:r>
+              <a:rPr sz="2000" b="1" i="0">
+                <a:solidFill>
+                  <a:srgbClr val="F5F5F0"/>
+                </a:solidFill>
+                <a:latin typeface="Liberation Sans"/>
+              </a:rPr>
+              <a:t>Hidden commitments</a:t>
+            </a:r>
+          </a:p>
+        </p:txBody>
+      </p:sp>
+      <p:sp>
+        <p:nvSpPr>
           <p:cNvPr id="7" name="TextBox 6"/>
           <p:cNvSpPr txBox="1"/>
           <p:nvPr/>
         </p:nvSpPr>
         <p:spPr>
           <a:xfrm>
-            <a:off x="777240" y="2880360"/>
-            <a:ext cx="10515600" cy="365760"/>
-          </a:xfrm>
-          <a:prstGeom prst="rect">
-            <a:avLst/>
-          </a:prstGeom>
-          <a:noFill/>
-        </p:spPr>
-        <p:txBody>
-          <a:bodyPr wrap="square" anchor="t" lIns="0" rIns="0" tIns="0" bIns="0">
-            <a:spAutoFit/>
-          </a:bodyPr>
-          <a:lstStyle/>
-          <a:p>
-            <a:pPr algn="l">
-              <a:lnSpc>
-                <a:spcPct val="120000"/>
-              </a:lnSpc>
-            </a:pPr>
-            <a:r>
-              <a:rPr sz="1800" b="1" i="0">
-                <a:solidFill>
-                  <a:srgbClr val="F5F5F0"/>
-                </a:solidFill>
-                <a:latin typeface="Inter"/>
-              </a:rPr>
-              <a:t>Hidden commitments</a:t>
-            </a:r>
-          </a:p>
-        </p:txBody>
-      </p:sp>
-      <p:sp>
-        <p:nvSpPr>
-          <p:cNvPr id="8" name="TextBox 7"/>
-          <p:cNvSpPr txBox="1"/>
-          <p:nvPr/>
-        </p:nvSpPr>
-        <p:spPr>
-          <a:xfrm>
-            <a:off x="777240" y="3246120"/>
-            <a:ext cx="10515600" cy="457200"/>
-          </a:xfrm>
-          <a:prstGeom prst="rect">
-            <a:avLst/>
-          </a:prstGeom>
-          <a:noFill/>
-        </p:spPr>
-        <p:txBody>
-          <a:bodyPr wrap="square" anchor="t" lIns="0" rIns="0" tIns="0" bIns="0">
-            <a:spAutoFit/>
+            <a:off x="822960" y="3017520"/>
+            <a:ext cx="10698480" cy="502920"/>
+          </a:xfrm>
+          <a:prstGeom prst="rect">
+            <a:avLst/>
+          </a:prstGeom>
+          <a:noFill/>
+        </p:spPr>
+        <p:txBody>
+          <a:bodyPr wrap="square" anchor="t" lIns="0" rIns="0" tIns="0" bIns="0">
+            <a:normAutofit/>
           </a:bodyPr>
           <a:lstStyle/>
           <a:p>
@@ -7524,7 +7466,7 @@
                 <a:solidFill>
                   <a:srgbClr val="A0A0A0"/>
                 </a:solidFill>
-                <a:latin typeface="Inter"/>
+                <a:latin typeface="Liberation Sans"/>
               </a:rPr>
               <a:t>A "sealed" threshold on L1 is readable by everyone. The rival front-runs the fold and the strategy disappears.</a:t>
             </a:r>
@@ -7533,14 +7475,14 @@
       </p:sp>
       <p:sp>
         <p:nvSpPr>
-          <p:cNvPr id="9" name="Rectangle 8"/>
+          <p:cNvPr id="8" name="Rectangle 7"/>
           <p:cNvSpPr/>
           <p:nvPr/>
         </p:nvSpPr>
         <p:spPr>
           <a:xfrm>
-            <a:off x="548640" y="3886200"/>
-            <a:ext cx="45720" cy="731520"/>
+            <a:off x="548640" y="3749039"/>
+            <a:ext cx="54864" cy="960120"/>
           </a:xfrm>
           <a:prstGeom prst="rect">
             <a:avLst/>
@@ -7576,62 +7518,62 @@
       </p:sp>
       <p:sp>
         <p:nvSpPr>
+          <p:cNvPr id="9" name="TextBox 8"/>
+          <p:cNvSpPr txBox="1"/>
+          <p:nvPr/>
+        </p:nvSpPr>
+        <p:spPr>
+          <a:xfrm>
+            <a:off x="822960" y="3730752"/>
+            <a:ext cx="10698480" cy="411480"/>
+          </a:xfrm>
+          <a:prstGeom prst="rect">
+            <a:avLst/>
+          </a:prstGeom>
+          <a:noFill/>
+        </p:spPr>
+        <p:txBody>
+          <a:bodyPr wrap="square" anchor="t" lIns="0" rIns="0" tIns="0" bIns="0">
+            <a:spAutoFit/>
+          </a:bodyPr>
+          <a:lstStyle/>
+          <a:p>
+            <a:pPr algn="l">
+              <a:lnSpc>
+                <a:spcPct val="120000"/>
+              </a:lnSpc>
+            </a:pPr>
+            <a:r>
+              <a:rPr sz="2000" b="1" i="0">
+                <a:solidFill>
+                  <a:srgbClr val="F5F5F0"/>
+                </a:solidFill>
+                <a:latin typeface="Liberation Sans"/>
+              </a:rPr>
+              <a:t>Provable randomness mid-round</a:t>
+            </a:r>
+          </a:p>
+        </p:txBody>
+      </p:sp>
+      <p:sp>
+        <p:nvSpPr>
           <p:cNvPr id="10" name="TextBox 9"/>
           <p:cNvSpPr txBox="1"/>
           <p:nvPr/>
         </p:nvSpPr>
         <p:spPr>
           <a:xfrm>
-            <a:off x="777240" y="3840480"/>
-            <a:ext cx="10515600" cy="365760"/>
-          </a:xfrm>
-          <a:prstGeom prst="rect">
-            <a:avLst/>
-          </a:prstGeom>
-          <a:noFill/>
-        </p:spPr>
-        <p:txBody>
-          <a:bodyPr wrap="square" anchor="t" lIns="0" rIns="0" tIns="0" bIns="0">
-            <a:spAutoFit/>
-          </a:bodyPr>
-          <a:lstStyle/>
-          <a:p>
-            <a:pPr algn="l">
-              <a:lnSpc>
-                <a:spcPct val="120000"/>
-              </a:lnSpc>
-            </a:pPr>
-            <a:r>
-              <a:rPr sz="1800" b="1" i="0">
-                <a:solidFill>
-                  <a:srgbClr val="F5F5F0"/>
-                </a:solidFill>
-                <a:latin typeface="Inter"/>
-              </a:rPr>
-              <a:t>Provable randomness mid-round</a:t>
-            </a:r>
-          </a:p>
-        </p:txBody>
-      </p:sp>
-      <p:sp>
-        <p:nvSpPr>
-          <p:cNvPr id="11" name="TextBox 10"/>
-          <p:cNvSpPr txBox="1"/>
-          <p:nvPr/>
-        </p:nvSpPr>
-        <p:spPr>
-          <a:xfrm>
-            <a:off x="777240" y="4206240"/>
-            <a:ext cx="10515600" cy="457200"/>
-          </a:xfrm>
-          <a:prstGeom prst="rect">
-            <a:avLst/>
-          </a:prstGeom>
-          <a:noFill/>
-        </p:spPr>
-        <p:txBody>
-          <a:bodyPr wrap="square" anchor="t" lIns="0" rIns="0" tIns="0" bIns="0">
-            <a:spAutoFit/>
+            <a:off x="822960" y="4206240"/>
+            <a:ext cx="10698480" cy="502920"/>
+          </a:xfrm>
+          <a:prstGeom prst="rect">
+            <a:avLst/>
+          </a:prstGeom>
+          <a:noFill/>
+        </p:spPr>
+        <p:txBody>
+          <a:bodyPr wrap="square" anchor="t" lIns="0" rIns="0" tIns="0" bIns="0">
+            <a:normAutofit/>
           </a:bodyPr>
           <a:lstStyle/>
           <a:p>
@@ -7645,7 +7587,7 @@
                 <a:solidFill>
                   <a:srgbClr val="A0A0A0"/>
                 </a:solidFill>
-                <a:latin typeface="Inter"/>
+                <a:latin typeface="Liberation Sans"/>
               </a:rPr>
               <a:t>A trusted oracle breaks trust. A pre-committed hash breaks the cinematic.</a:t>
             </a:r>
@@ -7654,14 +7596,14 @@
       </p:sp>
       <p:sp>
         <p:nvSpPr>
-          <p:cNvPr id="12" name="Rectangle 11"/>
+          <p:cNvPr id="11" name="Rectangle 10"/>
           <p:cNvSpPr/>
           <p:nvPr/>
         </p:nvSpPr>
         <p:spPr>
           <a:xfrm>
-            <a:off x="548640" y="4846320"/>
-            <a:ext cx="45720" cy="731520"/>
+            <a:off x="548640" y="4937759"/>
+            <a:ext cx="54864" cy="960120"/>
           </a:xfrm>
           <a:prstGeom prst="rect">
             <a:avLst/>
@@ -7697,62 +7639,62 @@
       </p:sp>
       <p:sp>
         <p:nvSpPr>
+          <p:cNvPr id="12" name="TextBox 11"/>
+          <p:cNvSpPr txBox="1"/>
+          <p:nvPr/>
+        </p:nvSpPr>
+        <p:spPr>
+          <a:xfrm>
+            <a:off x="822960" y="4919472"/>
+            <a:ext cx="10698480" cy="411480"/>
+          </a:xfrm>
+          <a:prstGeom prst="rect">
+            <a:avLst/>
+          </a:prstGeom>
+          <a:noFill/>
+        </p:spPr>
+        <p:txBody>
+          <a:bodyPr wrap="square" anchor="t" lIns="0" rIns="0" tIns="0" bIns="0">
+            <a:spAutoFit/>
+          </a:bodyPr>
+          <a:lstStyle/>
+          <a:p>
+            <a:pPr algn="l">
+              <a:lnSpc>
+                <a:spcPct val="120000"/>
+              </a:lnSpc>
+            </a:pPr>
+            <a:r>
+              <a:rPr sz="2000" b="1" i="0">
+                <a:solidFill>
+                  <a:srgbClr val="F5F5F0"/>
+                </a:solidFill>
+                <a:latin typeface="Liberation Sans"/>
+              </a:rPr>
+              <a:t>Real-time UX at scale</a:t>
+            </a:r>
+          </a:p>
+        </p:txBody>
+      </p:sp>
+      <p:sp>
+        <p:nvSpPr>
           <p:cNvPr id="13" name="TextBox 12"/>
           <p:cNvSpPr txBox="1"/>
           <p:nvPr/>
         </p:nvSpPr>
         <p:spPr>
           <a:xfrm>
-            <a:off x="777240" y="4800600"/>
-            <a:ext cx="10515600" cy="365760"/>
-          </a:xfrm>
-          <a:prstGeom prst="rect">
-            <a:avLst/>
-          </a:prstGeom>
-          <a:noFill/>
-        </p:spPr>
-        <p:txBody>
-          <a:bodyPr wrap="square" anchor="t" lIns="0" rIns="0" tIns="0" bIns="0">
-            <a:spAutoFit/>
-          </a:bodyPr>
-          <a:lstStyle/>
-          <a:p>
-            <a:pPr algn="l">
-              <a:lnSpc>
-                <a:spcPct val="120000"/>
-              </a:lnSpc>
-            </a:pPr>
-            <a:r>
-              <a:rPr sz="1800" b="1" i="0">
-                <a:solidFill>
-                  <a:srgbClr val="F5F5F0"/>
-                </a:solidFill>
-                <a:latin typeface="Inter"/>
-              </a:rPr>
-              <a:t>Real-time UX at scale</a:t>
-            </a:r>
-          </a:p>
-        </p:txBody>
-      </p:sp>
-      <p:sp>
-        <p:nvSpPr>
-          <p:cNvPr id="14" name="TextBox 13"/>
-          <p:cNvSpPr txBox="1"/>
-          <p:nvPr/>
-        </p:nvSpPr>
-        <p:spPr>
-          <a:xfrm>
-            <a:off x="777240" y="5166359"/>
-            <a:ext cx="10515600" cy="457200"/>
-          </a:xfrm>
-          <a:prstGeom prst="rect">
-            <a:avLst/>
-          </a:prstGeom>
-          <a:noFill/>
-        </p:spPr>
-        <p:txBody>
-          <a:bodyPr wrap="square" anchor="t" lIns="0" rIns="0" tIns="0" bIns="0">
-            <a:spAutoFit/>
+            <a:off x="822960" y="5394959"/>
+            <a:ext cx="10698480" cy="502920"/>
+          </a:xfrm>
+          <a:prstGeom prst="rect">
+            <a:avLst/>
+          </a:prstGeom>
+          <a:noFill/>
+        </p:spPr>
+        <p:txBody>
+          <a:bodyPr wrap="square" anchor="t" lIns="0" rIns="0" tIns="0" bIns="0">
+            <a:normAutofit/>
           </a:bodyPr>
           <a:lstStyle/>
           <a:p>
@@ -7766,7 +7708,7 @@
                 <a:solidFill>
                   <a:srgbClr val="A0A0A0"/>
                 </a:solidFill>
-                <a:latin typeface="Inter"/>
+                <a:latin typeface="Liberation Sans"/>
               </a:rPr>
               <a:t>Per-second price ticks on L1 = paid txs on a 400ms slot. Every state change is permanent bloat.</a:t>
             </a:r>
@@ -7843,7 +7785,7 @@
         <p:spPr>
           <a:xfrm>
             <a:off x="548640" y="411480"/>
-            <a:ext cx="10972800" cy="365760"/>
+            <a:ext cx="10972800" cy="292608"/>
           </a:xfrm>
           <a:prstGeom prst="rect">
             <a:avLst/>
@@ -7862,13 +7804,13 @@
               </a:lnSpc>
             </a:pPr>
             <a:r>
-              <a:rPr sz="1100" b="0" i="0">
+              <a:rPr sz="1000" b="1" i="0">
                 <a:solidFill>
                   <a:srgbClr val="6B6B6B"/>
                 </a:solidFill>
-                <a:latin typeface="JetBrains Mono"/>
-              </a:rPr>
-              <a:t>02 · THE SOLUTION</a:t>
+                <a:latin typeface="Liberation Mono"/>
+              </a:rPr>
+              <a:t>02  ·  THE SOLUTION</a:t>
             </a:r>
           </a:p>
         </p:txBody>
@@ -7882,16 +7824,16 @@
         <p:spPr>
           <a:xfrm>
             <a:off x="548640" y="777240"/>
-            <a:ext cx="10972800" cy="914400"/>
-          </a:xfrm>
-          <a:prstGeom prst="rect">
-            <a:avLst/>
-          </a:prstGeom>
-          <a:noFill/>
-        </p:spPr>
-        <p:txBody>
-          <a:bodyPr wrap="square" anchor="t" lIns="0" rIns="0" tIns="0" bIns="0">
-            <a:spAutoFit/>
+            <a:ext cx="11064240" cy="868680"/>
+          </a:xfrm>
+          <a:prstGeom prst="rect">
+            <a:avLst/>
+          </a:prstGeom>
+          <a:noFill/>
+        </p:spPr>
+        <p:txBody>
+          <a:bodyPr wrap="square" anchor="t" lIns="0" rIns="0" tIns="0" bIns="0">
+            <a:normAutofit/>
           </a:bodyPr>
           <a:lstStyle/>
           <a:p>
@@ -7901,11 +7843,11 @@
               </a:lnSpc>
             </a:pPr>
             <a:r>
-              <a:rPr sz="4000" b="1" i="0">
+              <a:rPr sz="3600" b="1" i="0">
                 <a:solidFill>
                   <a:srgbClr val="F5F5F0"/>
                 </a:solidFill>
-                <a:latin typeface="Oxanium"/>
+                <a:latin typeface="Liberation Sans"/>
               </a:rPr>
               <a:t>Conviction: a real-time risk duel.</a:t>
             </a:r>
@@ -7920,49 +7862,33 @@
         </p:nvSpPr>
         <p:spPr>
           <a:xfrm>
-            <a:off x="548640" y="2194560"/>
-            <a:ext cx="10972800" cy="548640"/>
-          </a:xfrm>
-          <a:prstGeom prst="rect">
-            <a:avLst/>
-          </a:prstGeom>
-          <a:noFill/>
-        </p:spPr>
-        <p:txBody>
-          <a:bodyPr wrap="square" anchor="t" lIns="0" rIns="0" tIns="0" bIns="0">
-            <a:spAutoFit/>
-          </a:bodyPr>
-          <a:lstStyle/>
-          <a:p>
-            <a:pPr algn="l">
-              <a:lnSpc>
-                <a:spcPct val="140000"/>
-              </a:lnSpc>
-            </a:pPr>
-            <a:r>
-              <a:rPr sz="1800" b="0" i="1">
-                <a:solidFill>
-                  <a:srgbClr val="F5F5F0"/>
-                </a:solidFill>
-                <a:latin typeface="Inter"/>
-              </a:rPr>
-              <a:t>Two teams each lock a 2-3 token basket behind a sealed threshold band.</a:t>
-            </a:r>
-          </a:p>
-          <a:p>
-            <a:pPr algn="l">
-              <a:lnSpc>
-                <a:spcPct val="140000"/>
-              </a:lnSpc>
-            </a:pPr>
-            <a:r>
-              <a:rPr sz="1800" b="0" i="1">
-                <a:solidFill>
-                  <a:srgbClr val="F5F5F0"/>
-                </a:solidFill>
-                <a:latin typeface="Inter"/>
-              </a:rPr>
-              <a:t>The basket that breaks out of the band first auto-folds; the survivor mints FTR (Founder Token) and votes on the next round.</a:t>
+            <a:off x="548640" y="1691640"/>
+            <a:ext cx="11064240" cy="502920"/>
+          </a:xfrm>
+          <a:prstGeom prst="rect">
+            <a:avLst/>
+          </a:prstGeom>
+          <a:noFill/>
+        </p:spPr>
+        <p:txBody>
+          <a:bodyPr wrap="square" anchor="t" lIns="0" rIns="0" tIns="0" bIns="0">
+            <a:normAutofit/>
+          </a:bodyPr>
+          <a:lstStyle/>
+          <a:p>
+            <a:pPr algn="l">
+              <a:lnSpc>
+                <a:spcPct val="120000"/>
+              </a:lnSpc>
+            </a:pPr>
+            <a:r>
+              <a:rPr sz="1600" b="0" i="1">
+                <a:solidFill>
+                  <a:srgbClr val="A0A0A0"/>
+                </a:solidFill>
+                <a:latin typeface="Liberation Sans"/>
+              </a:rPr>
+              <a:t>Two teams lock a 2-3 token basket behind a sealed threshold band. First to break the band, auto-folds.</a:t>
             </a:r>
           </a:p>
         </p:txBody>
@@ -7975,8 +7901,8 @@
         </p:nvSpPr>
         <p:spPr>
           <a:xfrm>
-            <a:off x="548640" y="3657600"/>
-            <a:ext cx="3566160" cy="2194560"/>
+            <a:off x="678027" y="3657600"/>
+            <a:ext cx="3520440" cy="2377440"/>
           </a:xfrm>
           <a:prstGeom prst="rect">
             <a:avLst/>
@@ -8018,8 +7944,8 @@
         </p:nvSpPr>
         <p:spPr>
           <a:xfrm>
-            <a:off x="548640" y="3657600"/>
-            <a:ext cx="3566160" cy="54864"/>
+            <a:off x="678027" y="3657600"/>
+            <a:ext cx="3520440" cy="54864"/>
           </a:xfrm>
           <a:prstGeom prst="rect">
             <a:avLst/>
@@ -8061,8 +7987,8 @@
         </p:nvSpPr>
         <p:spPr>
           <a:xfrm>
-            <a:off x="777240" y="3931920"/>
-            <a:ext cx="3200400" cy="548640"/>
+            <a:off x="906627" y="3931920"/>
+            <a:ext cx="3063240" cy="502920"/>
           </a:xfrm>
           <a:prstGeom prst="rect">
             <a:avLst/>
@@ -8085,7 +8011,7 @@
                 <a:solidFill>
                   <a:srgbClr val="4A9EFF"/>
                 </a:solidFill>
-                <a:latin typeface="Oxanium"/>
+                <a:latin typeface="Liberation Sans"/>
               </a:rPr>
               <a:t>SETUP</a:t>
             </a:r>
@@ -8100,17 +8026,17 @@
         </p:nvSpPr>
         <p:spPr>
           <a:xfrm>
-            <a:off x="777240" y="4480560"/>
-            <a:ext cx="3200400" cy="731520"/>
-          </a:xfrm>
-          <a:prstGeom prst="rect">
-            <a:avLst/>
-          </a:prstGeom>
-          <a:noFill/>
-        </p:spPr>
-        <p:txBody>
-          <a:bodyPr wrap="square" anchor="t" lIns="0" rIns="0" tIns="0" bIns="0">
-            <a:spAutoFit/>
+            <a:off x="906627" y="4526280"/>
+            <a:ext cx="3063240" cy="1280160"/>
+          </a:xfrm>
+          <a:prstGeom prst="rect">
+            <a:avLst/>
+          </a:prstGeom>
+          <a:noFill/>
+        </p:spPr>
+        <p:txBody>
+          <a:bodyPr wrap="square" anchor="t" lIns="0" rIns="0" tIns="0" bIns="0">
+            <a:normAutofit/>
           </a:bodyPr>
           <a:lstStyle/>
           <a:p>
@@ -8124,7 +8050,7 @@
                 <a:solidFill>
                   <a:srgbClr val="A0A0A0"/>
                 </a:solidFill>
-                <a:latin typeface="Inter"/>
+                <a:latin typeface="Liberation Sans"/>
               </a:rPr>
               <a:t>Lock basket + band</a:t>
             </a:r>
@@ -8139,8 +8065,8 @@
         </p:nvSpPr>
         <p:spPr>
           <a:xfrm>
-            <a:off x="4297679" y="3657600"/>
-            <a:ext cx="3566160" cy="2194560"/>
+            <a:off x="4335627" y="3657600"/>
+            <a:ext cx="3520440" cy="2377440"/>
           </a:xfrm>
           <a:prstGeom prst="rect">
             <a:avLst/>
@@ -8182,8 +8108,8 @@
         </p:nvSpPr>
         <p:spPr>
           <a:xfrm>
-            <a:off x="4297679" y="3657600"/>
-            <a:ext cx="3566160" cy="54864"/>
+            <a:off x="4335627" y="3657600"/>
+            <a:ext cx="3520440" cy="54864"/>
           </a:xfrm>
           <a:prstGeom prst="rect">
             <a:avLst/>
@@ -8225,8 +8151,8 @@
         </p:nvSpPr>
         <p:spPr>
           <a:xfrm>
-            <a:off x="4526279" y="3931920"/>
-            <a:ext cx="3200400" cy="548640"/>
+            <a:off x="4564227" y="3931920"/>
+            <a:ext cx="3063240" cy="502920"/>
           </a:xfrm>
           <a:prstGeom prst="rect">
             <a:avLst/>
@@ -8249,7 +8175,7 @@
                 <a:solidFill>
                   <a:srgbClr val="FFD23F"/>
                 </a:solidFill>
-                <a:latin typeface="Oxanium"/>
+                <a:latin typeface="Liberation Sans"/>
               </a:rPr>
               <a:t>LIVE</a:t>
             </a:r>
@@ -8264,17 +8190,17 @@
         </p:nvSpPr>
         <p:spPr>
           <a:xfrm>
-            <a:off x="4526279" y="4480560"/>
-            <a:ext cx="3200400" cy="731520"/>
-          </a:xfrm>
-          <a:prstGeom prst="rect">
-            <a:avLst/>
-          </a:prstGeom>
-          <a:noFill/>
-        </p:spPr>
-        <p:txBody>
-          <a:bodyPr wrap="square" anchor="t" lIns="0" rIns="0" tIns="0" bIns="0">
-            <a:spAutoFit/>
+            <a:off x="4564227" y="4526280"/>
+            <a:ext cx="3063240" cy="1280160"/>
+          </a:xfrm>
+          <a:prstGeom prst="rect">
+            <a:avLst/>
+          </a:prstGeom>
+          <a:noFill/>
+        </p:spPr>
+        <p:txBody>
+          <a:bodyPr wrap="square" anchor="t" lIns="0" rIns="0" tIns="0" bIns="0">
+            <a:normAutofit/>
           </a:bodyPr>
           <a:lstStyle/>
           <a:p>
@@ -8288,7 +8214,7 @@
                 <a:solidFill>
                   <a:srgbClr val="A0A0A0"/>
                 </a:solidFill>
-                <a:latin typeface="Inter"/>
+                <a:latin typeface="Liberation Sans"/>
               </a:rPr>
               <a:t>VRF + chaos callbacks</a:t>
             </a:r>
@@ -8303,8 +8229,8 @@
         </p:nvSpPr>
         <p:spPr>
           <a:xfrm>
-            <a:off x="8046719" y="3657600"/>
-            <a:ext cx="3566160" cy="2194560"/>
+            <a:off x="7993227" y="3657600"/>
+            <a:ext cx="3520440" cy="2377440"/>
           </a:xfrm>
           <a:prstGeom prst="rect">
             <a:avLst/>
@@ -8346,8 +8272,8 @@
         </p:nvSpPr>
         <p:spPr>
           <a:xfrm>
-            <a:off x="8046719" y="3657600"/>
-            <a:ext cx="3566160" cy="54864"/>
+            <a:off x="7993227" y="3657600"/>
+            <a:ext cx="3520440" cy="54864"/>
           </a:xfrm>
           <a:prstGeom prst="rect">
             <a:avLst/>
@@ -8389,8 +8315,8 @@
         </p:nvSpPr>
         <p:spPr>
           <a:xfrm>
-            <a:off x="8275319" y="3931920"/>
-            <a:ext cx="3200400" cy="548640"/>
+            <a:off x="8221827" y="3931920"/>
+            <a:ext cx="3063240" cy="502920"/>
           </a:xfrm>
           <a:prstGeom prst="rect">
             <a:avLst/>
@@ -8413,7 +8339,7 @@
                 <a:solidFill>
                   <a:srgbClr val="00FF85"/>
                 </a:solidFill>
-                <a:latin typeface="Oxanium"/>
+                <a:latin typeface="Liberation Sans"/>
               </a:rPr>
               <a:t>REVEAL</a:t>
             </a:r>
@@ -8428,17 +8354,17 @@
         </p:nvSpPr>
         <p:spPr>
           <a:xfrm>
-            <a:off x="8275319" y="4480560"/>
-            <a:ext cx="3200400" cy="731520"/>
-          </a:xfrm>
-          <a:prstGeom prst="rect">
-            <a:avLst/>
-          </a:prstGeom>
-          <a:noFill/>
-        </p:spPr>
-        <p:txBody>
-          <a:bodyPr wrap="square" anchor="t" lIns="0" rIns="0" tIns="0" bIns="0">
-            <a:spAutoFit/>
+            <a:off x="8221827" y="4526280"/>
+            <a:ext cx="3063240" cy="1280160"/>
+          </a:xfrm>
+          <a:prstGeom prst="rect">
+            <a:avLst/>
+          </a:prstGeom>
+          <a:noFill/>
+        </p:spPr>
+        <p:txBody>
+          <a:bodyPr wrap="square" anchor="t" lIns="0" rIns="0" tIns="0" bIns="0">
+            <a:normAutofit/>
           </a:bodyPr>
           <a:lstStyle/>
           <a:p>
@@ -8452,7 +8378,7 @@
                 <a:solidFill>
                   <a:srgbClr val="A0A0A0"/>
                 </a:solidFill>
-                <a:latin typeface="Inter"/>
+                <a:latin typeface="Liberation Sans"/>
               </a:rPr>
               <a:t>FTR governance</a:t>
             </a:r>
@@ -8529,7 +8455,7 @@
         <p:spPr>
           <a:xfrm>
             <a:off x="548640" y="411480"/>
-            <a:ext cx="10972800" cy="365760"/>
+            <a:ext cx="10972800" cy="292608"/>
           </a:xfrm>
           <a:prstGeom prst="rect">
             <a:avLst/>
@@ -8548,13 +8474,13 @@
               </a:lnSpc>
             </a:pPr>
             <a:r>
-              <a:rPr sz="1100" b="0" i="0">
+              <a:rPr sz="1000" b="1" i="0">
                 <a:solidFill>
                   <a:srgbClr val="6B6B6B"/>
                 </a:solidFill>
-                <a:latin typeface="JetBrains Mono"/>
-              </a:rPr>
-              <a:t>03 · WHY MAGICBLOCK</a:t>
+                <a:latin typeface="Liberation Mono"/>
+              </a:rPr>
+              <a:t>03  ·  WHY MAGICBLOCK</a:t>
             </a:r>
           </a:p>
         </p:txBody>
@@ -8568,16 +8494,16 @@
         <p:spPr>
           <a:xfrm>
             <a:off x="548640" y="777240"/>
-            <a:ext cx="10972800" cy="914400"/>
-          </a:xfrm>
-          <a:prstGeom prst="rect">
-            <a:avLst/>
-          </a:prstGeom>
-          <a:noFill/>
-        </p:spPr>
-        <p:txBody>
-          <a:bodyPr wrap="square" anchor="t" lIns="0" rIns="0" tIns="0" bIns="0">
-            <a:spAutoFit/>
+            <a:ext cx="11064240" cy="868680"/>
+          </a:xfrm>
+          <a:prstGeom prst="rect">
+            <a:avLst/>
+          </a:prstGeom>
+          <a:noFill/>
+        </p:spPr>
+        <p:txBody>
+          <a:bodyPr wrap="square" anchor="t" lIns="0" rIns="0" tIns="0" bIns="0">
+            <a:normAutofit/>
           </a:bodyPr>
           <a:lstStyle/>
           <a:p>
@@ -8587,11 +8513,11 @@
               </a:lnSpc>
             </a:pPr>
             <a:r>
-              <a:rPr sz="4000" b="1" i="0">
+              <a:rPr sz="3600" b="1" i="0">
                 <a:solidFill>
                   <a:srgbClr val="F5F5F0"/>
                 </a:solidFill>
-                <a:latin typeface="Oxanium"/>
+                <a:latin typeface="Liberation Sans"/>
               </a:rPr>
               <a:t>Three primitives, three jobs.</a:t>
             </a:r>
@@ -8606,8 +8532,8 @@
         </p:nvSpPr>
         <p:spPr>
           <a:xfrm>
-            <a:off x="548640" y="2011680"/>
-            <a:ext cx="11064240" cy="1325880"/>
+            <a:off x="548640" y="2560320"/>
+            <a:ext cx="11064240" cy="1234440"/>
           </a:xfrm>
           <a:prstGeom prst="rect">
             <a:avLst/>
@@ -8649,8 +8575,8 @@
         </p:nvSpPr>
         <p:spPr>
           <a:xfrm>
-            <a:off x="548640" y="2011680"/>
-            <a:ext cx="73152" cy="1325880"/>
+            <a:off x="548640" y="2560320"/>
+            <a:ext cx="73152" cy="1234440"/>
           </a:xfrm>
           <a:prstGeom prst="rect">
             <a:avLst/>
@@ -8692,7 +8618,7 @@
         </p:nvSpPr>
         <p:spPr>
           <a:xfrm>
-            <a:off x="777240" y="2240280"/>
+            <a:off x="777240" y="2788920"/>
             <a:ext cx="777240" cy="384048"/>
           </a:xfrm>
           <a:prstGeom prst="roundRect">
@@ -8720,7 +8646,7 @@
           </a:fontRef>
         </p:style>
         <p:txBody>
-          <a:bodyPr rtlCol="0" anchor="ctr"/>
+          <a:bodyPr rtlCol="0" anchor="ctr" lIns="73152" rIns="73152" tIns="36576" bIns="36576"/>
           <a:lstStyle/>
           <a:p>
             <a:pPr algn="ctr"/>
@@ -8729,7 +8655,7 @@
                 <a:solidFill>
                   <a:srgbClr val="0A0A0A"/>
                 </a:solidFill>
-                <a:latin typeface="JetBrains Mono"/>
+                <a:latin typeface="Liberation Mono"/>
               </a:rPr>
               <a:t>PER</a:t>
             </a:r>
@@ -8744,7 +8670,7 @@
         </p:nvSpPr>
         <p:spPr>
           <a:xfrm>
-            <a:off x="1691640" y="2240280"/>
+            <a:off x="1691640" y="2761488"/>
             <a:ext cx="3657600" cy="457200"/>
           </a:xfrm>
           <a:prstGeom prst="rect">
@@ -8764,11 +8690,11 @@
               </a:lnSpc>
             </a:pPr>
             <a:r>
-              <a:rPr sz="2200" b="1" i="0">
+              <a:rPr sz="2000" b="1" i="0">
                 <a:solidFill>
                   <a:srgbClr val="F5F5F0"/>
                 </a:solidFill>
-                <a:latin typeface="Oxanium"/>
+                <a:latin typeface="Liberation Sans"/>
               </a:rPr>
               <a:t>Permissioned ER</a:t>
             </a:r>
@@ -8783,17 +8709,17 @@
         </p:nvSpPr>
         <p:spPr>
           <a:xfrm>
-            <a:off x="1691640" y="2697480"/>
-            <a:ext cx="9601200" cy="640080"/>
-          </a:xfrm>
-          <a:prstGeom prst="rect">
-            <a:avLst/>
-          </a:prstGeom>
-          <a:noFill/>
-        </p:spPr>
-        <p:txBody>
-          <a:bodyPr wrap="square" anchor="t" lIns="0" rIns="0" tIns="0" bIns="0">
-            <a:spAutoFit/>
+            <a:off x="5486400" y="2852927"/>
+            <a:ext cx="5943600" cy="868680"/>
+          </a:xfrm>
+          <a:prstGeom prst="rect">
+            <a:avLst/>
+          </a:prstGeom>
+          <a:noFill/>
+        </p:spPr>
+        <p:txBody>
+          <a:bodyPr wrap="square" anchor="t" lIns="0" rIns="0" tIns="0" bIns="0">
+            <a:normAutofit/>
           </a:bodyPr>
           <a:lstStyle/>
           <a:p>
@@ -8807,7 +8733,7 @@
                 <a:solidFill>
                   <a:srgbClr val="A0A0A0"/>
                 </a:solidFill>
-                <a:latin typeface="Inter"/>
+                <a:latin typeface="Liberation Sans"/>
               </a:rPr>
               <a:t>Seals each team's threshold behind a member-set until finalize_round reveals. Without it, the rival reads your StopLoss PDA off base layer and front-runs the fold.</a:t>
             </a:r>
@@ -8822,8 +8748,8 @@
         </p:nvSpPr>
         <p:spPr>
           <a:xfrm>
-            <a:off x="548640" y="3474720"/>
-            <a:ext cx="11064240" cy="1325880"/>
+            <a:off x="548640" y="3931920"/>
+            <a:ext cx="11064240" cy="1234440"/>
           </a:xfrm>
           <a:prstGeom prst="rect">
             <a:avLst/>
@@ -8865,8 +8791,8 @@
         </p:nvSpPr>
         <p:spPr>
           <a:xfrm>
-            <a:off x="548640" y="3474720"/>
-            <a:ext cx="73152" cy="1325880"/>
+            <a:off x="548640" y="3931920"/>
+            <a:ext cx="73152" cy="1234440"/>
           </a:xfrm>
           <a:prstGeom prst="rect">
             <a:avLst/>
@@ -8908,7 +8834,7 @@
         </p:nvSpPr>
         <p:spPr>
           <a:xfrm>
-            <a:off x="777240" y="3703320"/>
+            <a:off x="777240" y="4160520"/>
             <a:ext cx="777240" cy="384048"/>
           </a:xfrm>
           <a:prstGeom prst="roundRect">
@@ -8936,7 +8862,7 @@
           </a:fontRef>
         </p:style>
         <p:txBody>
-          <a:bodyPr rtlCol="0" anchor="ctr"/>
+          <a:bodyPr rtlCol="0" anchor="ctr" lIns="73152" rIns="73152" tIns="36576" bIns="36576"/>
           <a:lstStyle/>
           <a:p>
             <a:pPr algn="ctr"/>
@@ -8945,7 +8871,7 @@
                 <a:solidFill>
                   <a:srgbClr val="0A0A0A"/>
                 </a:solidFill>
-                <a:latin typeface="JetBrains Mono"/>
+                <a:latin typeface="Liberation Mono"/>
               </a:rPr>
               <a:t>VRF</a:t>
             </a:r>
@@ -8960,7 +8886,7 @@
         </p:nvSpPr>
         <p:spPr>
           <a:xfrm>
-            <a:off x="1691640" y="3703320"/>
+            <a:off x="1691640" y="4133087"/>
             <a:ext cx="3657600" cy="457200"/>
           </a:xfrm>
           <a:prstGeom prst="rect">
@@ -8980,11 +8906,11 @@
               </a:lnSpc>
             </a:pPr>
             <a:r>
-              <a:rPr sz="2200" b="1" i="0">
+              <a:rPr sz="2000" b="1" i="0">
                 <a:solidFill>
                   <a:srgbClr val="F5F5F0"/>
                 </a:solidFill>
-                <a:latin typeface="Oxanium"/>
+                <a:latin typeface="Liberation Sans"/>
               </a:rPr>
               <a:t>MagicBlock VRF</a:t>
             </a:r>
@@ -8999,17 +8925,17 @@
         </p:nvSpPr>
         <p:spPr>
           <a:xfrm>
-            <a:off x="1691640" y="4160520"/>
-            <a:ext cx="9601200" cy="640080"/>
-          </a:xfrm>
-          <a:prstGeom prst="rect">
-            <a:avLst/>
-          </a:prstGeom>
-          <a:noFill/>
-        </p:spPr>
-        <p:txBody>
-          <a:bodyPr wrap="square" anchor="t" lIns="0" rIns="0" tIns="0" bIns="0">
-            <a:spAutoFit/>
+            <a:off x="5486400" y="4224528"/>
+            <a:ext cx="5943600" cy="868680"/>
+          </a:xfrm>
+          <a:prstGeom prst="rect">
+            <a:avLst/>
+          </a:prstGeom>
+          <a:noFill/>
+        </p:spPr>
+        <p:txBody>
+          <a:bodyPr wrap="square" anchor="t" lIns="0" rIns="0" tIns="0" bIns="0">
+            <a:normAutofit/>
           </a:bodyPr>
           <a:lstStyle/>
           <a:p>
@@ -9023,7 +8949,7 @@
                 <a:solidFill>
                   <a:srgbClr val="A0A0A0"/>
                 </a:solidFill>
-                <a:latin typeface="Inter"/>
+                <a:latin typeface="Liberation Sans"/>
               </a:rPr>
               <a:t>Fires villain token + chaos-event callbacks mid-round. A trusted oracle breaks trust; a pre-committed hash breaks the cinematic.</a:t>
             </a:r>
@@ -9038,8 +8964,8 @@
         </p:nvSpPr>
         <p:spPr>
           <a:xfrm>
-            <a:off x="548640" y="4937760"/>
-            <a:ext cx="11064240" cy="1325880"/>
+            <a:off x="548640" y="5303520"/>
+            <a:ext cx="11064240" cy="1234440"/>
           </a:xfrm>
           <a:prstGeom prst="rect">
             <a:avLst/>
@@ -9081,8 +9007,8 @@
         </p:nvSpPr>
         <p:spPr>
           <a:xfrm>
-            <a:off x="548640" y="4937760"/>
-            <a:ext cx="73152" cy="1325880"/>
+            <a:off x="548640" y="5303520"/>
+            <a:ext cx="73152" cy="1234440"/>
           </a:xfrm>
           <a:prstGeom prst="rect">
             <a:avLst/>
@@ -9124,7 +9050,7 @@
         </p:nvSpPr>
         <p:spPr>
           <a:xfrm>
-            <a:off x="777240" y="5166360"/>
+            <a:off x="777240" y="5532120"/>
             <a:ext cx="777240" cy="384048"/>
           </a:xfrm>
           <a:prstGeom prst="roundRect">
@@ -9152,7 +9078,7 @@
           </a:fontRef>
         </p:style>
         <p:txBody>
-          <a:bodyPr rtlCol="0" anchor="ctr"/>
+          <a:bodyPr rtlCol="0" anchor="ctr" lIns="73152" rIns="73152" tIns="36576" bIns="36576"/>
           <a:lstStyle/>
           <a:p>
             <a:pPr algn="ctr"/>
@@ -9161,7 +9087,7 @@
                 <a:solidFill>
                   <a:srgbClr val="0A0A0A"/>
                 </a:solidFill>
-                <a:latin typeface="JetBrains Mono"/>
+                <a:latin typeface="Liberation Mono"/>
               </a:rPr>
               <a:t>ER</a:t>
             </a:r>
@@ -9176,7 +9102,7 @@
         </p:nvSpPr>
         <p:spPr>
           <a:xfrm>
-            <a:off x="1691640" y="5166360"/>
+            <a:off x="1691640" y="5504688"/>
             <a:ext cx="3657600" cy="457200"/>
           </a:xfrm>
           <a:prstGeom prst="rect">
@@ -9196,11 +9122,11 @@
               </a:lnSpc>
             </a:pPr>
             <a:r>
-              <a:rPr sz="2200" b="1" i="0">
+              <a:rPr sz="2000" b="1" i="0">
                 <a:solidFill>
                   <a:srgbClr val="F5F5F0"/>
                 </a:solidFill>
-                <a:latin typeface="Oxanium"/>
+                <a:latin typeface="Liberation Sans"/>
               </a:rPr>
               <a:t>Ephemeral Rollups</a:t>
             </a:r>
@@ -9215,17 +9141,17 @@
         </p:nvSpPr>
         <p:spPr>
           <a:xfrm>
-            <a:off x="1691640" y="5623560"/>
-            <a:ext cx="9601200" cy="640080"/>
-          </a:xfrm>
-          <a:prstGeom prst="rect">
-            <a:avLst/>
-          </a:prstGeom>
-          <a:noFill/>
-        </p:spPr>
-        <p:txBody>
-          <a:bodyPr wrap="square" anchor="t" lIns="0" rIns="0" tIns="0" bIns="0">
-            <a:spAutoFit/>
+            <a:off x="5486400" y="5596128"/>
+            <a:ext cx="5943600" cy="868680"/>
+          </a:xfrm>
+          <a:prstGeom prst="rect">
+            <a:avLst/>
+          </a:prstGeom>
+          <a:noFill/>
+        </p:spPr>
+        <p:txBody>
+          <a:bodyPr wrap="square" anchor="t" lIns="0" rIns="0" tIns="0" bIns="0">
+            <a:normAutofit/>
           </a:bodyPr>
           <a:lstStyle/>
           <a:p>
@@ -9239,7 +9165,7 @@
                 <a:solidFill>
                   <a:srgbClr val="A0A0A0"/>
                 </a:solidFill>
-                <a:latin typeface="Inter"/>
+                <a:latin typeface="Liberation Sans"/>
               </a:rPr>
               <a:t>Per-second price ticks cheap, fast, and ephemeral. On L1 every tick is a paid tx on a 400ms slot. ER keeps mid-round state off base and only settles the final result.</a:t>
             </a:r>
@@ -9316,7 +9242,7 @@
         <p:spPr>
           <a:xfrm>
             <a:off x="548640" y="411480"/>
-            <a:ext cx="10972800" cy="365760"/>
+            <a:ext cx="10972800" cy="292608"/>
           </a:xfrm>
           <a:prstGeom prst="rect">
             <a:avLst/>
@@ -9335,13 +9261,13 @@
               </a:lnSpc>
             </a:pPr>
             <a:r>
-              <a:rPr sz="1100" b="0" i="0">
+              <a:rPr sz="1000" b="1" i="0">
                 <a:solidFill>
                   <a:srgbClr val="6B6B6B"/>
                 </a:solidFill>
-                <a:latin typeface="JetBrains Mono"/>
-              </a:rPr>
-              <a:t>04 · ARCHITECTURE</a:t>
+                <a:latin typeface="Liberation Mono"/>
+              </a:rPr>
+              <a:t>04  ·  ARCHITECTURE</a:t>
             </a:r>
           </a:p>
         </p:txBody>
@@ -9355,16 +9281,16 @@
         <p:spPr>
           <a:xfrm>
             <a:off x="548640" y="777240"/>
-            <a:ext cx="10972800" cy="914400"/>
-          </a:xfrm>
-          <a:prstGeom prst="rect">
-            <a:avLst/>
-          </a:prstGeom>
-          <a:noFill/>
-        </p:spPr>
-        <p:txBody>
-          <a:bodyPr wrap="square" anchor="t" lIns="0" rIns="0" tIns="0" bIns="0">
-            <a:spAutoFit/>
+            <a:ext cx="11064240" cy="868680"/>
+          </a:xfrm>
+          <a:prstGeom prst="rect">
+            <a:avLst/>
+          </a:prstGeom>
+          <a:noFill/>
+        </p:spPr>
+        <p:txBody>
+          <a:bodyPr wrap="square" anchor="t" lIns="0" rIns="0" tIns="0" bIns="0">
+            <a:normAutofit/>
           </a:bodyPr>
           <a:lstStyle/>
           <a:p>
@@ -9374,11 +9300,11 @@
               </a:lnSpc>
             </a:pPr>
             <a:r>
-              <a:rPr sz="4000" b="1" i="0">
+              <a:rPr sz="3600" b="1" i="0">
                 <a:solidFill>
                   <a:srgbClr val="F5F5F0"/>
                 </a:solidFill>
-                <a:latin typeface="Oxanium"/>
+                <a:latin typeface="Liberation Sans"/>
               </a:rPr>
               <a:t>How it fits together.</a:t>
             </a:r>
@@ -9393,8 +9319,8 @@
         </p:nvSpPr>
         <p:spPr>
           <a:xfrm>
-            <a:off x="548640" y="2194560"/>
-            <a:ext cx="3657600" cy="1828800"/>
+            <a:off x="548640" y="2697480"/>
+            <a:ext cx="3703320" cy="2103120"/>
           </a:xfrm>
           <a:prstGeom prst="rect">
             <a:avLst/>
@@ -9436,8 +9362,8 @@
         </p:nvSpPr>
         <p:spPr>
           <a:xfrm>
-            <a:off x="548640" y="2194560"/>
-            <a:ext cx="3657600" cy="54864"/>
+            <a:off x="548640" y="2697480"/>
+            <a:ext cx="3703320" cy="54864"/>
           </a:xfrm>
           <a:prstGeom prst="rect">
             <a:avLst/>
@@ -9479,8 +9405,8 @@
         </p:nvSpPr>
         <p:spPr>
           <a:xfrm>
-            <a:off x="777240" y="2331720"/>
-            <a:ext cx="3200400" cy="365760"/>
+            <a:off x="777240" y="2834640"/>
+            <a:ext cx="3246120" cy="365760"/>
           </a:xfrm>
           <a:prstGeom prst="rect">
             <a:avLst/>
@@ -9499,11 +9425,11 @@
               </a:lnSpc>
             </a:pPr>
             <a:r>
-              <a:rPr sz="1100" b="1" i="0">
+              <a:rPr sz="1000" b="1" i="0">
                 <a:solidFill>
                   <a:srgbClr val="00FF85"/>
                 </a:solidFill>
-                <a:latin typeface="JetBrains Mono"/>
+                <a:latin typeface="Liberation Mono"/>
               </a:rPr>
               <a:t>FRONTEND</a:t>
             </a:r>
@@ -9518,8 +9444,8 @@
         </p:nvSpPr>
         <p:spPr>
           <a:xfrm>
-            <a:off x="777240" y="2743200"/>
-            <a:ext cx="3200400" cy="365760"/>
+            <a:off x="777240" y="3246120"/>
+            <a:ext cx="3246120" cy="365760"/>
           </a:xfrm>
           <a:prstGeom prst="rect">
             <a:avLst/>
@@ -9538,11 +9464,11 @@
               </a:lnSpc>
             </a:pPr>
             <a:r>
-              <a:rPr sz="1600" b="1" i="0">
+              <a:rPr sz="1500" b="1" i="0">
                 <a:solidFill>
                   <a:srgbClr val="F5F5F0"/>
                 </a:solidFill>
-                <a:latin typeface="Oxanium"/>
+                <a:latin typeface="Liberation Sans"/>
               </a:rPr>
               <a:t>Next.js 14 (Vercel)</a:t>
             </a:r>
@@ -9557,8 +9483,8 @@
         </p:nvSpPr>
         <p:spPr>
           <a:xfrm>
-            <a:off x="777240" y="3246120"/>
-            <a:ext cx="3200400" cy="274320"/>
+            <a:off x="777240" y="3657600"/>
+            <a:ext cx="3246120" cy="274320"/>
           </a:xfrm>
           <a:prstGeom prst="rect">
             <a:avLst/>
@@ -9581,7 +9507,7 @@
                 <a:solidFill>
                   <a:srgbClr val="A0A0A0"/>
                 </a:solidFill>
-                <a:latin typeface="JetBrains Mono"/>
+                <a:latin typeface="Liberation Mono"/>
               </a:rPr>
               <a:t>10 routes · shadcn · Framer Motion</a:t>
             </a:r>
@@ -9596,8 +9522,8 @@
         </p:nvSpPr>
         <p:spPr>
           <a:xfrm>
-            <a:off x="777240" y="3520440"/>
-            <a:ext cx="3200400" cy="274320"/>
+            <a:off x="777240" y="3931920"/>
+            <a:ext cx="3246120" cy="274320"/>
           </a:xfrm>
           <a:prstGeom prst="rect">
             <a:avLst/>
@@ -9620,7 +9546,7 @@
                 <a:solidFill>
                   <a:srgbClr val="A0A0A0"/>
                 </a:solidFill>
-                <a:latin typeface="JetBrains Mono"/>
+                <a:latin typeface="Liberation Mono"/>
               </a:rPr>
               <a:t>app/lib/api/real.ts (18 fns wired)</a:t>
             </a:r>
@@ -9635,8 +9561,8 @@
         </p:nvSpPr>
         <p:spPr>
           <a:xfrm>
-            <a:off x="777240" y="3703320"/>
-            <a:ext cx="3200400" cy="274320"/>
+            <a:off x="777240" y="4160520"/>
+            <a:ext cx="3246120" cy="274320"/>
           </a:xfrm>
           <a:prstGeom prst="rect">
             <a:avLst/>
@@ -9659,7 +9585,7 @@
                 <a:solidFill>
                   <a:srgbClr val="A0A0A0"/>
                 </a:solidFill>
-                <a:latin typeface="JetBrains Mono"/>
+                <a:latin typeface="Liberation Mono"/>
               </a:rPr>
               <a:t>app/lib/anchor/* (PDA + context)</a:t>
             </a:r>
@@ -9674,8 +9600,8 @@
         </p:nvSpPr>
         <p:spPr>
           <a:xfrm>
-            <a:off x="4434840" y="2194560"/>
-            <a:ext cx="3291840" cy="1828800"/>
+            <a:off x="4434840" y="2697480"/>
+            <a:ext cx="3703320" cy="2103120"/>
           </a:xfrm>
           <a:prstGeom prst="rect">
             <a:avLst/>
@@ -9717,8 +9643,8 @@
         </p:nvSpPr>
         <p:spPr>
           <a:xfrm>
-            <a:off x="4434840" y="2194560"/>
-            <a:ext cx="3291840" cy="54864"/>
+            <a:off x="4434840" y="2697480"/>
+            <a:ext cx="3703320" cy="54864"/>
           </a:xfrm>
           <a:prstGeom prst="rect">
             <a:avLst/>
@@ -9760,8 +9686,8 @@
         </p:nvSpPr>
         <p:spPr>
           <a:xfrm>
-            <a:off x="4663440" y="2331720"/>
-            <a:ext cx="2743200" cy="365760"/>
+            <a:off x="4663440" y="2834640"/>
+            <a:ext cx="3246120" cy="365760"/>
           </a:xfrm>
           <a:prstGeom prst="rect">
             <a:avLst/>
@@ -9780,11 +9706,11 @@
               </a:lnSpc>
             </a:pPr>
             <a:r>
-              <a:rPr sz="1100" b="1" i="0">
+              <a:rPr sz="1000" b="1" i="0">
                 <a:solidFill>
                   <a:srgbClr val="4A9EFF"/>
                 </a:solidFill>
-                <a:latin typeface="JetBrains Mono"/>
+                <a:latin typeface="Liberation Mono"/>
               </a:rPr>
               <a:t>RPC</a:t>
             </a:r>
@@ -9799,8 +9725,8 @@
         </p:nvSpPr>
         <p:spPr>
           <a:xfrm>
-            <a:off x="4663440" y="2743200"/>
-            <a:ext cx="2743200" cy="365760"/>
+            <a:off x="4663440" y="3246120"/>
+            <a:ext cx="3246120" cy="365760"/>
           </a:xfrm>
           <a:prstGeom prst="rect">
             <a:avLst/>
@@ -9819,11 +9745,11 @@
               </a:lnSpc>
             </a:pPr>
             <a:r>
-              <a:rPr sz="1600" b="1" i="0">
+              <a:rPr sz="1500" b="1" i="0">
                 <a:solidFill>
                   <a:srgbClr val="F5F5F0"/>
                 </a:solidFill>
-                <a:latin typeface="Oxanium"/>
+                <a:latin typeface="Liberation Sans"/>
               </a:rPr>
               <a:t>MagicBlock devnet</a:t>
             </a:r>
@@ -9838,8 +9764,8 @@
         </p:nvSpPr>
         <p:spPr>
           <a:xfrm>
-            <a:off x="4663440" y="3246120"/>
-            <a:ext cx="2743200" cy="274320"/>
+            <a:off x="4663440" y="3657600"/>
+            <a:ext cx="3246120" cy="274320"/>
           </a:xfrm>
           <a:prstGeom prst="rect">
             <a:avLst/>
@@ -9862,7 +9788,7 @@
                 <a:solidFill>
                   <a:srgbClr val="A0A0A0"/>
                 </a:solidFill>
-                <a:latin typeface="JetBrains Mono"/>
+                <a:latin typeface="Liberation Mono"/>
               </a:rPr>
               <a:t>Base layer (solana L1)</a:t>
             </a:r>
@@ -9877,8 +9803,8 @@
         </p:nvSpPr>
         <p:spPr>
           <a:xfrm>
-            <a:off x="4663440" y="3520440"/>
-            <a:ext cx="2743200" cy="274320"/>
+            <a:off x="4663440" y="3931920"/>
+            <a:ext cx="3246120" cy="274320"/>
           </a:xfrm>
           <a:prstGeom prst="rect">
             <a:avLst/>
@@ -9901,7 +9827,7 @@
                 <a:solidFill>
                   <a:srgbClr val="A0A0A0"/>
                 </a:solidFill>
-                <a:latin typeface="JetBrains Mono"/>
+                <a:latin typeface="Liberation Mono"/>
               </a:rPr>
               <a:t>ER (per-PDA FQDN)</a:t>
             </a:r>
@@ -9916,8 +9842,8 @@
         </p:nvSpPr>
         <p:spPr>
           <a:xfrm>
-            <a:off x="4663440" y="3703320"/>
-            <a:ext cx="2743200" cy="274320"/>
+            <a:off x="4663440" y="4160520"/>
+            <a:ext cx="3246120" cy="274320"/>
           </a:xfrm>
           <a:prstGeom prst="rect">
             <a:avLst/>
@@ -9940,7 +9866,7 @@
                 <a:solidFill>
                   <a:srgbClr val="A0A0A0"/>
                 </a:solidFill>
-                <a:latin typeface="JetBrains Mono"/>
+                <a:latin typeface="Liberation Mono"/>
               </a:rPr>
               <a:t>via router getDelegationStatus</a:t>
             </a:r>
@@ -9955,8 +9881,8 @@
         </p:nvSpPr>
         <p:spPr>
           <a:xfrm>
-            <a:off x="7955279" y="2194560"/>
-            <a:ext cx="3657600" cy="1828800"/>
+            <a:off x="8321040" y="2697480"/>
+            <a:ext cx="3703320" cy="2103120"/>
           </a:xfrm>
           <a:prstGeom prst="rect">
             <a:avLst/>
@@ -9998,8 +9924,8 @@
         </p:nvSpPr>
         <p:spPr>
           <a:xfrm>
-            <a:off x="7955279" y="2194560"/>
-            <a:ext cx="3657600" cy="54864"/>
+            <a:off x="8321040" y="2697480"/>
+            <a:ext cx="3703320" cy="54864"/>
           </a:xfrm>
           <a:prstGeom prst="rect">
             <a:avLst/>
@@ -10041,8 +9967,8 @@
         </p:nvSpPr>
         <p:spPr>
           <a:xfrm>
-            <a:off x="8183879" y="2331720"/>
-            <a:ext cx="3200400" cy="365760"/>
+            <a:off x="8549640" y="2834640"/>
+            <a:ext cx="3246120" cy="365760"/>
           </a:xfrm>
           <a:prstGeom prst="rect">
             <a:avLst/>
@@ -10061,11 +9987,11 @@
               </a:lnSpc>
             </a:pPr>
             <a:r>
-              <a:rPr sz="1100" b="1" i="0">
+              <a:rPr sz="1000" b="1" i="0">
                 <a:solidFill>
                   <a:srgbClr val="FFD23F"/>
                 </a:solidFill>
-                <a:latin typeface="JetBrains Mono"/>
+                <a:latin typeface="Liberation Mono"/>
               </a:rPr>
               <a:t>ON-CHAIN</a:t>
             </a:r>
@@ -10080,8 +10006,8 @@
         </p:nvSpPr>
         <p:spPr>
           <a:xfrm>
-            <a:off x="8183879" y="2743200"/>
-            <a:ext cx="3200400" cy="365760"/>
+            <a:off x="8549640" y="3246120"/>
+            <a:ext cx="3246120" cy="365760"/>
           </a:xfrm>
           <a:prstGeom prst="rect">
             <a:avLst/>
@@ -10100,11 +10026,11 @@
               </a:lnSpc>
             </a:pPr>
             <a:r>
-              <a:rPr sz="1600" b="1" i="0">
+              <a:rPr sz="1500" b="1" i="0">
                 <a:solidFill>
                   <a:srgbClr val="F5F5F0"/>
                 </a:solidFill>
-                <a:latin typeface="Oxanium"/>
+                <a:latin typeface="Liberation Sans"/>
               </a:rPr>
               <a:t>conviction program</a:t>
             </a:r>
@@ -10119,8 +10045,8 @@
         </p:nvSpPr>
         <p:spPr>
           <a:xfrm>
-            <a:off x="8183879" y="3246120"/>
-            <a:ext cx="3200400" cy="274320"/>
+            <a:off x="8549640" y="3657600"/>
+            <a:ext cx="3246120" cy="274320"/>
           </a:xfrm>
           <a:prstGeom prst="rect">
             <a:avLst/>
@@ -10143,7 +10069,7 @@
                 <a:solidFill>
                   <a:srgbClr val="A0A0A0"/>
                 </a:solidFill>
-                <a:latin typeface="JetBrains Mono"/>
+                <a:latin typeface="Liberation Mono"/>
               </a:rPr>
               <a:t>24 instructions · 9 accounts</a:t>
             </a:r>
@@ -10158,8 +10084,8 @@
         </p:nvSpPr>
         <p:spPr>
           <a:xfrm>
-            <a:off x="8183879" y="3520440"/>
-            <a:ext cx="3200400" cy="274320"/>
+            <a:off x="8549640" y="3931920"/>
+            <a:ext cx="3246120" cy="274320"/>
           </a:xfrm>
           <a:prstGeom prst="rect">
             <a:avLst/>
@@ -10182,7 +10108,7 @@
                 <a:solidFill>
                   <a:srgbClr val="A0A0A0"/>
                 </a:solidFill>
-                <a:latin typeface="JetBrains Mono"/>
+                <a:latin typeface="Liberation Mono"/>
               </a:rPr>
               <a:t>Delegated to ER per match</a:t>
             </a:r>
@@ -10197,8 +10123,8 @@
         </p:nvSpPr>
         <p:spPr>
           <a:xfrm>
-            <a:off x="8183879" y="3703320"/>
-            <a:ext cx="3200400" cy="274320"/>
+            <a:off x="8549640" y="4160520"/>
+            <a:ext cx="3246120" cy="274320"/>
           </a:xfrm>
           <a:prstGeom prst="rect">
             <a:avLst/>
@@ -10221,7 +10147,7 @@
                 <a:solidFill>
                   <a:srgbClr val="A0A0A0"/>
                 </a:solidFill>
-                <a:latin typeface="JetBrains Mono"/>
+                <a:latin typeface="Liberation Mono"/>
               </a:rPr>
               <a:t>PER-sealed baskets + thresholds</a:t>
             </a:r>
@@ -10236,8 +10162,8 @@
         </p:nvSpPr>
         <p:spPr>
           <a:xfrm>
-            <a:off x="548640" y="4297680"/>
-            <a:ext cx="11064240" cy="1371600"/>
+            <a:off x="548640" y="5074920"/>
+            <a:ext cx="11064240" cy="1280160"/>
           </a:xfrm>
           <a:prstGeom prst="rect">
             <a:avLst/>
@@ -10279,7 +10205,46 @@
         </p:nvSpPr>
         <p:spPr>
           <a:xfrm>
-            <a:off x="777240" y="4434840"/>
+            <a:off x="777240" y="5212080"/>
+            <a:ext cx="10515600" cy="320040"/>
+          </a:xfrm>
+          <a:prstGeom prst="rect">
+            <a:avLst/>
+          </a:prstGeom>
+          <a:noFill/>
+        </p:spPr>
+        <p:txBody>
+          <a:bodyPr wrap="square" anchor="t" lIns="0" rIns="0" tIns="0" bIns="0">
+            <a:spAutoFit/>
+          </a:bodyPr>
+          <a:lstStyle/>
+          <a:p>
+            <a:pPr algn="l">
+              <a:lnSpc>
+                <a:spcPct val="120000"/>
+              </a:lnSpc>
+            </a:pPr>
+            <a:r>
+              <a:rPr sz="1000" b="1" i="0">
+                <a:solidFill>
+                  <a:srgbClr val="6B6B6B"/>
+                </a:solidFill>
+                <a:latin typeface="Liberation Mono"/>
+              </a:rPr>
+              <a:t>SIDECAR</a:t>
+            </a:r>
+          </a:p>
+        </p:txBody>
+      </p:sp>
+      <p:sp>
+        <p:nvSpPr>
+          <p:cNvPr id="28" name="TextBox 27"/>
+          <p:cNvSpPr txBox="1"/>
+          <p:nvPr/>
+        </p:nvSpPr>
+        <p:spPr>
+          <a:xfrm>
+            <a:off x="777240" y="5532120"/>
             <a:ext cx="10515600" cy="365760"/>
           </a:xfrm>
           <a:prstGeom prst="rect">
@@ -10299,26 +10264,26 @@
               </a:lnSpc>
             </a:pPr>
             <a:r>
-              <a:rPr sz="1100" b="1" i="0">
-                <a:solidFill>
-                  <a:srgbClr val="6B6B6B"/>
-                </a:solidFill>
-                <a:latin typeface="JetBrains Mono"/>
-              </a:rPr>
-              <a:t>SIDECAR</a:t>
-            </a:r>
-          </a:p>
-        </p:txBody>
-      </p:sp>
-      <p:sp>
-        <p:nvSpPr>
-          <p:cNvPr id="28" name="TextBox 27"/>
-          <p:cNvSpPr txBox="1"/>
-          <p:nvPr/>
-        </p:nvSpPr>
-        <p:spPr>
-          <a:xfrm>
-            <a:off x="777240" y="4754880"/>
+              <a:rPr sz="1500" b="1" i="0">
+                <a:solidFill>
+                  <a:srgbClr val="F5F5F0"/>
+                </a:solidFill>
+                <a:latin typeface="Liberation Sans"/>
+              </a:rPr>
+              <a:t>Birdeye public API</a:t>
+            </a:r>
+          </a:p>
+        </p:txBody>
+      </p:sp>
+      <p:sp>
+        <p:nvSpPr>
+          <p:cNvPr id="29" name="TextBox 28"/>
+          <p:cNvSpPr txBox="1"/>
+          <p:nvPr/>
+        </p:nvSpPr>
+        <p:spPr>
+          <a:xfrm>
+            <a:off x="777240" y="5943600"/>
             <a:ext cx="10515600" cy="365760"/>
           </a:xfrm>
           <a:prstGeom prst="rect">
@@ -10328,46 +10293,7 @@
         </p:spPr>
         <p:txBody>
           <a:bodyPr wrap="square" anchor="t" lIns="0" rIns="0" tIns="0" bIns="0">
-            <a:spAutoFit/>
-          </a:bodyPr>
-          <a:lstStyle/>
-          <a:p>
-            <a:pPr algn="l">
-              <a:lnSpc>
-                <a:spcPct val="120000"/>
-              </a:lnSpc>
-            </a:pPr>
-            <a:r>
-              <a:rPr sz="1600" b="1" i="0">
-                <a:solidFill>
-                  <a:srgbClr val="F5F5F0"/>
-                </a:solidFill>
-                <a:latin typeface="Oxanium"/>
-              </a:rPr>
-              <a:t>Birdeye public API</a:t>
-            </a:r>
-          </a:p>
-        </p:txBody>
-      </p:sp>
-      <p:sp>
-        <p:nvSpPr>
-          <p:cNvPr id="29" name="TextBox 28"/>
-          <p:cNvSpPr txBox="1"/>
-          <p:nvPr/>
-        </p:nvSpPr>
-        <p:spPr>
-          <a:xfrm>
-            <a:off x="777240" y="5257800"/>
-            <a:ext cx="10515600" cy="365760"/>
-          </a:xfrm>
-          <a:prstGeom prst="rect">
-            <a:avLst/>
-          </a:prstGeom>
-          <a:noFill/>
-        </p:spPr>
-        <p:txBody>
-          <a:bodyPr wrap="square" anchor="t" lIns="0" rIns="0" tIns="0" bIns="0">
-            <a:spAutoFit/>
+            <a:normAutofit/>
           </a:bodyPr>
           <a:lstStyle/>
           <a:p>
@@ -10377,11 +10303,11 @@
               </a:lnSpc>
             </a:pPr>
             <a:r>
-              <a:rPr sz="1200" b="0" i="0">
+              <a:rPr sz="1100" b="0" i="0">
                 <a:solidFill>
                   <a:srgbClr val="A0A0A0"/>
                 </a:solidFill>
-                <a:latin typeface="Inter"/>
+                <a:latin typeface="Liberation Sans"/>
               </a:rPr>
               <a:t>10s price polling on every basket mint in the live round. Chart flips "Mock walk" → "Birdeye live" pill automatically.</a:t>
             </a:r>
@@ -10458,7 +10384,7 @@
         <p:spPr>
           <a:xfrm>
             <a:off x="548640" y="411480"/>
-            <a:ext cx="10972800" cy="365760"/>
+            <a:ext cx="10972800" cy="292608"/>
           </a:xfrm>
           <a:prstGeom prst="rect">
             <a:avLst/>
@@ -10477,13 +10403,13 @@
               </a:lnSpc>
             </a:pPr>
             <a:r>
-              <a:rPr sz="1100" b="0" i="0">
+              <a:rPr sz="1000" b="1" i="0">
                 <a:solidFill>
                   <a:srgbClr val="6B6B6B"/>
                 </a:solidFill>
-                <a:latin typeface="JetBrains Mono"/>
-              </a:rPr>
-              <a:t>05 · THE MECHANIC</a:t>
+                <a:latin typeface="Liberation Mono"/>
+              </a:rPr>
+              <a:t>05  ·  THE MECHANIC</a:t>
             </a:r>
           </a:p>
         </p:txBody>
@@ -10497,16 +10423,16 @@
         <p:spPr>
           <a:xfrm>
             <a:off x="548640" y="777240"/>
-            <a:ext cx="10972800" cy="914400"/>
-          </a:xfrm>
-          <a:prstGeom prst="rect">
-            <a:avLst/>
-          </a:prstGeom>
-          <a:noFill/>
-        </p:spPr>
-        <p:txBody>
-          <a:bodyPr wrap="square" anchor="t" lIns="0" rIns="0" tIns="0" bIns="0">
-            <a:spAutoFit/>
+            <a:ext cx="11064240" cy="868680"/>
+          </a:xfrm>
+          <a:prstGeom prst="rect">
+            <a:avLst/>
+          </a:prstGeom>
+          <a:noFill/>
+        </p:spPr>
+        <p:txBody>
+          <a:bodyPr wrap="square" anchor="t" lIns="0" rIns="0" tIns="0" bIns="0">
+            <a:normAutofit/>
           </a:bodyPr>
           <a:lstStyle/>
           <a:p>
@@ -10516,11 +10442,11 @@
               </a:lnSpc>
             </a:pPr>
             <a:r>
-              <a:rPr sz="4000" b="1" i="0">
+              <a:rPr sz="3600" b="1" i="0">
                 <a:solidFill>
                   <a:srgbClr val="F5F5F0"/>
                 </a:solidFill>
-                <a:latin typeface="Oxanium"/>
+                <a:latin typeface="Liberation Sans"/>
               </a:rPr>
               <a:t>How a round plays.</a:t>
             </a:r>
@@ -10535,8 +10461,8 @@
         </p:nvSpPr>
         <p:spPr>
           <a:xfrm>
-            <a:off x="548640" y="2194560"/>
-            <a:ext cx="45720" cy="640080"/>
+            <a:off x="548640" y="2606040"/>
+            <a:ext cx="54864" cy="640080"/>
           </a:xfrm>
           <a:prstGeom prst="rect">
             <a:avLst/>
@@ -10578,8 +10504,8 @@
         </p:nvSpPr>
         <p:spPr>
           <a:xfrm>
-            <a:off x="777240" y="2167128"/>
-            <a:ext cx="10972800" cy="320040"/>
+            <a:off x="822960" y="2578608"/>
+            <a:ext cx="1554480" cy="320040"/>
           </a:xfrm>
           <a:prstGeom prst="rect">
             <a:avLst/>
@@ -10598,11 +10524,11 @@
               </a:lnSpc>
             </a:pPr>
             <a:r>
-              <a:rPr sz="1400" b="1" i="0">
+              <a:rPr sz="1300" b="1" i="0">
                 <a:solidFill>
                   <a:srgbClr val="00FF85"/>
                 </a:solidFill>
-                <a:latin typeface="JetBrains Mono"/>
+                <a:latin typeface="Liberation Mono"/>
               </a:rPr>
               <a:t>1. SETUP</a:t>
             </a:r>
@@ -10617,17 +10543,17 @@
         </p:nvSpPr>
         <p:spPr>
           <a:xfrm>
-            <a:off x="1645920" y="2167128"/>
-            <a:ext cx="10515600" cy="640080"/>
-          </a:xfrm>
-          <a:prstGeom prst="rect">
-            <a:avLst/>
-          </a:prstGeom>
-          <a:noFill/>
-        </p:spPr>
-        <p:txBody>
-          <a:bodyPr wrap="square" anchor="t" lIns="0" rIns="0" tIns="0" bIns="0">
-            <a:spAutoFit/>
+            <a:off x="2468880" y="2560320"/>
+            <a:ext cx="9144000" cy="640080"/>
+          </a:xfrm>
+          <a:prstGeom prst="rect">
+            <a:avLst/>
+          </a:prstGeom>
+          <a:noFill/>
+        </p:spPr>
+        <p:txBody>
+          <a:bodyPr wrap="square" anchor="t" lIns="0" rIns="0" tIns="0" bIns="0">
+            <a:normAutofit/>
           </a:bodyPr>
           <a:lstStyle/>
           <a:p>
@@ -10637,11 +10563,11 @@
               </a:lnSpc>
             </a:pPr>
             <a:r>
-              <a:rPr sz="1300" b="0" i="0">
+              <a:rPr sz="1200" b="0" i="0">
                 <a:solidFill>
                   <a:srgbClr val="F5F5F0"/>
                 </a:solidFill>
-                <a:latin typeface="Inter"/>
+                <a:latin typeface="Liberation Sans"/>
               </a:rPr>
               <a:t>Each team picks a 2-3 token basket + a bps band (e.g. -14% floor, -5% edge). Locked via lockInPreRound; delegated to ER; PER-sealed.</a:t>
             </a:r>
@@ -10656,8 +10582,8 @@
         </p:nvSpPr>
         <p:spPr>
           <a:xfrm>
-            <a:off x="548640" y="2971800"/>
-            <a:ext cx="45720" cy="640080"/>
+            <a:off x="548640" y="3383280"/>
+            <a:ext cx="54864" cy="640080"/>
           </a:xfrm>
           <a:prstGeom prst="rect">
             <a:avLst/>
@@ -10699,8 +10625,8 @@
         </p:nvSpPr>
         <p:spPr>
           <a:xfrm>
-            <a:off x="777240" y="2944368"/>
-            <a:ext cx="10972800" cy="320040"/>
+            <a:off x="822960" y="3355848"/>
+            <a:ext cx="1554480" cy="320040"/>
           </a:xfrm>
           <a:prstGeom prst="rect">
             <a:avLst/>
@@ -10719,11 +10645,11 @@
               </a:lnSpc>
             </a:pPr>
             <a:r>
-              <a:rPr sz="1400" b="1" i="0">
+              <a:rPr sz="1300" b="1" i="0">
                 <a:solidFill>
                   <a:srgbClr val="00FF85"/>
                 </a:solidFill>
-                <a:latin typeface="JetBrains Mono"/>
+                <a:latin typeface="Liberation Mono"/>
               </a:rPr>
               <a:t>2. LIVE</a:t>
             </a:r>
@@ -10738,17 +10664,17 @@
         </p:nvSpPr>
         <p:spPr>
           <a:xfrm>
-            <a:off x="1645920" y="2944368"/>
-            <a:ext cx="10515600" cy="640080"/>
-          </a:xfrm>
-          <a:prstGeom prst="rect">
-            <a:avLst/>
-          </a:prstGeom>
-          <a:noFill/>
-        </p:spPr>
-        <p:txBody>
-          <a:bodyPr wrap="square" anchor="t" lIns="0" rIns="0" tIns="0" bIns="0">
-            <a:spAutoFit/>
+            <a:off x="2468880" y="3337560"/>
+            <a:ext cx="9144000" cy="640080"/>
+          </a:xfrm>
+          <a:prstGeom prst="rect">
+            <a:avLst/>
+          </a:prstGeom>
+          <a:noFill/>
+        </p:spPr>
+        <p:txBody>
+          <a:bodyPr wrap="square" anchor="t" lIns="0" rIns="0" tIns="0" bIns="0">
+            <a:normAutofit/>
           </a:bodyPr>
           <a:lstStyle/>
           <a:p>
@@ -10758,11 +10684,11 @@
               </a:lnSpc>
             </a:pPr>
             <a:r>
-              <a:rPr sz="1300" b="0" i="0">
+              <a:rPr sz="1200" b="0" i="0">
                 <a:solidFill>
                   <a:srgbClr val="F5F5F0"/>
                 </a:solidFill>
-                <a:latin typeface="Inter"/>
+                <a:latin typeface="Liberation Sans"/>
               </a:rPr>
               <a:t>Price ticks stream from Birdeye. VRF picks a villain token. Chaos events fire mid-round. The chart band visualizes the auto-fold trigger.</a:t>
             </a:r>
@@ -10777,8 +10703,8 @@
         </p:nvSpPr>
         <p:spPr>
           <a:xfrm>
-            <a:off x="548640" y="3749039"/>
-            <a:ext cx="45720" cy="640080"/>
+            <a:off x="548640" y="4160520"/>
+            <a:ext cx="54864" cy="640080"/>
           </a:xfrm>
           <a:prstGeom prst="rect">
             <a:avLst/>
@@ -10820,8 +10746,8 @@
         </p:nvSpPr>
         <p:spPr>
           <a:xfrm>
-            <a:off x="777240" y="3721607"/>
-            <a:ext cx="10972800" cy="320040"/>
+            <a:off x="822960" y="4133087"/>
+            <a:ext cx="1554480" cy="320040"/>
           </a:xfrm>
           <a:prstGeom prst="rect">
             <a:avLst/>
@@ -10840,11 +10766,11 @@
               </a:lnSpc>
             </a:pPr>
             <a:r>
-              <a:rPr sz="1400" b="1" i="0">
+              <a:rPr sz="1300" b="1" i="0">
                 <a:solidFill>
                   <a:srgbClr val="00FF85"/>
                 </a:solidFill>
-                <a:latin typeface="JetBrains Mono"/>
+                <a:latin typeface="Liberation Mono"/>
               </a:rPr>
               <a:t>3. AUTO-FOLD</a:t>
             </a:r>
@@ -10859,17 +10785,17 @@
         </p:nvSpPr>
         <p:spPr>
           <a:xfrm>
-            <a:off x="1645920" y="3721607"/>
-            <a:ext cx="10515600" cy="640080"/>
-          </a:xfrm>
-          <a:prstGeom prst="rect">
-            <a:avLst/>
-          </a:prstGeom>
-          <a:noFill/>
-        </p:spPr>
-        <p:txBody>
-          <a:bodyPr wrap="square" anchor="t" lIns="0" rIns="0" tIns="0" bIns="0">
-            <a:spAutoFit/>
+            <a:off x="2468880" y="4114800"/>
+            <a:ext cx="9144000" cy="640080"/>
+          </a:xfrm>
+          <a:prstGeom prst="rect">
+            <a:avLst/>
+          </a:prstGeom>
+          <a:noFill/>
+        </p:spPr>
+        <p:txBody>
+          <a:bodyPr wrap="square" anchor="t" lIns="0" rIns="0" tIns="0" bIns="0">
+            <a:normAutofit/>
           </a:bodyPr>
           <a:lstStyle/>
           <a:p>
@@ -10879,11 +10805,11 @@
               </a:lnSpc>
             </a:pPr>
             <a:r>
-              <a:rPr sz="1300" b="0" i="0">
+              <a:rPr sz="1200" b="0" i="0">
                 <a:solidFill>
                   <a:srgbClr val="F5F5F0"/>
                 </a:solidFill>
-                <a:latin typeface="Inter"/>
+                <a:latin typeface="Liberation Sans"/>
               </a:rPr>
               <a:t>When the worst-performer drops below the band floor, the whole team folds (Team.folded = true, Team.alive = 0).</a:t>
             </a:r>
@@ -10898,8 +10824,8 @@
         </p:nvSpPr>
         <p:spPr>
           <a:xfrm>
-            <a:off x="548640" y="4526279"/>
-            <a:ext cx="45720" cy="640080"/>
+            <a:off x="548640" y="4937759"/>
+            <a:ext cx="54864" cy="640080"/>
           </a:xfrm>
           <a:prstGeom prst="rect">
             <a:avLst/>
@@ -10941,8 +10867,8 @@
         </p:nvSpPr>
         <p:spPr>
           <a:xfrm>
-            <a:off x="777240" y="4498847"/>
-            <a:ext cx="10972800" cy="320040"/>
+            <a:off x="822960" y="4910327"/>
+            <a:ext cx="1554480" cy="320040"/>
           </a:xfrm>
           <a:prstGeom prst="rect">
             <a:avLst/>
@@ -10961,11 +10887,11 @@
               </a:lnSpc>
             </a:pPr>
             <a:r>
-              <a:rPr sz="1400" b="1" i="0">
+              <a:rPr sz="1300" b="1" i="0">
                 <a:solidFill>
                   <a:srgbClr val="00FF85"/>
                 </a:solidFill>
-                <a:latin typeface="JetBrains Mono"/>
+                <a:latin typeface="Liberation Mono"/>
               </a:rPr>
               <a:t>4. REVEAL</a:t>
             </a:r>
@@ -10980,17 +10906,17 @@
         </p:nvSpPr>
         <p:spPr>
           <a:xfrm>
-            <a:off x="1645920" y="4498847"/>
-            <a:ext cx="10515600" cy="640080"/>
-          </a:xfrm>
-          <a:prstGeom prst="rect">
-            <a:avLst/>
-          </a:prstGeom>
-          <a:noFill/>
-        </p:spPr>
-        <p:txBody>
-          <a:bodyPr wrap="square" anchor="t" lIns="0" rIns="0" tIns="0" bIns="0">
-            <a:spAutoFit/>
+            <a:off x="2468880" y="4892040"/>
+            <a:ext cx="9144000" cy="640080"/>
+          </a:xfrm>
+          <a:prstGeom prst="rect">
+            <a:avLst/>
+          </a:prstGeom>
+          <a:noFill/>
+        </p:spPr>
+        <p:txBody>
+          <a:bodyPr wrap="square" anchor="t" lIns="0" rIns="0" tIns="0" bIns="0">
+            <a:normAutofit/>
           </a:bodyPr>
           <a:lstStyle/>
           <a:p>
@@ -11000,11 +10926,11 @@
               </a:lnSpc>
             </a:pPr>
             <a:r>
-              <a:rPr sz="1300" b="0" i="0">
+              <a:rPr sz="1200" b="0" i="0">
                 <a:solidFill>
                   <a:srgbClr val="F5F5F0"/>
                 </a:solidFill>
-                <a:latin typeface="Inter"/>
+                <a:latin typeface="Liberation Sans"/>
               </a:rPr>
               <a:t>revealRound closes PER, distributes the pot, mints 1 FTR to the winning wallet.</a:t>
             </a:r>
@@ -11019,8 +10945,8 @@
         </p:nvSpPr>
         <p:spPr>
           <a:xfrm>
-            <a:off x="548640" y="5303519"/>
-            <a:ext cx="45720" cy="640080"/>
+            <a:off x="548640" y="5714999"/>
+            <a:ext cx="54864" cy="640080"/>
           </a:xfrm>
           <a:prstGeom prst="rect">
             <a:avLst/>
@@ -11062,8 +10988,8 @@
         </p:nvSpPr>
         <p:spPr>
           <a:xfrm>
-            <a:off x="777240" y="5276087"/>
-            <a:ext cx="10972800" cy="320040"/>
+            <a:off x="822960" y="5687567"/>
+            <a:ext cx="1554480" cy="320040"/>
           </a:xfrm>
           <a:prstGeom prst="rect">
             <a:avLst/>
@@ -11082,11 +11008,11 @@
               </a:lnSpc>
             </a:pPr>
             <a:r>
-              <a:rPr sz="1400" b="1" i="0">
+              <a:rPr sz="1300" b="1" i="0">
                 <a:solidFill>
                   <a:srgbClr val="00FF85"/>
                 </a:solidFill>
-                <a:latin typeface="JetBrains Mono"/>
+                <a:latin typeface="Liberation Mono"/>
               </a:rPr>
               <a:t>5. GOVERNANCE</a:t>
             </a:r>
@@ -11101,17 +11027,17 @@
         </p:nvSpPr>
         <p:spPr>
           <a:xfrm>
-            <a:off x="1645920" y="5276087"/>
-            <a:ext cx="10515600" cy="640080"/>
-          </a:xfrm>
-          <a:prstGeom prst="rect">
-            <a:avLst/>
-          </a:prstGeom>
-          <a:noFill/>
-        </p:spPr>
-        <p:txBody>
-          <a:bodyPr wrap="square" anchor="t" lIns="0" rIns="0" tIns="0" bIns="0">
-            <a:spAutoFit/>
+            <a:off x="2468880" y="5669279"/>
+            <a:ext cx="9144000" cy="640080"/>
+          </a:xfrm>
+          <a:prstGeom prst="rect">
+            <a:avLst/>
+          </a:prstGeom>
+          <a:noFill/>
+        </p:spPr>
+        <p:txBody>
+          <a:bodyPr wrap="square" anchor="t" lIns="0" rIns="0" tIns="0" bIns="0">
+            <a:normAutofit/>
           </a:bodyPr>
           <a:lstStyle/>
           <a:p>
@@ -11121,13 +11047,13 @@
               </a:lnSpc>
             </a:pPr>
             <a:r>
-              <a:rPr sz="1300" b="0" i="0">
+              <a:rPr sz="1200" b="0" i="0">
                 <a:solidFill>
                   <a:srgbClr val="F5F5F0"/>
                 </a:solidFill>
-                <a:latin typeface="Inter"/>
-              </a:rPr>
-              <a:t>Winner proposes next-round parameters (duration, chaos count, basket mix).) FTR-weighted vote reshapes round 2.</a:t>
+                <a:latin typeface="Liberation Sans"/>
+              </a:rPr>
+              <a:t>Winner proposes next-round parameters (duration, chaos count, basket mix). FTR-weighted vote reshapes round 2.</a:t>
             </a:r>
           </a:p>
         </p:txBody>
@@ -11202,7 +11128,7 @@
         <p:spPr>
           <a:xfrm>
             <a:off x="548640" y="411480"/>
-            <a:ext cx="10972800" cy="365760"/>
+            <a:ext cx="10972800" cy="292608"/>
           </a:xfrm>
           <a:prstGeom prst="rect">
             <a:avLst/>
@@ -11221,27 +11147,144 @@
               </a:lnSpc>
             </a:pPr>
             <a:r>
+              <a:rPr sz="1000" b="1" i="0">
+                <a:solidFill>
+                  <a:srgbClr val="6B6B6B"/>
+                </a:solidFill>
+                <a:latin typeface="Liberation Mono"/>
+              </a:rPr>
+              <a:t>06  ·  SHIPPED</a:t>
+            </a:r>
+          </a:p>
+        </p:txBody>
+      </p:sp>
+      <p:sp>
+        <p:nvSpPr>
+          <p:cNvPr id="4" name="TextBox 3"/>
+          <p:cNvSpPr txBox="1"/>
+          <p:nvPr/>
+        </p:nvSpPr>
+        <p:spPr>
+          <a:xfrm>
+            <a:off x="548640" y="777240"/>
+            <a:ext cx="11064240" cy="868680"/>
+          </a:xfrm>
+          <a:prstGeom prst="rect">
+            <a:avLst/>
+          </a:prstGeom>
+          <a:noFill/>
+        </p:spPr>
+        <p:txBody>
+          <a:bodyPr wrap="square" anchor="t" lIns="0" rIns="0" tIns="0" bIns="0">
+            <a:normAutofit/>
+          </a:bodyPr>
+          <a:lstStyle/>
+          <a:p>
+            <a:pPr algn="l">
+              <a:lnSpc>
+                <a:spcPct val="120000"/>
+              </a:lnSpc>
+            </a:pPr>
+            <a:r>
+              <a:rPr sz="3600" b="1" i="0">
+                <a:solidFill>
+                  <a:srgbClr val="F5F5F0"/>
+                </a:solidFill>
+                <a:latin typeface="Liberation Sans"/>
+              </a:rPr>
+              <a:t>What's live on devnet today.</a:t>
+            </a:r>
+          </a:p>
+        </p:txBody>
+      </p:sp>
+      <p:sp>
+        <p:nvSpPr>
+          <p:cNvPr id="5" name="TextBox 4"/>
+          <p:cNvSpPr txBox="1"/>
+          <p:nvPr/>
+        </p:nvSpPr>
+        <p:spPr>
+          <a:xfrm>
+            <a:off x="548640" y="2606040"/>
+            <a:ext cx="5440680" cy="292608"/>
+          </a:xfrm>
+          <a:prstGeom prst="rect">
+            <a:avLst/>
+          </a:prstGeom>
+          <a:noFill/>
+        </p:spPr>
+        <p:txBody>
+          <a:bodyPr wrap="square" anchor="t" lIns="0" rIns="0" tIns="0" bIns="0">
+            <a:spAutoFit/>
+          </a:bodyPr>
+          <a:lstStyle/>
+          <a:p>
+            <a:pPr algn="l">
+              <a:lnSpc>
+                <a:spcPct val="120000"/>
+              </a:lnSpc>
+            </a:pPr>
+            <a:r>
+              <a:rPr sz="1400" b="1" i="0">
+                <a:solidFill>
+                  <a:srgbClr val="00FF85"/>
+                </a:solidFill>
+                <a:latin typeface="Liberation Sans"/>
+              </a:rPr>
+              <a:t>· Anchor program</a:t>
+            </a:r>
+          </a:p>
+        </p:txBody>
+      </p:sp>
+      <p:sp>
+        <p:nvSpPr>
+          <p:cNvPr id="6" name="TextBox 5"/>
+          <p:cNvSpPr txBox="1"/>
+          <p:nvPr/>
+        </p:nvSpPr>
+        <p:spPr>
+          <a:xfrm>
+            <a:off x="548640" y="2926080"/>
+            <a:ext cx="5440680" cy="594360"/>
+          </a:xfrm>
+          <a:prstGeom prst="rect">
+            <a:avLst/>
+          </a:prstGeom>
+          <a:noFill/>
+        </p:spPr>
+        <p:txBody>
+          <a:bodyPr wrap="square" anchor="t" lIns="0" rIns="0" tIns="0" bIns="0">
+            <a:normAutofit/>
+          </a:bodyPr>
+          <a:lstStyle/>
+          <a:p>
+            <a:pPr algn="l">
+              <a:lnSpc>
+                <a:spcPct val="130000"/>
+              </a:lnSpc>
+            </a:pPr>
+            <a:r>
               <a:rPr sz="1100" b="0" i="0">
                 <a:solidFill>
-                  <a:srgbClr val="6B6B6B"/>
-                </a:solidFill>
-                <a:latin typeface="JetBrains Mono"/>
-              </a:rPr>
-              <a:t>06 · SHIPPED</a:t>
-            </a:r>
-          </a:p>
-        </p:txBody>
-      </p:sp>
-      <p:sp>
-        <p:nvSpPr>
-          <p:cNvPr id="4" name="TextBox 3"/>
-          <p:cNvSpPr txBox="1"/>
-          <p:nvPr/>
-        </p:nvSpPr>
-        <p:spPr>
-          <a:xfrm>
-            <a:off x="548640" y="777240"/>
-            <a:ext cx="10972800" cy="914400"/>
+                  <a:srgbClr val="A0A0A0"/>
+                </a:solidFill>
+                <a:latin typeface="Liberation Sans"/>
+              </a:rPr>
+              <a:t>Fh6b…JHJbH · 24 instructions · 9 accounts · all files ≤150 LOC</a:t>
+            </a:r>
+          </a:p>
+        </p:txBody>
+      </p:sp>
+      <p:sp>
+        <p:nvSpPr>
+          <p:cNvPr id="7" name="TextBox 6"/>
+          <p:cNvSpPr txBox="1"/>
+          <p:nvPr/>
+        </p:nvSpPr>
+        <p:spPr>
+          <a:xfrm>
+            <a:off x="6126480" y="2606040"/>
+            <a:ext cx="5440680" cy="292608"/>
           </a:xfrm>
           <a:prstGeom prst="rect">
             <a:avLst/>
@@ -11260,27 +11303,66 @@
               </a:lnSpc>
             </a:pPr>
             <a:r>
-              <a:rPr sz="4000" b="1" i="0">
-                <a:solidFill>
-                  <a:srgbClr val="F5F5F0"/>
-                </a:solidFill>
-                <a:latin typeface="Oxanium"/>
-              </a:rPr>
-              <a:t>What's live on devnet today.</a:t>
-            </a:r>
-          </a:p>
-        </p:txBody>
-      </p:sp>
-      <p:sp>
-        <p:nvSpPr>
-          <p:cNvPr id="5" name="TextBox 4"/>
-          <p:cNvSpPr txBox="1"/>
-          <p:nvPr/>
-        </p:nvSpPr>
-        <p:spPr>
-          <a:xfrm>
-            <a:off x="548640" y="2194560"/>
-            <a:ext cx="5029200" cy="274320"/>
+              <a:rPr sz="1400" b="1" i="0">
+                <a:solidFill>
+                  <a:srgbClr val="FFD23F"/>
+                </a:solidFill>
+                <a:latin typeface="Liberation Sans"/>
+              </a:rPr>
+              <a:t>· real.ts</a:t>
+            </a:r>
+          </a:p>
+        </p:txBody>
+      </p:sp>
+      <p:sp>
+        <p:nvSpPr>
+          <p:cNvPr id="8" name="TextBox 7"/>
+          <p:cNvSpPr txBox="1"/>
+          <p:nvPr/>
+        </p:nvSpPr>
+        <p:spPr>
+          <a:xfrm>
+            <a:off x="6126480" y="2926080"/>
+            <a:ext cx="5440680" cy="594360"/>
+          </a:xfrm>
+          <a:prstGeom prst="rect">
+            <a:avLst/>
+          </a:prstGeom>
+          <a:noFill/>
+        </p:spPr>
+        <p:txBody>
+          <a:bodyPr wrap="square" anchor="t" lIns="0" rIns="0" tIns="0" bIns="0">
+            <a:normAutofit/>
+          </a:bodyPr>
+          <a:lstStyle/>
+          <a:p>
+            <a:pPr algn="l">
+              <a:lnSpc>
+                <a:spcPct val="130000"/>
+              </a:lnSpc>
+            </a:pPr>
+            <a:r>
+              <a:rPr sz="1100" b="0" i="0">
+                <a:solidFill>
+                  <a:srgbClr val="A0A0A0"/>
+                </a:solidFill>
+                <a:latin typeface="Liberation Sans"/>
+              </a:rPr>
+              <a:t>All 18 api functions wired against the on-chain program (zero notWired)</a:t>
+            </a:r>
+          </a:p>
+        </p:txBody>
+      </p:sp>
+      <p:sp>
+        <p:nvSpPr>
+          <p:cNvPr id="9" name="TextBox 8"/>
+          <p:cNvSpPr txBox="1"/>
+          <p:nvPr/>
+        </p:nvSpPr>
+        <p:spPr>
+          <a:xfrm>
+            <a:off x="548640" y="3520440"/>
+            <a:ext cx="5440680" cy="292608"/>
           </a:xfrm>
           <a:prstGeom prst="rect">
             <a:avLst/>
@@ -11299,27 +11381,66 @@
               </a:lnSpc>
             </a:pPr>
             <a:r>
-              <a:rPr sz="1500" b="1" i="0">
+              <a:rPr sz="1400" b="1" i="0">
                 <a:solidFill>
                   <a:srgbClr val="00FF85"/>
                 </a:solidFill>
-                <a:latin typeface="Inter"/>
-              </a:rPr>
-              <a:t>· Anchor program</a:t>
-            </a:r>
-          </a:p>
-        </p:txBody>
-      </p:sp>
-      <p:sp>
-        <p:nvSpPr>
-          <p:cNvPr id="6" name="TextBox 5"/>
-          <p:cNvSpPr txBox="1"/>
-          <p:nvPr/>
-        </p:nvSpPr>
-        <p:spPr>
-          <a:xfrm>
-            <a:off x="548640" y="2514600"/>
-            <a:ext cx="5029200" cy="640080"/>
+                <a:latin typeface="Liberation Sans"/>
+              </a:rPr>
+              <a:t>· Frontend</a:t>
+            </a:r>
+          </a:p>
+        </p:txBody>
+      </p:sp>
+      <p:sp>
+        <p:nvSpPr>
+          <p:cNvPr id="10" name="TextBox 9"/>
+          <p:cNvSpPr txBox="1"/>
+          <p:nvPr/>
+        </p:nvSpPr>
+        <p:spPr>
+          <a:xfrm>
+            <a:off x="548640" y="3840480"/>
+            <a:ext cx="5440680" cy="594360"/>
+          </a:xfrm>
+          <a:prstGeom prst="rect">
+            <a:avLst/>
+          </a:prstGeom>
+          <a:noFill/>
+        </p:spPr>
+        <p:txBody>
+          <a:bodyPr wrap="square" anchor="t" lIns="0" rIns="0" tIns="0" bIns="0">
+            <a:normAutofit/>
+          </a:bodyPr>
+          <a:lstStyle/>
+          <a:p>
+            <a:pPr algn="l">
+              <a:lnSpc>
+                <a:spcPct val="130000"/>
+              </a:lnSpc>
+            </a:pPr>
+            <a:r>
+              <a:rPr sz="1100" b="0" i="0">
+                <a:solidFill>
+                  <a:srgbClr val="A0A0A0"/>
+                </a:solidFill>
+                <a:latin typeface="Liberation Sans"/>
+              </a:rPr>
+              <a:t>10 routes · shadcn primitives · Framer Motion FLIP animations</a:t>
+            </a:r>
+          </a:p>
+        </p:txBody>
+      </p:sp>
+      <p:sp>
+        <p:nvSpPr>
+          <p:cNvPr id="11" name="TextBox 10"/>
+          <p:cNvSpPr txBox="1"/>
+          <p:nvPr/>
+        </p:nvSpPr>
+        <p:spPr>
+          <a:xfrm>
+            <a:off x="6126480" y="3520440"/>
+            <a:ext cx="5440680" cy="292608"/>
           </a:xfrm>
           <a:prstGeom prst="rect">
             <a:avLst/>
@@ -11334,31 +11455,70 @@
           <a:p>
             <a:pPr algn="l">
               <a:lnSpc>
+                <a:spcPct val="120000"/>
+              </a:lnSpc>
+            </a:pPr>
+            <a:r>
+              <a:rPr sz="1400" b="1" i="0">
+                <a:solidFill>
+                  <a:srgbClr val="FFD23F"/>
+                </a:solidFill>
+                <a:latin typeface="Liberation Sans"/>
+              </a:rPr>
+              <a:t>· Idempotent bootstrap</a:t>
+            </a:r>
+          </a:p>
+        </p:txBody>
+      </p:sp>
+      <p:sp>
+        <p:nvSpPr>
+          <p:cNvPr id="12" name="TextBox 11"/>
+          <p:cNvSpPr txBox="1"/>
+          <p:nvPr/>
+        </p:nvSpPr>
+        <p:spPr>
+          <a:xfrm>
+            <a:off x="6126480" y="3840480"/>
+            <a:ext cx="5440680" cy="594360"/>
+          </a:xfrm>
+          <a:prstGeom prst="rect">
+            <a:avLst/>
+          </a:prstGeom>
+          <a:noFill/>
+        </p:spPr>
+        <p:txBody>
+          <a:bodyPr wrap="square" anchor="t" lIns="0" rIns="0" tIns="0" bIns="0">
+            <a:normAutofit/>
+          </a:bodyPr>
+          <a:lstStyle/>
+          <a:p>
+            <a:pPr algn="l">
+              <a:lnSpc>
                 <a:spcPct val="130000"/>
               </a:lnSpc>
             </a:pPr>
             <a:r>
-              <a:rPr sz="1200" b="0" i="0">
+              <a:rPr sz="1100" b="0" i="0">
                 <a:solidFill>
                   <a:srgbClr val="A0A0A0"/>
                 </a:solidFill>
-                <a:latin typeface="Inter"/>
-              </a:rPr>
-              <a:t>Fh6b…JHJbH · 24 instructions · 9 accounts · all files ≤150 LOC</a:t>
-            </a:r>
-          </a:p>
-        </p:txBody>
-      </p:sp>
-      <p:sp>
-        <p:nvSpPr>
-          <p:cNvPr id="7" name="TextBox 6"/>
-          <p:cNvSpPr txBox="1"/>
-          <p:nvPr/>
-        </p:nvSpPr>
-        <p:spPr>
-          <a:xfrm>
-            <a:off x="6126480" y="2194560"/>
-            <a:ext cx="5029200" cy="274320"/>
+                <a:latin typeface="Liberation Sans"/>
+              </a:rPr>
+              <a:t>init_config + init_ftr_mint script; re-runs detect existing PDAs</a:t>
+            </a:r>
+          </a:p>
+        </p:txBody>
+      </p:sp>
+      <p:sp>
+        <p:nvSpPr>
+          <p:cNvPr id="13" name="TextBox 12"/>
+          <p:cNvSpPr txBox="1"/>
+          <p:nvPr/>
+        </p:nvSpPr>
+        <p:spPr>
+          <a:xfrm>
+            <a:off x="548640" y="4434840"/>
+            <a:ext cx="5440680" cy="292608"/>
           </a:xfrm>
           <a:prstGeom prst="rect">
             <a:avLst/>
@@ -11377,27 +11537,144 @@
               </a:lnSpc>
             </a:pPr>
             <a:r>
-              <a:rPr sz="1500" b="1" i="0">
+              <a:rPr sz="1400" b="1" i="0">
+                <a:solidFill>
+                  <a:srgbClr val="00FF85"/>
+                </a:solidFill>
+                <a:latin typeface="Liberation Sans"/>
+              </a:rPr>
+              <a:t>· MagicBlock helpers</a:t>
+            </a:r>
+          </a:p>
+        </p:txBody>
+      </p:sp>
+      <p:sp>
+        <p:nvSpPr>
+          <p:cNvPr id="14" name="TextBox 13"/>
+          <p:cNvSpPr txBox="1"/>
+          <p:nvPr/>
+        </p:nvSpPr>
+        <p:spPr>
+          <a:xfrm>
+            <a:off x="548640" y="4754879"/>
+            <a:ext cx="5440680" cy="594360"/>
+          </a:xfrm>
+          <a:prstGeom prst="rect">
+            <a:avLst/>
+          </a:prstGeom>
+          <a:noFill/>
+        </p:spPr>
+        <p:txBody>
+          <a:bodyPr wrap="square" anchor="t" lIns="0" rIns="0" tIns="0" bIns="0">
+            <a:normAutofit/>
+          </a:bodyPr>
+          <a:lstStyle/>
+          <a:p>
+            <a:pPr algn="l">
+              <a:lnSpc>
+                <a:spcPct val="130000"/>
+              </a:lnSpc>
+            </a:pPr>
+            <a:r>
+              <a:rPr sz="1100" b="0" i="0">
+                <a:solidFill>
+                  <a:srgbClr val="A0A0A0"/>
+                </a:solidFill>
+                <a:latin typeface="Liberation Sans"/>
+              </a:rPr>
+              <a:t>Dual-connection base/ER + router getDelegationStatus</a:t>
+            </a:r>
+          </a:p>
+        </p:txBody>
+      </p:sp>
+      <p:sp>
+        <p:nvSpPr>
+          <p:cNvPr id="15" name="TextBox 14"/>
+          <p:cNvSpPr txBox="1"/>
+          <p:nvPr/>
+        </p:nvSpPr>
+        <p:spPr>
+          <a:xfrm>
+            <a:off x="6126480" y="4434840"/>
+            <a:ext cx="5440680" cy="292608"/>
+          </a:xfrm>
+          <a:prstGeom prst="rect">
+            <a:avLst/>
+          </a:prstGeom>
+          <a:noFill/>
+        </p:spPr>
+        <p:txBody>
+          <a:bodyPr wrap="square" anchor="t" lIns="0" rIns="0" tIns="0" bIns="0">
+            <a:spAutoFit/>
+          </a:bodyPr>
+          <a:lstStyle/>
+          <a:p>
+            <a:pPr algn="l">
+              <a:lnSpc>
+                <a:spcPct val="120000"/>
+              </a:lnSpc>
+            </a:pPr>
+            <a:r>
+              <a:rPr sz="1400" b="1" i="0">
                 <a:solidFill>
                   <a:srgbClr val="FFD23F"/>
                 </a:solidFill>
-                <a:latin typeface="Inter"/>
-              </a:rPr>
-              <a:t>· real.ts</a:t>
-            </a:r>
-          </a:p>
-        </p:txBody>
-      </p:sp>
-      <p:sp>
-        <p:nvSpPr>
-          <p:cNvPr id="8" name="TextBox 7"/>
-          <p:cNvSpPr txBox="1"/>
-          <p:nvPr/>
-        </p:nvSpPr>
-        <p:spPr>
-          <a:xfrm>
-            <a:off x="6126480" y="2514600"/>
-            <a:ext cx="5029200" cy="640080"/>
+                <a:latin typeface="Liberation Sans"/>
+              </a:rPr>
+              <a:t>· Vercel deploy</a:t>
+            </a:r>
+          </a:p>
+        </p:txBody>
+      </p:sp>
+      <p:sp>
+        <p:nvSpPr>
+          <p:cNvPr id="16" name="TextBox 15"/>
+          <p:cNvSpPr txBox="1"/>
+          <p:nvPr/>
+        </p:nvSpPr>
+        <p:spPr>
+          <a:xfrm>
+            <a:off x="6126480" y="4754879"/>
+            <a:ext cx="5440680" cy="594360"/>
+          </a:xfrm>
+          <a:prstGeom prst="rect">
+            <a:avLst/>
+          </a:prstGeom>
+          <a:noFill/>
+        </p:spPr>
+        <p:txBody>
+          <a:bodyPr wrap="square" anchor="t" lIns="0" rIns="0" tIns="0" bIns="0">
+            <a:normAutofit/>
+          </a:bodyPr>
+          <a:lstStyle/>
+          <a:p>
+            <a:pPr algn="l">
+              <a:lnSpc>
+                <a:spcPct val="130000"/>
+              </a:lnSpc>
+            </a:pPr>
+            <a:r>
+              <a:rPr sz="1100" b="0" i="0">
+                <a:solidFill>
+                  <a:srgbClr val="A0A0A0"/>
+                </a:solidFill>
+                <a:latin typeface="Liberation Sans"/>
+              </a:rPr>
+              <a:t>https://conviction-nine.vercel.app — all 7 routes return 200</a:t>
+            </a:r>
+          </a:p>
+        </p:txBody>
+      </p:sp>
+      <p:sp>
+        <p:nvSpPr>
+          <p:cNvPr id="17" name="TextBox 16"/>
+          <p:cNvSpPr txBox="1"/>
+          <p:nvPr/>
+        </p:nvSpPr>
+        <p:spPr>
+          <a:xfrm>
+            <a:off x="548640" y="5349240"/>
+            <a:ext cx="5440680" cy="292608"/>
           </a:xfrm>
           <a:prstGeom prst="rect">
             <a:avLst/>
@@ -11412,31 +11689,70 @@
           <a:p>
             <a:pPr algn="l">
               <a:lnSpc>
+                <a:spcPct val="120000"/>
+              </a:lnSpc>
+            </a:pPr>
+            <a:r>
+              <a:rPr sz="1400" b="1" i="0">
+                <a:solidFill>
+                  <a:srgbClr val="00FF85"/>
+                </a:solidFill>
+                <a:latin typeface="Liberation Sans"/>
+              </a:rPr>
+              <a:t>· Birdeye live prices</a:t>
+            </a:r>
+          </a:p>
+        </p:txBody>
+      </p:sp>
+      <p:sp>
+        <p:nvSpPr>
+          <p:cNvPr id="18" name="TextBox 17"/>
+          <p:cNvSpPr txBox="1"/>
+          <p:nvPr/>
+        </p:nvSpPr>
+        <p:spPr>
+          <a:xfrm>
+            <a:off x="548640" y="5669279"/>
+            <a:ext cx="5440680" cy="594360"/>
+          </a:xfrm>
+          <a:prstGeom prst="rect">
+            <a:avLst/>
+          </a:prstGeom>
+          <a:noFill/>
+        </p:spPr>
+        <p:txBody>
+          <a:bodyPr wrap="square" anchor="t" lIns="0" rIns="0" tIns="0" bIns="0">
+            <a:normAutofit/>
+          </a:bodyPr>
+          <a:lstStyle/>
+          <a:p>
+            <a:pPr algn="l">
+              <a:lnSpc>
                 <a:spcPct val="130000"/>
               </a:lnSpc>
             </a:pPr>
             <a:r>
-              <a:rPr sz="1200" b="0" i="0">
+              <a:rPr sz="1100" b="0" i="0">
                 <a:solidFill>
                   <a:srgbClr val="A0A0A0"/>
                 </a:solidFill>
-                <a:latin typeface="Inter"/>
-              </a:rPr>
-              <a:t>All 18 api functions wired against the on-chain program (zero notWired)</a:t>
-            </a:r>
-          </a:p>
-        </p:txBody>
-      </p:sp>
-      <p:sp>
-        <p:nvSpPr>
-          <p:cNvPr id="9" name="TextBox 8"/>
-          <p:cNvSpPr txBox="1"/>
-          <p:nvPr/>
-        </p:nvSpPr>
-        <p:spPr>
-          <a:xfrm>
-            <a:off x="548640" y="3108960"/>
-            <a:ext cx="5029200" cy="274320"/>
+                <a:latin typeface="Liberation Sans"/>
+              </a:rPr>
+              <a:t>10s polling with seeded-walk fallback + Sonner toast on 401</a:t>
+            </a:r>
+          </a:p>
+        </p:txBody>
+      </p:sp>
+      <p:sp>
+        <p:nvSpPr>
+          <p:cNvPr id="19" name="TextBox 18"/>
+          <p:cNvSpPr txBox="1"/>
+          <p:nvPr/>
+        </p:nvSpPr>
+        <p:spPr>
+          <a:xfrm>
+            <a:off x="6126480" y="5349240"/>
+            <a:ext cx="5440680" cy="292608"/>
           </a:xfrm>
           <a:prstGeom prst="rect">
             <a:avLst/>
@@ -11455,36 +11771,36 @@
               </a:lnSpc>
             </a:pPr>
             <a:r>
-              <a:rPr sz="1500" b="1" i="0">
-                <a:solidFill>
-                  <a:srgbClr val="00FF85"/>
-                </a:solidFill>
-                <a:latin typeface="Inter"/>
-              </a:rPr>
-              <a:t>· Frontend</a:t>
-            </a:r>
-          </a:p>
-        </p:txBody>
-      </p:sp>
-      <p:sp>
-        <p:nvSpPr>
-          <p:cNvPr id="10" name="TextBox 9"/>
-          <p:cNvSpPr txBox="1"/>
-          <p:nvPr/>
-        </p:nvSpPr>
-        <p:spPr>
-          <a:xfrm>
-            <a:off x="548640" y="3429000"/>
-            <a:ext cx="5029200" cy="640080"/>
-          </a:xfrm>
-          <a:prstGeom prst="rect">
-            <a:avLst/>
-          </a:prstGeom>
-          <a:noFill/>
-        </p:spPr>
-        <p:txBody>
-          <a:bodyPr wrap="square" anchor="t" lIns="0" rIns="0" tIns="0" bIns="0">
-            <a:spAutoFit/>
+              <a:rPr sz="1400" b="1" i="0">
+                <a:solidFill>
+                  <a:srgbClr val="FFD23F"/>
+                </a:solidFill>
+                <a:latin typeface="Liberation Sans"/>
+              </a:rPr>
+              <a:t>· GitHub repo</a:t>
+            </a:r>
+          </a:p>
+        </p:txBody>
+      </p:sp>
+      <p:sp>
+        <p:nvSpPr>
+          <p:cNvPr id="20" name="TextBox 19"/>
+          <p:cNvSpPr txBox="1"/>
+          <p:nvPr/>
+        </p:nvSpPr>
+        <p:spPr>
+          <a:xfrm>
+            <a:off x="6126480" y="5669279"/>
+            <a:ext cx="5440680" cy="594360"/>
+          </a:xfrm>
+          <a:prstGeom prst="rect">
+            <a:avLst/>
+          </a:prstGeom>
+          <a:noFill/>
+        </p:spPr>
+        <p:txBody>
+          <a:bodyPr wrap="square" anchor="t" lIns="0" rIns="0" tIns="0" bIns="0">
+            <a:normAutofit/>
           </a:bodyPr>
           <a:lstStyle/>
           <a:p>
@@ -11494,401 +11810,11 @@
               </a:lnSpc>
             </a:pPr>
             <a:r>
-              <a:rPr sz="1200" b="0" i="0">
+              <a:rPr sz="1100" b="0" i="0">
                 <a:solidFill>
                   <a:srgbClr val="A0A0A0"/>
                 </a:solidFill>
-                <a:latin typeface="Inter"/>
-              </a:rPr>
-              <a:t>10 routes · shadcn primitives · Framer Motion FLIP animations</a:t>
-            </a:r>
-          </a:p>
-        </p:txBody>
-      </p:sp>
-      <p:sp>
-        <p:nvSpPr>
-          <p:cNvPr id="11" name="TextBox 10"/>
-          <p:cNvSpPr txBox="1"/>
-          <p:nvPr/>
-        </p:nvSpPr>
-        <p:spPr>
-          <a:xfrm>
-            <a:off x="6126480" y="3108960"/>
-            <a:ext cx="5029200" cy="274320"/>
-          </a:xfrm>
-          <a:prstGeom prst="rect">
-            <a:avLst/>
-          </a:prstGeom>
-          <a:noFill/>
-        </p:spPr>
-        <p:txBody>
-          <a:bodyPr wrap="square" anchor="t" lIns="0" rIns="0" tIns="0" bIns="0">
-            <a:spAutoFit/>
-          </a:bodyPr>
-          <a:lstStyle/>
-          <a:p>
-            <a:pPr algn="l">
-              <a:lnSpc>
-                <a:spcPct val="120000"/>
-              </a:lnSpc>
-            </a:pPr>
-            <a:r>
-              <a:rPr sz="1500" b="1" i="0">
-                <a:solidFill>
-                  <a:srgbClr val="FFD23F"/>
-                </a:solidFill>
-                <a:latin typeface="Inter"/>
-              </a:rPr>
-              <a:t>· Idempotent bootstrap</a:t>
-            </a:r>
-          </a:p>
-        </p:txBody>
-      </p:sp>
-      <p:sp>
-        <p:nvSpPr>
-          <p:cNvPr id="12" name="TextBox 11"/>
-          <p:cNvSpPr txBox="1"/>
-          <p:nvPr/>
-        </p:nvSpPr>
-        <p:spPr>
-          <a:xfrm>
-            <a:off x="6126480" y="3429000"/>
-            <a:ext cx="5029200" cy="640080"/>
-          </a:xfrm>
-          <a:prstGeom prst="rect">
-            <a:avLst/>
-          </a:prstGeom>
-          <a:noFill/>
-        </p:spPr>
-        <p:txBody>
-          <a:bodyPr wrap="square" anchor="t" lIns="0" rIns="0" tIns="0" bIns="0">
-            <a:spAutoFit/>
-          </a:bodyPr>
-          <a:lstStyle/>
-          <a:p>
-            <a:pPr algn="l">
-              <a:lnSpc>
-                <a:spcPct val="130000"/>
-              </a:lnSpc>
-            </a:pPr>
-            <a:r>
-              <a:rPr sz="1200" b="0" i="0">
-                <a:solidFill>
-                  <a:srgbClr val="A0A0A0"/>
-                </a:solidFill>
-                <a:latin typeface="Inter"/>
-              </a:rPr>
-              <a:t>init_config + init_ftr_mint script; re-runs detect existing PDAs</a:t>
-            </a:r>
-          </a:p>
-        </p:txBody>
-      </p:sp>
-      <p:sp>
-        <p:nvSpPr>
-          <p:cNvPr id="13" name="TextBox 12"/>
-          <p:cNvSpPr txBox="1"/>
-          <p:nvPr/>
-        </p:nvSpPr>
-        <p:spPr>
-          <a:xfrm>
-            <a:off x="548640" y="4023360"/>
-            <a:ext cx="5029200" cy="274320"/>
-          </a:xfrm>
-          <a:prstGeom prst="rect">
-            <a:avLst/>
-          </a:prstGeom>
-          <a:noFill/>
-        </p:spPr>
-        <p:txBody>
-          <a:bodyPr wrap="square" anchor="t" lIns="0" rIns="0" tIns="0" bIns="0">
-            <a:spAutoFit/>
-          </a:bodyPr>
-          <a:lstStyle/>
-          <a:p>
-            <a:pPr algn="l">
-              <a:lnSpc>
-                <a:spcPct val="120000"/>
-              </a:lnSpc>
-            </a:pPr>
-            <a:r>
-              <a:rPr sz="1500" b="1" i="0">
-                <a:solidFill>
-                  <a:srgbClr val="00FF85"/>
-                </a:solidFill>
-                <a:latin typeface="Inter"/>
-              </a:rPr>
-              <a:t>· MagicBlock helpers</a:t>
-            </a:r>
-          </a:p>
-        </p:txBody>
-      </p:sp>
-      <p:sp>
-        <p:nvSpPr>
-          <p:cNvPr id="14" name="TextBox 13"/>
-          <p:cNvSpPr txBox="1"/>
-          <p:nvPr/>
-        </p:nvSpPr>
-        <p:spPr>
-          <a:xfrm>
-            <a:off x="548640" y="4343400"/>
-            <a:ext cx="5029200" cy="640080"/>
-          </a:xfrm>
-          <a:prstGeom prst="rect">
-            <a:avLst/>
-          </a:prstGeom>
-          <a:noFill/>
-        </p:spPr>
-        <p:txBody>
-          <a:bodyPr wrap="square" anchor="t" lIns="0" rIns="0" tIns="0" bIns="0">
-            <a:spAutoFit/>
-          </a:bodyPr>
-          <a:lstStyle/>
-          <a:p>
-            <a:pPr algn="l">
-              <a:lnSpc>
-                <a:spcPct val="130000"/>
-              </a:lnSpc>
-            </a:pPr>
-            <a:r>
-              <a:rPr sz="1200" b="0" i="0">
-                <a:solidFill>
-                  <a:srgbClr val="A0A0A0"/>
-                </a:solidFill>
-                <a:latin typeface="Inter"/>
-              </a:rPr>
-              <a:t>Dual-connection base/ER + router getDelegationStatus</a:t>
-            </a:r>
-          </a:p>
-        </p:txBody>
-      </p:sp>
-      <p:sp>
-        <p:nvSpPr>
-          <p:cNvPr id="15" name="TextBox 14"/>
-          <p:cNvSpPr txBox="1"/>
-          <p:nvPr/>
-        </p:nvSpPr>
-        <p:spPr>
-          <a:xfrm>
-            <a:off x="6126480" y="4023360"/>
-            <a:ext cx="5029200" cy="274320"/>
-          </a:xfrm>
-          <a:prstGeom prst="rect">
-            <a:avLst/>
-          </a:prstGeom>
-          <a:noFill/>
-        </p:spPr>
-        <p:txBody>
-          <a:bodyPr wrap="square" anchor="t" lIns="0" rIns="0" tIns="0" bIns="0">
-            <a:spAutoFit/>
-          </a:bodyPr>
-          <a:lstStyle/>
-          <a:p>
-            <a:pPr algn="l">
-              <a:lnSpc>
-                <a:spcPct val="120000"/>
-              </a:lnSpc>
-            </a:pPr>
-            <a:r>
-              <a:rPr sz="1500" b="1" i="0">
-                <a:solidFill>
-                  <a:srgbClr val="FFD23F"/>
-                </a:solidFill>
-                <a:latin typeface="Inter"/>
-              </a:rPr>
-              <a:t>· Vercel deploy</a:t>
-            </a:r>
-          </a:p>
-        </p:txBody>
-      </p:sp>
-      <p:sp>
-        <p:nvSpPr>
-          <p:cNvPr id="16" name="TextBox 15"/>
-          <p:cNvSpPr txBox="1"/>
-          <p:nvPr/>
-        </p:nvSpPr>
-        <p:spPr>
-          <a:xfrm>
-            <a:off x="6126480" y="4343400"/>
-            <a:ext cx="5029200" cy="640080"/>
-          </a:xfrm>
-          <a:prstGeom prst="rect">
-            <a:avLst/>
-          </a:prstGeom>
-          <a:noFill/>
-        </p:spPr>
-        <p:txBody>
-          <a:bodyPr wrap="square" anchor="t" lIns="0" rIns="0" tIns="0" bIns="0">
-            <a:spAutoFit/>
-          </a:bodyPr>
-          <a:lstStyle/>
-          <a:p>
-            <a:pPr algn="l">
-              <a:lnSpc>
-                <a:spcPct val="130000"/>
-              </a:lnSpc>
-            </a:pPr>
-            <a:r>
-              <a:rPr sz="1200" b="0" i="0">
-                <a:solidFill>
-                  <a:srgbClr val="A0A0A0"/>
-                </a:solidFill>
-                <a:latin typeface="Inter"/>
-              </a:rPr>
-              <a:t>https://conviction-nine.vercel.app — all 7 routes return 200</a:t>
-            </a:r>
-          </a:p>
-        </p:txBody>
-      </p:sp>
-      <p:sp>
-        <p:nvSpPr>
-          <p:cNvPr id="17" name="TextBox 16"/>
-          <p:cNvSpPr txBox="1"/>
-          <p:nvPr/>
-        </p:nvSpPr>
-        <p:spPr>
-          <a:xfrm>
-            <a:off x="548640" y="4937760"/>
-            <a:ext cx="5029200" cy="274320"/>
-          </a:xfrm>
-          <a:prstGeom prst="rect">
-            <a:avLst/>
-          </a:prstGeom>
-          <a:noFill/>
-        </p:spPr>
-        <p:txBody>
-          <a:bodyPr wrap="square" anchor="t" lIns="0" rIns="0" tIns="0" bIns="0">
-            <a:spAutoFit/>
-          </a:bodyPr>
-          <a:lstStyle/>
-          <a:p>
-            <a:pPr algn="l">
-              <a:lnSpc>
-                <a:spcPct val="120000"/>
-              </a:lnSpc>
-            </a:pPr>
-            <a:r>
-              <a:rPr sz="1500" b="1" i="0">
-                <a:solidFill>
-                  <a:srgbClr val="00FF85"/>
-                </a:solidFill>
-                <a:latin typeface="Inter"/>
-              </a:rPr>
-              <a:t>· Birdeye live prices</a:t>
-            </a:r>
-          </a:p>
-        </p:txBody>
-      </p:sp>
-      <p:sp>
-        <p:nvSpPr>
-          <p:cNvPr id="18" name="TextBox 17"/>
-          <p:cNvSpPr txBox="1"/>
-          <p:nvPr/>
-        </p:nvSpPr>
-        <p:spPr>
-          <a:xfrm>
-            <a:off x="548640" y="5257800"/>
-            <a:ext cx="5029200" cy="640080"/>
-          </a:xfrm>
-          <a:prstGeom prst="rect">
-            <a:avLst/>
-          </a:prstGeom>
-          <a:noFill/>
-        </p:spPr>
-        <p:txBody>
-          <a:bodyPr wrap="square" anchor="t" lIns="0" rIns="0" tIns="0" bIns="0">
-            <a:spAutoFit/>
-          </a:bodyPr>
-          <a:lstStyle/>
-          <a:p>
-            <a:pPr algn="l">
-              <a:lnSpc>
-                <a:spcPct val="130000"/>
-              </a:lnSpc>
-            </a:pPr>
-            <a:r>
-              <a:rPr sz="1200" b="0" i="0">
-                <a:solidFill>
-                  <a:srgbClr val="A0A0A0"/>
-                </a:solidFill>
-                <a:latin typeface="Inter"/>
-              </a:rPr>
-              <a:t>10s polling with seeded-walk fallback + Sonner toast on 401</a:t>
-            </a:r>
-          </a:p>
-        </p:txBody>
-      </p:sp>
-      <p:sp>
-        <p:nvSpPr>
-          <p:cNvPr id="19" name="TextBox 18"/>
-          <p:cNvSpPr txBox="1"/>
-          <p:nvPr/>
-        </p:nvSpPr>
-        <p:spPr>
-          <a:xfrm>
-            <a:off x="6126480" y="4937760"/>
-            <a:ext cx="5029200" cy="274320"/>
-          </a:xfrm>
-          <a:prstGeom prst="rect">
-            <a:avLst/>
-          </a:prstGeom>
-          <a:noFill/>
-        </p:spPr>
-        <p:txBody>
-          <a:bodyPr wrap="square" anchor="t" lIns="0" rIns="0" tIns="0" bIns="0">
-            <a:spAutoFit/>
-          </a:bodyPr>
-          <a:lstStyle/>
-          <a:p>
-            <a:pPr algn="l">
-              <a:lnSpc>
-                <a:spcPct val="120000"/>
-              </a:lnSpc>
-            </a:pPr>
-            <a:r>
-              <a:rPr sz="1500" b="1" i="0">
-                <a:solidFill>
-                  <a:srgbClr val="FFD23F"/>
-                </a:solidFill>
-                <a:latin typeface="Inter"/>
-              </a:rPr>
-              <a:t>· GitHub repo</a:t>
-            </a:r>
-          </a:p>
-        </p:txBody>
-      </p:sp>
-      <p:sp>
-        <p:nvSpPr>
-          <p:cNvPr id="20" name="TextBox 19"/>
-          <p:cNvSpPr txBox="1"/>
-          <p:nvPr/>
-        </p:nvSpPr>
-        <p:spPr>
-          <a:xfrm>
-            <a:off x="6126480" y="5257800"/>
-            <a:ext cx="5029200" cy="640080"/>
-          </a:xfrm>
-          <a:prstGeom prst="rect">
-            <a:avLst/>
-          </a:prstGeom>
-          <a:noFill/>
-        </p:spPr>
-        <p:txBody>
-          <a:bodyPr wrap="square" anchor="t" lIns="0" rIns="0" tIns="0" bIns="0">
-            <a:spAutoFit/>
-          </a:bodyPr>
-          <a:lstStyle/>
-          <a:p>
-            <a:pPr algn="l">
-              <a:lnSpc>
-                <a:spcPct val="130000"/>
-              </a:lnSpc>
-            </a:pPr>
-            <a:r>
-              <a:rPr sz="1200" b="0" i="0">
-                <a:solidFill>
-                  <a:srgbClr val="A0A0A0"/>
-                </a:solidFill>
-                <a:latin typeface="Inter"/>
+                <a:latin typeface="Liberation Sans"/>
               </a:rPr>
               <a:t>11 commits, README + ADRs 0001-0005 + demo recording script</a:t>
             </a:r>
@@ -11965,7 +11891,7 @@
         <p:spPr>
           <a:xfrm>
             <a:off x="548640" y="411480"/>
-            <a:ext cx="10972800" cy="365760"/>
+            <a:ext cx="10972800" cy="292608"/>
           </a:xfrm>
           <a:prstGeom prst="rect">
             <a:avLst/>
@@ -11984,13 +11910,13 @@
               </a:lnSpc>
             </a:pPr>
             <a:r>
-              <a:rPr sz="1100" b="0" i="0">
+              <a:rPr sz="1000" b="1" i="0">
                 <a:solidFill>
                   <a:srgbClr val="6B6B6B"/>
                 </a:solidFill>
-                <a:latin typeface="JetBrains Mono"/>
-              </a:rPr>
-              <a:t>07 · ON-CHAIN</a:t>
+                <a:latin typeface="Liberation Mono"/>
+              </a:rPr>
+              <a:t>07  ·  ON-CHAIN</a:t>
             </a:r>
           </a:p>
         </p:txBody>
@@ -12004,7 +11930,46 @@
         <p:spPr>
           <a:xfrm>
             <a:off x="548640" y="777240"/>
-            <a:ext cx="10972800" cy="914400"/>
+            <a:ext cx="11064240" cy="868680"/>
+          </a:xfrm>
+          <a:prstGeom prst="rect">
+            <a:avLst/>
+          </a:prstGeom>
+          <a:noFill/>
+        </p:spPr>
+        <p:txBody>
+          <a:bodyPr wrap="square" anchor="t" lIns="0" rIns="0" tIns="0" bIns="0">
+            <a:normAutofit/>
+          </a:bodyPr>
+          <a:lstStyle/>
+          <a:p>
+            <a:pPr algn="l">
+              <a:lnSpc>
+                <a:spcPct val="120000"/>
+              </a:lnSpc>
+            </a:pPr>
+            <a:r>
+              <a:rPr sz="3600" b="1" i="0">
+                <a:solidFill>
+                  <a:srgbClr val="F5F5F0"/>
+                </a:solidFill>
+                <a:latin typeface="Liberation Sans"/>
+              </a:rPr>
+              <a:t>Devnet state, fully bootstrapped.</a:t>
+            </a:r>
+          </a:p>
+        </p:txBody>
+      </p:sp>
+      <p:sp>
+        <p:nvSpPr>
+          <p:cNvPr id="5" name="TextBox 4"/>
+          <p:cNvSpPr txBox="1"/>
+          <p:nvPr/>
+        </p:nvSpPr>
+        <p:spPr>
+          <a:xfrm>
+            <a:off x="548640" y="2697480"/>
+            <a:ext cx="2377440" cy="365760"/>
           </a:xfrm>
           <a:prstGeom prst="rect">
             <a:avLst/>
@@ -12023,50 +11988,11 @@
               </a:lnSpc>
             </a:pPr>
             <a:r>
-              <a:rPr sz="4000" b="1" i="0">
-                <a:solidFill>
-                  <a:srgbClr val="F5F5F0"/>
-                </a:solidFill>
-                <a:latin typeface="Oxanium"/>
-              </a:rPr>
-              <a:t>Devnet state, fully bootstrapped.</a:t>
-            </a:r>
-          </a:p>
-        </p:txBody>
-      </p:sp>
-      <p:sp>
-        <p:nvSpPr>
-          <p:cNvPr id="5" name="TextBox 4"/>
-          <p:cNvSpPr txBox="1"/>
-          <p:nvPr/>
-        </p:nvSpPr>
-        <p:spPr>
-          <a:xfrm>
-            <a:off x="548640" y="2286000"/>
-            <a:ext cx="2377440" cy="365760"/>
-          </a:xfrm>
-          <a:prstGeom prst="rect">
-            <a:avLst/>
-          </a:prstGeom>
-          <a:noFill/>
-        </p:spPr>
-        <p:txBody>
-          <a:bodyPr wrap="square" anchor="t" lIns="0" rIns="0" tIns="0" bIns="0">
-            <a:spAutoFit/>
-          </a:bodyPr>
-          <a:lstStyle/>
-          <a:p>
-            <a:pPr algn="l">
-              <a:lnSpc>
-                <a:spcPct val="120000"/>
-              </a:lnSpc>
-            </a:pPr>
-            <a:r>
-              <a:rPr sz="1400" b="1" i="0">
+              <a:rPr sz="1300" b="1" i="0">
                 <a:solidFill>
                   <a:srgbClr val="00FF85"/>
                 </a:solidFill>
-                <a:latin typeface="JetBrains Mono"/>
+                <a:latin typeface="Liberation Mono"/>
               </a:rPr>
               <a:t>PROGRAM</a:t>
             </a:r>
@@ -12081,7 +12007,7 @@
         </p:nvSpPr>
         <p:spPr>
           <a:xfrm>
-            <a:off x="3017520" y="2240280"/>
+            <a:off x="3017520" y="2651760"/>
             <a:ext cx="8595360" cy="457200"/>
           </a:xfrm>
           <a:prstGeom prst="rect">
@@ -12124,7 +12050,7 @@
         </p:nvSpPr>
         <p:spPr>
           <a:xfrm>
-            <a:off x="3154680" y="2286000"/>
+            <a:off x="3154680" y="2697480"/>
             <a:ext cx="8412480" cy="365760"/>
           </a:xfrm>
           <a:prstGeom prst="rect">
@@ -12144,11 +12070,11 @@
               </a:lnSpc>
             </a:pPr>
             <a:r>
-              <a:rPr sz="1200" b="0" i="0">
+              <a:rPr sz="1100" b="0" i="0">
                 <a:solidFill>
                   <a:srgbClr val="F5F5F0"/>
                 </a:solidFill>
-                <a:latin typeface="JetBrains Mono"/>
+                <a:latin typeface="Liberation Mono"/>
               </a:rPr>
               <a:t>Fh6bQUgE35Hq7nP22GZ1Youwnph2UaiEh9xTtDJuHJbH</a:t>
             </a:r>
@@ -12163,7 +12089,7 @@
         </p:nvSpPr>
         <p:spPr>
           <a:xfrm>
-            <a:off x="548640" y="3063240"/>
+            <a:off x="548640" y="3474720"/>
             <a:ext cx="2377440" cy="365760"/>
           </a:xfrm>
           <a:prstGeom prst="rect">
@@ -12183,11 +12109,11 @@
               </a:lnSpc>
             </a:pPr>
             <a:r>
-              <a:rPr sz="1400" b="1" i="0">
+              <a:rPr sz="1300" b="1" i="0">
                 <a:solidFill>
                   <a:srgbClr val="00FF85"/>
                 </a:solidFill>
-                <a:latin typeface="JetBrains Mono"/>
+                <a:latin typeface="Liberation Mono"/>
               </a:rPr>
               <a:t>GameConfig PDA</a:t>
             </a:r>
@@ -12202,7 +12128,7 @@
         </p:nvSpPr>
         <p:spPr>
           <a:xfrm>
-            <a:off x="3017520" y="3017520"/>
+            <a:off x="3017520" y="3429000"/>
             <a:ext cx="8595360" cy="457200"/>
           </a:xfrm>
           <a:prstGeom prst="rect">
@@ -12245,7 +12171,7 @@
         </p:nvSpPr>
         <p:spPr>
           <a:xfrm>
-            <a:off x="3154680" y="3063240"/>
+            <a:off x="3154680" y="3474720"/>
             <a:ext cx="8412480" cy="365760"/>
           </a:xfrm>
           <a:prstGeom prst="rect">
@@ -12265,11 +12191,11 @@
               </a:lnSpc>
             </a:pPr>
             <a:r>
-              <a:rPr sz="1200" b="0" i="0">
+              <a:rPr sz="1100" b="0" i="0">
                 <a:solidFill>
                   <a:srgbClr val="F5F5F0"/>
                 </a:solidFill>
-                <a:latin typeface="JetBrains Mono"/>
+                <a:latin typeface="Liberation Mono"/>
               </a:rPr>
               <a:t>54Lyv5mQqUm2z5hCp4nzDWSWwRZUViohvRt82kkgeti2</a:t>
             </a:r>
@@ -12284,7 +12210,7 @@
         </p:nvSpPr>
         <p:spPr>
           <a:xfrm>
-            <a:off x="548640" y="3840480"/>
+            <a:off x="548640" y="4251960"/>
             <a:ext cx="2377440" cy="365760"/>
           </a:xfrm>
           <a:prstGeom prst="rect">
@@ -12304,11 +12230,11 @@
               </a:lnSpc>
             </a:pPr>
             <a:r>
-              <a:rPr sz="1400" b="1" i="0">
+              <a:rPr sz="1300" b="1" i="0">
                 <a:solidFill>
                   <a:srgbClr val="00FF85"/>
                 </a:solidFill>
-                <a:latin typeface="JetBrains Mono"/>
+                <a:latin typeface="Liberation Mono"/>
               </a:rPr>
               <a:t>RoundCounter PDA</a:t>
             </a:r>
@@ -12323,7 +12249,7 @@
         </p:nvSpPr>
         <p:spPr>
           <a:xfrm>
-            <a:off x="3017520" y="3794760"/>
+            <a:off x="3017520" y="4206240"/>
             <a:ext cx="8595360" cy="457200"/>
           </a:xfrm>
           <a:prstGeom prst="rect">
@@ -12366,7 +12292,7 @@
         </p:nvSpPr>
         <p:spPr>
           <a:xfrm>
-            <a:off x="3154680" y="3840480"/>
+            <a:off x="3154680" y="4251960"/>
             <a:ext cx="8412480" cy="365760"/>
           </a:xfrm>
           <a:prstGeom prst="rect">
@@ -12386,11 +12312,11 @@
               </a:lnSpc>
             </a:pPr>
             <a:r>
-              <a:rPr sz="1200" b="0" i="0">
+              <a:rPr sz="1100" b="0" i="0">
                 <a:solidFill>
                   <a:srgbClr val="F5F5F0"/>
                 </a:solidFill>
-                <a:latin typeface="JetBrains Mono"/>
+                <a:latin typeface="Liberation Mono"/>
               </a:rPr>
               <a:t>7tizNzRh66ah4jB4HzEG7nHryNv2hvyV38fb4BPdTkwS</a:t>
             </a:r>
@@ -12405,7 +12331,7 @@
         </p:nvSpPr>
         <p:spPr>
           <a:xfrm>
-            <a:off x="548640" y="4617720"/>
+            <a:off x="548640" y="5029200"/>
             <a:ext cx="2377440" cy="365760"/>
           </a:xfrm>
           <a:prstGeom prst="rect">
@@ -12425,11 +12351,11 @@
               </a:lnSpc>
             </a:pPr>
             <a:r>
-              <a:rPr sz="1400" b="1" i="0">
+              <a:rPr sz="1300" b="1" i="0">
                 <a:solidFill>
                   <a:srgbClr val="00FF85"/>
                 </a:solidFill>
-                <a:latin typeface="JetBrains Mono"/>
+                <a:latin typeface="Liberation Mono"/>
               </a:rPr>
               <a:t>FTR mint (SPL)</a:t>
             </a:r>
@@ -12444,7 +12370,7 @@
         </p:nvSpPr>
         <p:spPr>
           <a:xfrm>
-            <a:off x="3017520" y="4572000"/>
+            <a:off x="3017520" y="4983480"/>
             <a:ext cx="8595360" cy="457200"/>
           </a:xfrm>
           <a:prstGeom prst="rect">
@@ -12487,7 +12413,7 @@
         </p:nvSpPr>
         <p:spPr>
           <a:xfrm>
-            <a:off x="3154680" y="4617720"/>
+            <a:off x="3154680" y="5029200"/>
             <a:ext cx="8412480" cy="365760"/>
           </a:xfrm>
           <a:prstGeom prst="rect">
@@ -12507,11 +12433,11 @@
               </a:lnSpc>
             </a:pPr>
             <a:r>
-              <a:rPr sz="1200" b="0" i="0">
+              <a:rPr sz="1100" b="0" i="0">
                 <a:solidFill>
                   <a:srgbClr val="F5F5F0"/>
                 </a:solidFill>
-                <a:latin typeface="JetBrains Mono"/>
+                <a:latin typeface="Liberation Mono"/>
               </a:rPr>
               <a:t>21Rki1gfiUYbM4bdyhma4TRWjYeS1SCXNb8ENKqsTr7V</a:t>
             </a:r>
@@ -12526,8 +12452,8 @@
         </p:nvSpPr>
         <p:spPr>
           <a:xfrm>
-            <a:off x="548640" y="5760720"/>
-            <a:ext cx="10972800" cy="365760"/>
+            <a:off x="548640" y="6035040"/>
+            <a:ext cx="11064240" cy="365760"/>
           </a:xfrm>
           <a:prstGeom prst="rect">
             <a:avLst/>
@@ -12546,50 +12472,50 @@
               </a:lnSpc>
             </a:pPr>
             <a:r>
+              <a:rPr sz="1000" b="0" i="0">
+                <a:solidFill>
+                  <a:srgbClr val="6B6B6B"/>
+                </a:solidFill>
+                <a:latin typeface="Liberation Mono"/>
+              </a:rPr>
+              <a:t>EXPLORER</a:t>
+            </a:r>
+          </a:p>
+        </p:txBody>
+      </p:sp>
+      <p:sp>
+        <p:nvSpPr>
+          <p:cNvPr id="18" name="TextBox 17"/>
+          <p:cNvSpPr txBox="1"/>
+          <p:nvPr/>
+        </p:nvSpPr>
+        <p:spPr>
+          <a:xfrm>
+            <a:off x="548640" y="6355080"/>
+            <a:ext cx="11064240" cy="365760"/>
+          </a:xfrm>
+          <a:prstGeom prst="rect">
+            <a:avLst/>
+          </a:prstGeom>
+          <a:noFill/>
+        </p:spPr>
+        <p:txBody>
+          <a:bodyPr wrap="square" anchor="t" lIns="0" rIns="0" tIns="0" bIns="0">
+            <a:spAutoFit/>
+          </a:bodyPr>
+          <a:lstStyle/>
+          <a:p>
+            <a:pPr algn="l">
+              <a:lnSpc>
+                <a:spcPct val="120000"/>
+              </a:lnSpc>
+            </a:pPr>
+            <a:r>
               <a:rPr sz="1100" b="0" i="0">
                 <a:solidFill>
-                  <a:srgbClr val="6B6B6B"/>
-                </a:solidFill>
-                <a:latin typeface="JetBrains Mono"/>
-              </a:rPr>
-              <a:t>EXPLORER</a:t>
-            </a:r>
-          </a:p>
-        </p:txBody>
-      </p:sp>
-      <p:sp>
-        <p:nvSpPr>
-          <p:cNvPr id="18" name="TextBox 17"/>
-          <p:cNvSpPr txBox="1"/>
-          <p:nvPr/>
-        </p:nvSpPr>
-        <p:spPr>
-          <a:xfrm>
-            <a:off x="548640" y="6080760"/>
-            <a:ext cx="10972800" cy="365760"/>
-          </a:xfrm>
-          <a:prstGeom prst="rect">
-            <a:avLst/>
-          </a:prstGeom>
-          <a:noFill/>
-        </p:spPr>
-        <p:txBody>
-          <a:bodyPr wrap="square" anchor="t" lIns="0" rIns="0" tIns="0" bIns="0">
-            <a:spAutoFit/>
-          </a:bodyPr>
-          <a:lstStyle/>
-          <a:p>
-            <a:pPr algn="l">
-              <a:lnSpc>
-                <a:spcPct val="120000"/>
-              </a:lnSpc>
-            </a:pPr>
-            <a:r>
-              <a:rPr sz="1200" b="0" i="0">
-                <a:solidFill>
                   <a:srgbClr val="00FF85"/>
                 </a:solidFill>
-                <a:latin typeface="JetBrains Mono"/>
+                <a:latin typeface="Liberation Mono"/>
               </a:rPr>
               <a:t>explorer.solana.com/address/Fh6b…JHJbH?cluster=devnet</a:t>
             </a:r>
@@ -12666,7 +12592,7 @@
         <p:spPr>
           <a:xfrm>
             <a:off x="548640" y="411480"/>
-            <a:ext cx="10972800" cy="365760"/>
+            <a:ext cx="10972800" cy="292608"/>
           </a:xfrm>
           <a:prstGeom prst="rect">
             <a:avLst/>
@@ -12685,13 +12611,13 @@
               </a:lnSpc>
             </a:pPr>
             <a:r>
-              <a:rPr sz="1100" b="0" i="0">
+              <a:rPr sz="1000" b="1" i="0">
                 <a:solidFill>
                   <a:srgbClr val="6B6B6B"/>
                 </a:solidFill>
-                <a:latin typeface="JetBrains Mono"/>
-              </a:rPr>
-              <a:t>08 · ROADMAP</a:t>
+                <a:latin typeface="Liberation Mono"/>
+              </a:rPr>
+              <a:t>08  ·  ROADMAP</a:t>
             </a:r>
           </a:p>
         </p:txBody>
@@ -12705,7 +12631,46 @@
         <p:spPr>
           <a:xfrm>
             <a:off x="548640" y="777240"/>
-            <a:ext cx="10972800" cy="914400"/>
+            <a:ext cx="11064240" cy="868680"/>
+          </a:xfrm>
+          <a:prstGeom prst="rect">
+            <a:avLst/>
+          </a:prstGeom>
+          <a:noFill/>
+        </p:spPr>
+        <p:txBody>
+          <a:bodyPr wrap="square" anchor="t" lIns="0" rIns="0" tIns="0" bIns="0">
+            <a:normAutofit/>
+          </a:bodyPr>
+          <a:lstStyle/>
+          <a:p>
+            <a:pPr algn="l">
+              <a:lnSpc>
+                <a:spcPct val="120000"/>
+              </a:lnSpc>
+            </a:pPr>
+            <a:r>
+              <a:rPr sz="3600" b="1" i="0">
+                <a:solidFill>
+                  <a:srgbClr val="F5F5F0"/>
+                </a:solidFill>
+                <a:latin typeface="Liberation Sans"/>
+              </a:rPr>
+              <a:t>Phases 0 → 8, all shipped.</a:t>
+            </a:r>
+          </a:p>
+        </p:txBody>
+      </p:sp>
+      <p:sp>
+        <p:nvSpPr>
+          <p:cNvPr id="5" name="TextBox 4"/>
+          <p:cNvSpPr txBox="1"/>
+          <p:nvPr/>
+        </p:nvSpPr>
+        <p:spPr>
+          <a:xfrm>
+            <a:off x="548640" y="2606040"/>
+            <a:ext cx="1280160" cy="292608"/>
           </a:xfrm>
           <a:prstGeom prst="rect">
             <a:avLst/>
@@ -12724,26 +12689,65 @@
               </a:lnSpc>
             </a:pPr>
             <a:r>
-              <a:rPr sz="4000" b="1" i="0">
-                <a:solidFill>
-                  <a:srgbClr val="F5F5F0"/>
-                </a:solidFill>
-                <a:latin typeface="Oxanium"/>
-              </a:rPr>
-              <a:t>Phases 0 → 8, all shipped.</a:t>
-            </a:r>
-          </a:p>
-        </p:txBody>
-      </p:sp>
-      <p:sp>
-        <p:nvSpPr>
-          <p:cNvPr id="5" name="TextBox 4"/>
-          <p:cNvSpPr txBox="1"/>
-          <p:nvPr/>
-        </p:nvSpPr>
-        <p:spPr>
-          <a:xfrm>
-            <a:off x="548640" y="2011680"/>
+              <a:rPr sz="1100" b="1" i="0">
+                <a:solidFill>
+                  <a:srgbClr val="00FF85"/>
+                </a:solidFill>
+                <a:latin typeface="Liberation Mono"/>
+              </a:rPr>
+              <a:t>Phase 0</a:t>
+            </a:r>
+          </a:p>
+        </p:txBody>
+      </p:sp>
+      <p:sp>
+        <p:nvSpPr>
+          <p:cNvPr id="6" name="TextBox 5"/>
+          <p:cNvSpPr txBox="1"/>
+          <p:nvPr/>
+        </p:nvSpPr>
+        <p:spPr>
+          <a:xfrm>
+            <a:off x="1828800" y="2606040"/>
+            <a:ext cx="4160520" cy="292608"/>
+          </a:xfrm>
+          <a:prstGeom prst="rect">
+            <a:avLst/>
+          </a:prstGeom>
+          <a:noFill/>
+        </p:spPr>
+        <p:txBody>
+          <a:bodyPr wrap="square" anchor="t" lIns="0" rIns="0" tIns="0" bIns="0">
+            <a:spAutoFit/>
+          </a:bodyPr>
+          <a:lstStyle/>
+          <a:p>
+            <a:pPr algn="l">
+              <a:lnSpc>
+                <a:spcPct val="120000"/>
+              </a:lnSpc>
+            </a:pPr>
+            <a:r>
+              <a:rPr sz="1000" b="0" i="0">
+                <a:solidFill>
+                  <a:srgbClr val="A0A0A0"/>
+                </a:solidFill>
+                <a:latin typeface="Liberation Sans"/>
+              </a:rPr>
+              <a:t>ER / PER / VRF spike — architecture proven</a:t>
+            </a:r>
+          </a:p>
+        </p:txBody>
+      </p:sp>
+      <p:sp>
+        <p:nvSpPr>
+          <p:cNvPr id="7" name="TextBox 6"/>
+          <p:cNvSpPr txBox="1"/>
+          <p:nvPr/>
+        </p:nvSpPr>
+        <p:spPr>
+          <a:xfrm>
+            <a:off x="548640" y="2916936"/>
             <a:ext cx="1280160" cy="292608"/>
           </a:xfrm>
           <a:prstGeom prst="rect">
@@ -12763,27 +12767,27 @@
               </a:lnSpc>
             </a:pPr>
             <a:r>
-              <a:rPr sz="1200" b="1" i="0">
+              <a:rPr sz="1100" b="1" i="0">
                 <a:solidFill>
                   <a:srgbClr val="00FF85"/>
                 </a:solidFill>
-                <a:latin typeface="JetBrains Mono"/>
-              </a:rPr>
-              <a:t>Phase 0</a:t>
-            </a:r>
-          </a:p>
-        </p:txBody>
-      </p:sp>
-      <p:sp>
-        <p:nvSpPr>
-          <p:cNvPr id="6" name="TextBox 5"/>
-          <p:cNvSpPr txBox="1"/>
-          <p:nvPr/>
-        </p:nvSpPr>
-        <p:spPr>
-          <a:xfrm>
-            <a:off x="1828800" y="2011680"/>
-            <a:ext cx="4389120" cy="292608"/>
+                <a:latin typeface="Liberation Mono"/>
+              </a:rPr>
+              <a:t>Phase A</a:t>
+            </a:r>
+          </a:p>
+        </p:txBody>
+      </p:sp>
+      <p:sp>
+        <p:nvSpPr>
+          <p:cNvPr id="8" name="TextBox 7"/>
+          <p:cNvSpPr txBox="1"/>
+          <p:nvPr/>
+        </p:nvSpPr>
+        <p:spPr>
+          <a:xfrm>
+            <a:off x="1828800" y="2916936"/>
+            <a:ext cx="4160520" cy="292608"/>
           </a:xfrm>
           <a:prstGeom prst="rect">
             <a:avLst/>
@@ -12802,26 +12806,26 @@
               </a:lnSpc>
             </a:pPr>
             <a:r>
-              <a:rPr sz="1100" b="0" i="0">
+              <a:rPr sz="1000" b="0" i="0">
                 <a:solidFill>
                   <a:srgbClr val="A0A0A0"/>
                 </a:solidFill>
-                <a:latin typeface="Inter"/>
-              </a:rPr>
-              <a:t>ER / PER / VRF spike — architecture proven</a:t>
-            </a:r>
-          </a:p>
-        </p:txBody>
-      </p:sp>
-      <p:sp>
-        <p:nvSpPr>
-          <p:cNvPr id="7" name="TextBox 6"/>
-          <p:cNvSpPr txBox="1"/>
-          <p:nvPr/>
-        </p:nvSpPr>
-        <p:spPr>
-          <a:xfrm>
-            <a:off x="548640" y="2340864"/>
+                <a:latin typeface="Liberation Sans"/>
+              </a:rPr>
+              <a:t>Conviction MVP deployed to devnet</a:t>
+            </a:r>
+          </a:p>
+        </p:txBody>
+      </p:sp>
+      <p:sp>
+        <p:nvSpPr>
+          <p:cNvPr id="9" name="TextBox 8"/>
+          <p:cNvSpPr txBox="1"/>
+          <p:nvPr/>
+        </p:nvSpPr>
+        <p:spPr>
+          <a:xfrm>
+            <a:off x="548640" y="3227832"/>
             <a:ext cx="1280160" cy="292608"/>
           </a:xfrm>
           <a:prstGeom prst="rect">
@@ -12841,27 +12845,27 @@
               </a:lnSpc>
             </a:pPr>
             <a:r>
-              <a:rPr sz="1200" b="1" i="0">
+              <a:rPr sz="1100" b="1" i="0">
                 <a:solidFill>
                   <a:srgbClr val="00FF85"/>
                 </a:solidFill>
-                <a:latin typeface="JetBrains Mono"/>
-              </a:rPr>
-              <a:t>Phase A</a:t>
-            </a:r>
-          </a:p>
-        </p:txBody>
-      </p:sp>
-      <p:sp>
-        <p:nvSpPr>
-          <p:cNvPr id="8" name="TextBox 7"/>
-          <p:cNvSpPr txBox="1"/>
-          <p:nvPr/>
-        </p:nvSpPr>
-        <p:spPr>
-          <a:xfrm>
-            <a:off x="1828800" y="2340864"/>
-            <a:ext cx="4389120" cy="292608"/>
+                <a:latin typeface="Liberation Mono"/>
+              </a:rPr>
+              <a:t>Phase B</a:t>
+            </a:r>
+          </a:p>
+        </p:txBody>
+      </p:sp>
+      <p:sp>
+        <p:nvSpPr>
+          <p:cNvPr id="10" name="TextBox 9"/>
+          <p:cNvSpPr txBox="1"/>
+          <p:nvPr/>
+        </p:nvSpPr>
+        <p:spPr>
+          <a:xfrm>
+            <a:off x="1828800" y="3227832"/>
+            <a:ext cx="4160520" cy="292608"/>
           </a:xfrm>
           <a:prstGeom prst="rect">
             <a:avLst/>
@@ -12880,26 +12884,26 @@
               </a:lnSpc>
             </a:pPr>
             <a:r>
-              <a:rPr sz="1100" b="0" i="0">
+              <a:rPr sz="1000" b="0" i="0">
                 <a:solidFill>
                   <a:srgbClr val="A0A0A0"/>
                 </a:solidFill>
-                <a:latin typeface="Inter"/>
-              </a:rPr>
-              <a:t>Conviction MVP deployed to devnet</a:t>
-            </a:r>
-          </a:p>
-        </p:txBody>
-      </p:sp>
-      <p:sp>
-        <p:nvSpPr>
-          <p:cNvPr id="9" name="TextBox 8"/>
-          <p:cNvSpPr txBox="1"/>
-          <p:nvPr/>
-        </p:nvSpPr>
-        <p:spPr>
-          <a:xfrm>
-            <a:off x="548640" y="2670048"/>
+                <a:latin typeface="Liberation Sans"/>
+              </a:rPr>
+              <a:t>Frontend with 10 routes + mock-first data layer</a:t>
+            </a:r>
+          </a:p>
+        </p:txBody>
+      </p:sp>
+      <p:sp>
+        <p:nvSpPr>
+          <p:cNvPr id="11" name="TextBox 10"/>
+          <p:cNvSpPr txBox="1"/>
+          <p:nvPr/>
+        </p:nvSpPr>
+        <p:spPr>
+          <a:xfrm>
+            <a:off x="548640" y="3538728"/>
             <a:ext cx="1280160" cy="292608"/>
           </a:xfrm>
           <a:prstGeom prst="rect">
@@ -12919,27 +12923,27 @@
               </a:lnSpc>
             </a:pPr>
             <a:r>
-              <a:rPr sz="1200" b="1" i="0">
+              <a:rPr sz="1100" b="1" i="0">
                 <a:solidFill>
                   <a:srgbClr val="00FF85"/>
                 </a:solidFill>
-                <a:latin typeface="JetBrains Mono"/>
-              </a:rPr>
-              <a:t>Phase B</a:t>
-            </a:r>
-          </a:p>
-        </p:txBody>
-      </p:sp>
-      <p:sp>
-        <p:nvSpPr>
-          <p:cNvPr id="10" name="TextBox 9"/>
-          <p:cNvSpPr txBox="1"/>
-          <p:nvPr/>
-        </p:nvSpPr>
-        <p:spPr>
-          <a:xfrm>
-            <a:off x="1828800" y="2670048"/>
-            <a:ext cx="4389120" cy="292608"/>
+                <a:latin typeface="Liberation Mono"/>
+              </a:rPr>
+              <a:t>Phase B+</a:t>
+            </a:r>
+          </a:p>
+        </p:txBody>
+      </p:sp>
+      <p:sp>
+        <p:nvSpPr>
+          <p:cNvPr id="12" name="TextBox 11"/>
+          <p:cNvSpPr txBox="1"/>
+          <p:nvPr/>
+        </p:nvSpPr>
+        <p:spPr>
+          <a:xfrm>
+            <a:off x="1828800" y="3538728"/>
+            <a:ext cx="4160520" cy="292608"/>
           </a:xfrm>
           <a:prstGeom prst="rect">
             <a:avLst/>
@@ -12958,26 +12962,26 @@
               </a:lnSpc>
             </a:pPr>
             <a:r>
-              <a:rPr sz="1100" b="0" i="0">
+              <a:rPr sz="1000" b="0" i="0">
                 <a:solidFill>
                   <a:srgbClr val="A0A0A0"/>
                 </a:solidFill>
-                <a:latin typeface="Inter"/>
-              </a:rPr>
-              <a:t>Frontend with 10 routes + mock-first data layer</a:t>
-            </a:r>
-          </a:p>
-        </p:txBody>
-      </p:sp>
-      <p:sp>
-        <p:nvSpPr>
-          <p:cNvPr id="11" name="TextBox 10"/>
-          <p:cNvSpPr txBox="1"/>
-          <p:nvPr/>
-        </p:nvSpPr>
-        <p:spPr>
-          <a:xfrm>
-            <a:off x="548640" y="2999232"/>
+                <a:latin typeface="Liberation Sans"/>
+              </a:rPr>
+              <a:t>Per-ix file refactor (50+ files, all ≤150 LOC)</a:t>
+            </a:r>
+          </a:p>
+        </p:txBody>
+      </p:sp>
+      <p:sp>
+        <p:nvSpPr>
+          <p:cNvPr id="13" name="TextBox 12"/>
+          <p:cNvSpPr txBox="1"/>
+          <p:nvPr/>
+        </p:nvSpPr>
+        <p:spPr>
+          <a:xfrm>
+            <a:off x="548640" y="3849624"/>
             <a:ext cx="1280160" cy="292608"/>
           </a:xfrm>
           <a:prstGeom prst="rect">
@@ -12997,27 +13001,27 @@
               </a:lnSpc>
             </a:pPr>
             <a:r>
-              <a:rPr sz="1200" b="1" i="0">
+              <a:rPr sz="1100" b="1" i="0">
                 <a:solidFill>
                   <a:srgbClr val="00FF85"/>
                 </a:solidFill>
-                <a:latin typeface="JetBrains Mono"/>
-              </a:rPr>
-              <a:t>Phase B+</a:t>
-            </a:r>
-          </a:p>
-        </p:txBody>
-      </p:sp>
-      <p:sp>
-        <p:nvSpPr>
-          <p:cNvPr id="12" name="TextBox 11"/>
-          <p:cNvSpPr txBox="1"/>
-          <p:nvPr/>
-        </p:nvSpPr>
-        <p:spPr>
-          <a:xfrm>
-            <a:off x="1828800" y="2999232"/>
-            <a:ext cx="4389120" cy="292608"/>
+                <a:latin typeface="Liberation Mono"/>
+              </a:rPr>
+              <a:t>Phase B+2</a:t>
+            </a:r>
+          </a:p>
+        </p:txBody>
+      </p:sp>
+      <p:sp>
+        <p:nvSpPr>
+          <p:cNvPr id="14" name="TextBox 13"/>
+          <p:cNvSpPr txBox="1"/>
+          <p:nvPr/>
+        </p:nvSpPr>
+        <p:spPr>
+          <a:xfrm>
+            <a:off x="1828800" y="3849624"/>
+            <a:ext cx="4160520" cy="292608"/>
           </a:xfrm>
           <a:prstGeom prst="rect">
             <a:avLst/>
@@ -13036,26 +13040,26 @@
               </a:lnSpc>
             </a:pPr>
             <a:r>
-              <a:rPr sz="1100" b="0" i="0">
+              <a:rPr sz="1000" b="0" i="0">
                 <a:solidFill>
                   <a:srgbClr val="A0A0A0"/>
                 </a:solidFill>
-                <a:latin typeface="Inter"/>
-              </a:rPr>
-              <a:t>Per-ix file refactor (50+ files, all ≤150 LOC)</a:t>
-            </a:r>
-          </a:p>
-        </p:txBody>
-      </p:sp>
-      <p:sp>
-        <p:nvSpPr>
-          <p:cNvPr id="13" name="TextBox 12"/>
-          <p:cNvSpPr txBox="1"/>
-          <p:nvPr/>
-        </p:nvSpPr>
-        <p:spPr>
-          <a:xfrm>
-            <a:off x="548640" y="3328416"/>
+                <a:latin typeface="Liberation Sans"/>
+              </a:rPr>
+              <a:t>Spectator trim — 26 → 23 instructions</a:t>
+            </a:r>
+          </a:p>
+        </p:txBody>
+      </p:sp>
+      <p:sp>
+        <p:nvSpPr>
+          <p:cNvPr id="15" name="TextBox 14"/>
+          <p:cNvSpPr txBox="1"/>
+          <p:nvPr/>
+        </p:nvSpPr>
+        <p:spPr>
+          <a:xfrm>
+            <a:off x="548640" y="4160520"/>
             <a:ext cx="1280160" cy="292608"/>
           </a:xfrm>
           <a:prstGeom prst="rect">
@@ -13075,27 +13079,27 @@
               </a:lnSpc>
             </a:pPr>
             <a:r>
-              <a:rPr sz="1200" b="1" i="0">
+              <a:rPr sz="1100" b="1" i="0">
                 <a:solidFill>
                   <a:srgbClr val="00FF85"/>
                 </a:solidFill>
-                <a:latin typeface="JetBrains Mono"/>
-              </a:rPr>
-              <a:t>Phase B+2</a:t>
-            </a:r>
-          </a:p>
-        </p:txBody>
-      </p:sp>
-      <p:sp>
-        <p:nvSpPr>
-          <p:cNvPr id="14" name="TextBox 13"/>
-          <p:cNvSpPr txBox="1"/>
-          <p:nvPr/>
-        </p:nvSpPr>
-        <p:spPr>
-          <a:xfrm>
-            <a:off x="1828800" y="3328416"/>
-            <a:ext cx="4389120" cy="292608"/>
+                <a:latin typeface="Liberation Mono"/>
+              </a:rPr>
+              <a:t>Phase 1</a:t>
+            </a:r>
+          </a:p>
+        </p:txBody>
+      </p:sp>
+      <p:sp>
+        <p:nvSpPr>
+          <p:cNvPr id="16" name="TextBox 15"/>
+          <p:cNvSpPr txBox="1"/>
+          <p:nvPr/>
+        </p:nvSpPr>
+        <p:spPr>
+          <a:xfrm>
+            <a:off x="1828800" y="4160520"/>
+            <a:ext cx="4160520" cy="292608"/>
           </a:xfrm>
           <a:prstGeom prst="rect">
             <a:avLst/>
@@ -13114,26 +13118,26 @@
               </a:lnSpc>
             </a:pPr>
             <a:r>
-              <a:rPr sz="1100" b="0" i="0">
+              <a:rPr sz="1000" b="0" i="0">
                 <a:solidFill>
                   <a:srgbClr val="A0A0A0"/>
                 </a:solidFill>
-                <a:latin typeface="Inter"/>
-              </a:rPr>
-              <a:t>Spectator trim — 26 → 23 instructions</a:t>
-            </a:r>
-          </a:p>
-        </p:txBody>
-      </p:sp>
-      <p:sp>
-        <p:nvSpPr>
-          <p:cNvPr id="15" name="TextBox 14"/>
-          <p:cNvSpPr txBox="1"/>
-          <p:nvPr/>
-        </p:nvSpPr>
-        <p:spPr>
-          <a:xfrm>
-            <a:off x="548640" y="3657600"/>
+                <a:latin typeface="Liberation Sans"/>
+              </a:rPr>
+              <a:t>On-chain gap fixes: fold + leave_match + tick_price</a:t>
+            </a:r>
+          </a:p>
+        </p:txBody>
+      </p:sp>
+      <p:sp>
+        <p:nvSpPr>
+          <p:cNvPr id="17" name="TextBox 16"/>
+          <p:cNvSpPr txBox="1"/>
+          <p:nvPr/>
+        </p:nvSpPr>
+        <p:spPr>
+          <a:xfrm>
+            <a:off x="548640" y="4471416"/>
             <a:ext cx="1280160" cy="292608"/>
           </a:xfrm>
           <a:prstGeom prst="rect">
@@ -13153,27 +13157,27 @@
               </a:lnSpc>
             </a:pPr>
             <a:r>
-              <a:rPr sz="1200" b="1" i="0">
+              <a:rPr sz="1100" b="1" i="0">
                 <a:solidFill>
                   <a:srgbClr val="00FF85"/>
                 </a:solidFill>
-                <a:latin typeface="JetBrains Mono"/>
-              </a:rPr>
-              <a:t>Phase 1</a:t>
-            </a:r>
-          </a:p>
-        </p:txBody>
-      </p:sp>
-      <p:sp>
-        <p:nvSpPr>
-          <p:cNvPr id="16" name="TextBox 15"/>
-          <p:cNvSpPr txBox="1"/>
-          <p:nvPr/>
-        </p:nvSpPr>
-        <p:spPr>
-          <a:xfrm>
-            <a:off x="1828800" y="3657600"/>
-            <a:ext cx="4389120" cy="292608"/>
+                <a:latin typeface="Liberation Mono"/>
+              </a:rPr>
+              <a:t>Phase 2</a:t>
+            </a:r>
+          </a:p>
+        </p:txBody>
+      </p:sp>
+      <p:sp>
+        <p:nvSpPr>
+          <p:cNvPr id="18" name="TextBox 17"/>
+          <p:cNvSpPr txBox="1"/>
+          <p:nvPr/>
+        </p:nvSpPr>
+        <p:spPr>
+          <a:xfrm>
+            <a:off x="1828800" y="4471416"/>
+            <a:ext cx="4160520" cy="292608"/>
           </a:xfrm>
           <a:prstGeom prst="rect">
             <a:avLst/>
@@ -13192,26 +13196,26 @@
               </a:lnSpc>
             </a:pPr>
             <a:r>
-              <a:rPr sz="1100" b="0" i="0">
+              <a:rPr sz="1000" b="0" i="0">
                 <a:solidFill>
                   <a:srgbClr val="A0A0A0"/>
                 </a:solidFill>
-                <a:latin typeface="Inter"/>
-              </a:rPr>
-              <a:t>On-chain gap fixes: fold + leave_match + tick_price persistence</a:t>
-            </a:r>
-          </a:p>
-        </p:txBody>
-      </p:sp>
-      <p:sp>
-        <p:nvSpPr>
-          <p:cNvPr id="17" name="TextBox 16"/>
-          <p:cNvSpPr txBox="1"/>
-          <p:nvPr/>
-        </p:nvSpPr>
-        <p:spPr>
-          <a:xfrm>
-            <a:off x="548640" y="3986784"/>
+                <a:latin typeface="Liberation Sans"/>
+              </a:rPr>
+              <a:t>Basket-band fix (StopLossRange model)</a:t>
+            </a:r>
+          </a:p>
+        </p:txBody>
+      </p:sp>
+      <p:sp>
+        <p:nvSpPr>
+          <p:cNvPr id="19" name="TextBox 18"/>
+          <p:cNvSpPr txBox="1"/>
+          <p:nvPr/>
+        </p:nvSpPr>
+        <p:spPr>
+          <a:xfrm>
+            <a:off x="6446520" y="2606040"/>
             <a:ext cx="1280160" cy="292608"/>
           </a:xfrm>
           <a:prstGeom prst="rect">
@@ -13231,27 +13235,27 @@
               </a:lnSpc>
             </a:pPr>
             <a:r>
-              <a:rPr sz="1200" b="1" i="0">
+              <a:rPr sz="1100" b="1" i="0">
                 <a:solidFill>
                   <a:srgbClr val="00FF85"/>
                 </a:solidFill>
-                <a:latin typeface="JetBrains Mono"/>
-              </a:rPr>
-              <a:t>Phase 2</a:t>
-            </a:r>
-          </a:p>
-        </p:txBody>
-      </p:sp>
-      <p:sp>
-        <p:nvSpPr>
-          <p:cNvPr id="18" name="TextBox 17"/>
-          <p:cNvSpPr txBox="1"/>
-          <p:nvPr/>
-        </p:nvSpPr>
-        <p:spPr>
-          <a:xfrm>
-            <a:off x="1828800" y="3986784"/>
-            <a:ext cx="4389120" cy="292608"/>
+                <a:latin typeface="Liberation Mono"/>
+              </a:rPr>
+              <a:t>Phase 3</a:t>
+            </a:r>
+          </a:p>
+        </p:txBody>
+      </p:sp>
+      <p:sp>
+        <p:nvSpPr>
+          <p:cNvPr id="20" name="TextBox 19"/>
+          <p:cNvSpPr txBox="1"/>
+          <p:nvPr/>
+        </p:nvSpPr>
+        <p:spPr>
+          <a:xfrm>
+            <a:off x="7726679" y="2606040"/>
+            <a:ext cx="4160520" cy="292608"/>
           </a:xfrm>
           <a:prstGeom prst="rect">
             <a:avLst/>
@@ -13270,26 +13274,26 @@
               </a:lnSpc>
             </a:pPr>
             <a:r>
-              <a:rPr sz="1100" b="0" i="0">
+              <a:rPr sz="1000" b="0" i="0">
                 <a:solidFill>
                   <a:srgbClr val="A0A0A0"/>
                 </a:solidFill>
-                <a:latin typeface="Inter"/>
-              </a:rPr>
-              <a:t>Basket-band fix (StopLossRange model)</a:t>
-            </a:r>
-          </a:p>
-        </p:txBody>
-      </p:sp>
-      <p:sp>
-        <p:nvSpPr>
-          <p:cNvPr id="19" name="TextBox 18"/>
-          <p:cNvSpPr txBox="1"/>
-          <p:nvPr/>
-        </p:nvSpPr>
-        <p:spPr>
-          <a:xfrm>
-            <a:off x="6492240" y="2011680"/>
+                <a:latin typeface="Liberation Sans"/>
+              </a:rPr>
+              <a:t>real.ts wire-up against devnet — all 18 functions</a:t>
+            </a:r>
+          </a:p>
+        </p:txBody>
+      </p:sp>
+      <p:sp>
+        <p:nvSpPr>
+          <p:cNvPr id="21" name="TextBox 20"/>
+          <p:cNvSpPr txBox="1"/>
+          <p:nvPr/>
+        </p:nvSpPr>
+        <p:spPr>
+          <a:xfrm>
+            <a:off x="6446520" y="2916936"/>
             <a:ext cx="1280160" cy="292608"/>
           </a:xfrm>
           <a:prstGeom prst="rect">
@@ -13309,27 +13313,27 @@
               </a:lnSpc>
             </a:pPr>
             <a:r>
-              <a:rPr sz="1200" b="1" i="0">
+              <a:rPr sz="1100" b="1" i="0">
                 <a:solidFill>
                   <a:srgbClr val="00FF85"/>
                 </a:solidFill>
-                <a:latin typeface="JetBrains Mono"/>
-              </a:rPr>
-              <a:t>Phase 3</a:t>
-            </a:r>
-          </a:p>
-        </p:txBody>
-      </p:sp>
-      <p:sp>
-        <p:nvSpPr>
-          <p:cNvPr id="20" name="TextBox 19"/>
-          <p:cNvSpPr txBox="1"/>
-          <p:nvPr/>
-        </p:nvSpPr>
-        <p:spPr>
-          <a:xfrm>
-            <a:off x="7772400" y="2011680"/>
-            <a:ext cx="4389120" cy="292608"/>
+                <a:latin typeface="Liberation Mono"/>
+              </a:rPr>
+              <a:t>Phase 4</a:t>
+            </a:r>
+          </a:p>
+        </p:txBody>
+      </p:sp>
+      <p:sp>
+        <p:nvSpPr>
+          <p:cNvPr id="22" name="TextBox 21"/>
+          <p:cNvSpPr txBox="1"/>
+          <p:nvPr/>
+        </p:nvSpPr>
+        <p:spPr>
+          <a:xfrm>
+            <a:off x="7726679" y="2916936"/>
+            <a:ext cx="4160520" cy="292608"/>
           </a:xfrm>
           <a:prstGeom prst="rect">
             <a:avLst/>
@@ -13348,26 +13352,26 @@
               </a:lnSpc>
             </a:pPr>
             <a:r>
-              <a:rPr sz="1100" b="0" i="0">
+              <a:rPr sz="1000" b="0" i="0">
                 <a:solidFill>
                   <a:srgbClr val="A0A0A0"/>
                 </a:solidFill>
-                <a:latin typeface="Inter"/>
-              </a:rPr>
-              <a:t>real.ts wire-up against devnet — all 18 functions</a:t>
-            </a:r>
-          </a:p>
-        </p:txBody>
-      </p:sp>
-      <p:sp>
-        <p:nvSpPr>
-          <p:cNvPr id="21" name="TextBox 20"/>
-          <p:cNvSpPr txBox="1"/>
-          <p:nvPr/>
-        </p:nvSpPr>
-        <p:spPr>
-          <a:xfrm>
-            <a:off x="6492240" y="2340864"/>
+                <a:latin typeface="Liberation Sans"/>
+              </a:rPr>
+              <a:t>Birdeye live prices wired into price-chart</a:t>
+            </a:r>
+          </a:p>
+        </p:txBody>
+      </p:sp>
+      <p:sp>
+        <p:nvSpPr>
+          <p:cNvPr id="23" name="TextBox 22"/>
+          <p:cNvSpPr txBox="1"/>
+          <p:nvPr/>
+        </p:nvSpPr>
+        <p:spPr>
+          <a:xfrm>
+            <a:off x="6446520" y="3227832"/>
             <a:ext cx="1280160" cy="292608"/>
           </a:xfrm>
           <a:prstGeom prst="rect">
@@ -13387,27 +13391,27 @@
               </a:lnSpc>
             </a:pPr>
             <a:r>
-              <a:rPr sz="1200" b="1" i="0">
+              <a:rPr sz="1100" b="1" i="0">
                 <a:solidFill>
                   <a:srgbClr val="00FF85"/>
                 </a:solidFill>
-                <a:latin typeface="JetBrains Mono"/>
-              </a:rPr>
-              <a:t>Phase 4</a:t>
-            </a:r>
-          </a:p>
-        </p:txBody>
-      </p:sp>
-      <p:sp>
-        <p:nvSpPr>
-          <p:cNvPr id="22" name="TextBox 21"/>
-          <p:cNvSpPr txBox="1"/>
-          <p:nvPr/>
-        </p:nvSpPr>
-        <p:spPr>
-          <a:xfrm>
-            <a:off x="7772400" y="2340864"/>
-            <a:ext cx="4389120" cy="292608"/>
+                <a:latin typeface="Liberation Mono"/>
+              </a:rPr>
+              <a:t>Phase 5</a:t>
+            </a:r>
+          </a:p>
+        </p:txBody>
+      </p:sp>
+      <p:sp>
+        <p:nvSpPr>
+          <p:cNvPr id="24" name="TextBox 23"/>
+          <p:cNvSpPr txBox="1"/>
+          <p:nvPr/>
+        </p:nvSpPr>
+        <p:spPr>
+          <a:xfrm>
+            <a:off x="7726679" y="3227832"/>
+            <a:ext cx="4160520" cy="292608"/>
           </a:xfrm>
           <a:prstGeom prst="rect">
             <a:avLst/>
@@ -13426,26 +13430,26 @@
               </a:lnSpc>
             </a:pPr>
             <a:r>
-              <a:rPr sz="1100" b="0" i="0">
+              <a:rPr sz="1000" b="0" i="0">
                 <a:solidFill>
                   <a:srgbClr val="A0A0A0"/>
                 </a:solidFill>
-                <a:latin typeface="Inter"/>
-              </a:rPr>
-              <a:t>Birdeye live prices wired into price-chart</a:t>
-            </a:r>
-          </a:p>
-        </p:txBody>
-      </p:sp>
-      <p:sp>
-        <p:nvSpPr>
-          <p:cNvPr id="23" name="TextBox 22"/>
-          <p:cNvSpPr txBox="1"/>
-          <p:nvPr/>
-        </p:nvSpPr>
-        <p:spPr>
-          <a:xfrm>
-            <a:off x="6492240" y="2670048"/>
+                <a:latin typeface="Liberation Sans"/>
+              </a:rPr>
+              <a:t>On-chain bootstrap (GameConfig + FTR mint)</a:t>
+            </a:r>
+          </a:p>
+        </p:txBody>
+      </p:sp>
+      <p:sp>
+        <p:nvSpPr>
+          <p:cNvPr id="25" name="TextBox 24"/>
+          <p:cNvSpPr txBox="1"/>
+          <p:nvPr/>
+        </p:nvSpPr>
+        <p:spPr>
+          <a:xfrm>
+            <a:off x="6446520" y="3538728"/>
             <a:ext cx="1280160" cy="292608"/>
           </a:xfrm>
           <a:prstGeom prst="rect">
@@ -13465,27 +13469,27 @@
               </a:lnSpc>
             </a:pPr>
             <a:r>
-              <a:rPr sz="1200" b="1" i="0">
+              <a:rPr sz="1100" b="1" i="0">
                 <a:solidFill>
                   <a:srgbClr val="00FF85"/>
                 </a:solidFill>
-                <a:latin typeface="JetBrains Mono"/>
-              </a:rPr>
-              <a:t>Phase 5</a:t>
-            </a:r>
-          </a:p>
-        </p:txBody>
-      </p:sp>
-      <p:sp>
-        <p:nvSpPr>
-          <p:cNvPr id="24" name="TextBox 23"/>
-          <p:cNvSpPr txBox="1"/>
-          <p:nvPr/>
-        </p:nvSpPr>
-        <p:spPr>
-          <a:xfrm>
-            <a:off x="7772400" y="2670048"/>
-            <a:ext cx="4389120" cy="292608"/>
+                <a:latin typeface="Liberation Mono"/>
+              </a:rPr>
+              <a:t>Phase 6</a:t>
+            </a:r>
+          </a:p>
+        </p:txBody>
+      </p:sp>
+      <p:sp>
+        <p:nvSpPr>
+          <p:cNvPr id="26" name="TextBox 25"/>
+          <p:cNvSpPr txBox="1"/>
+          <p:nvPr/>
+        </p:nvSpPr>
+        <p:spPr>
+          <a:xfrm>
+            <a:off x="7726679" y="3538728"/>
+            <a:ext cx="4160520" cy="292608"/>
           </a:xfrm>
           <a:prstGeom prst="rect">
             <a:avLst/>
@@ -13504,26 +13508,26 @@
               </a:lnSpc>
             </a:pPr>
             <a:r>
-              <a:rPr sz="1100" b="0" i="0">
+              <a:rPr sz="1000" b="0" i="0">
                 <a:solidFill>
                   <a:srgbClr val="A0A0A0"/>
                 </a:solidFill>
-                <a:latin typeface="Inter"/>
-              </a:rPr>
-              <a:t>On-chain bootstrap (GameConfig + FTR mint)</a:t>
-            </a:r>
-          </a:p>
-        </p:txBody>
-      </p:sp>
-      <p:sp>
-        <p:nvSpPr>
-          <p:cNvPr id="25" name="TextBox 24"/>
-          <p:cNvSpPr txBox="1"/>
-          <p:nvPr/>
-        </p:nvSpPr>
-        <p:spPr>
-          <a:xfrm>
-            <a:off x="6492240" y="2999232"/>
+                <a:latin typeface="Liberation Sans"/>
+              </a:rPr>
+              <a:t>Vercel deploy artifacts (conviction-nine.vercel.app)</a:t>
+            </a:r>
+          </a:p>
+        </p:txBody>
+      </p:sp>
+      <p:sp>
+        <p:nvSpPr>
+          <p:cNvPr id="27" name="TextBox 26"/>
+          <p:cNvSpPr txBox="1"/>
+          <p:nvPr/>
+        </p:nvSpPr>
+        <p:spPr>
+          <a:xfrm>
+            <a:off x="6446520" y="3849624"/>
             <a:ext cx="1280160" cy="292608"/>
           </a:xfrm>
           <a:prstGeom prst="rect">
@@ -13543,27 +13547,27 @@
               </a:lnSpc>
             </a:pPr>
             <a:r>
-              <a:rPr sz="1200" b="1" i="0">
+              <a:rPr sz="1100" b="1" i="0">
                 <a:solidFill>
                   <a:srgbClr val="00FF85"/>
                 </a:solidFill>
-                <a:latin typeface="JetBrains Mono"/>
-              </a:rPr>
-              <a:t>Phase 6</a:t>
-            </a:r>
-          </a:p>
-        </p:txBody>
-      </p:sp>
-      <p:sp>
-        <p:nvSpPr>
-          <p:cNvPr id="26" name="TextBox 25"/>
-          <p:cNvSpPr txBox="1"/>
-          <p:nvPr/>
-        </p:nvSpPr>
-        <p:spPr>
-          <a:xfrm>
-            <a:off x="7772400" y="2999232"/>
-            <a:ext cx="4389120" cy="292608"/>
+                <a:latin typeface="Liberation Mono"/>
+              </a:rPr>
+              <a:t>Phase 7</a:t>
+            </a:r>
+          </a:p>
+        </p:txBody>
+      </p:sp>
+      <p:sp>
+        <p:nvSpPr>
+          <p:cNvPr id="28" name="TextBox 27"/>
+          <p:cNvSpPr txBox="1"/>
+          <p:nvPr/>
+        </p:nvSpPr>
+        <p:spPr>
+          <a:xfrm>
+            <a:off x="7726679" y="3849624"/>
+            <a:ext cx="4160520" cy="292608"/>
           </a:xfrm>
           <a:prstGeom prst="rect">
             <a:avLst/>
@@ -13582,26 +13586,26 @@
               </a:lnSpc>
             </a:pPr>
             <a:r>
-              <a:rPr sz="1100" b="0" i="0">
+              <a:rPr sz="1000" b="0" i="0">
                 <a:solidFill>
                   <a:srgbClr val="A0A0A0"/>
                 </a:solidFill>
-                <a:latin typeface="Inter"/>
-              </a:rPr>
-              <a:t>Vercel deploy artifacts (live at conviction-nine.vercel.app)</a:t>
-            </a:r>
-          </a:p>
-        </p:txBody>
-      </p:sp>
-      <p:sp>
-        <p:nvSpPr>
-          <p:cNvPr id="27" name="TextBox 26"/>
-          <p:cNvSpPr txBox="1"/>
-          <p:nvPr/>
-        </p:nvSpPr>
-        <p:spPr>
-          <a:xfrm>
-            <a:off x="6492240" y="3328416"/>
+                <a:latin typeface="Liberation Sans"/>
+              </a:rPr>
+              <a:t>Spectator mock-data fallback</a:t>
+            </a:r>
+          </a:p>
+        </p:txBody>
+      </p:sp>
+      <p:sp>
+        <p:nvSpPr>
+          <p:cNvPr id="29" name="TextBox 28"/>
+          <p:cNvSpPr txBox="1"/>
+          <p:nvPr/>
+        </p:nvSpPr>
+        <p:spPr>
+          <a:xfrm>
+            <a:off x="6446520" y="4160520"/>
             <a:ext cx="1280160" cy="292608"/>
           </a:xfrm>
           <a:prstGeom prst="rect">
@@ -13621,27 +13625,27 @@
               </a:lnSpc>
             </a:pPr>
             <a:r>
-              <a:rPr sz="1200" b="1" i="0">
+              <a:rPr sz="1100" b="1" i="0">
                 <a:solidFill>
                   <a:srgbClr val="00FF85"/>
                 </a:solidFill>
-                <a:latin typeface="JetBrains Mono"/>
-              </a:rPr>
-              <a:t>Phase 7</a:t>
-            </a:r>
-          </a:p>
-        </p:txBody>
-      </p:sp>
-      <p:sp>
-        <p:nvSpPr>
-          <p:cNvPr id="28" name="TextBox 27"/>
-          <p:cNvSpPr txBox="1"/>
-          <p:nvPr/>
-        </p:nvSpPr>
-        <p:spPr>
-          <a:xfrm>
-            <a:off x="7772400" y="3328416"/>
-            <a:ext cx="4389120" cy="292608"/>
+                <a:latin typeface="Liberation Mono"/>
+              </a:rPr>
+              <a:t>Phase 8</a:t>
+            </a:r>
+          </a:p>
+        </p:txBody>
+      </p:sp>
+      <p:sp>
+        <p:nvSpPr>
+          <p:cNvPr id="30" name="TextBox 29"/>
+          <p:cNvSpPr txBox="1"/>
+          <p:nvPr/>
+        </p:nvSpPr>
+        <p:spPr>
+          <a:xfrm>
+            <a:off x="7726679" y="4160520"/>
+            <a:ext cx="4160520" cy="292608"/>
           </a:xfrm>
           <a:prstGeom prst="rect">
             <a:avLst/>
@@ -13660,89 +13664,11 @@
               </a:lnSpc>
             </a:pPr>
             <a:r>
-              <a:rPr sz="1100" b="0" i="0">
+              <a:rPr sz="1000" b="0" i="0">
                 <a:solidFill>
                   <a:srgbClr val="A0A0A0"/>
                 </a:solidFill>
-                <a:latin typeface="Inter"/>
-              </a:rPr>
-              <a:t>Spectator mock-data fallback</a:t>
-            </a:r>
-          </a:p>
-        </p:txBody>
-      </p:sp>
-      <p:sp>
-        <p:nvSpPr>
-          <p:cNvPr id="29" name="TextBox 28"/>
-          <p:cNvSpPr txBox="1"/>
-          <p:nvPr/>
-        </p:nvSpPr>
-        <p:spPr>
-          <a:xfrm>
-            <a:off x="6492240" y="3657600"/>
-            <a:ext cx="1280160" cy="292608"/>
-          </a:xfrm>
-          <a:prstGeom prst="rect">
-            <a:avLst/>
-          </a:prstGeom>
-          <a:noFill/>
-        </p:spPr>
-        <p:txBody>
-          <a:bodyPr wrap="square" anchor="t" lIns="0" rIns="0" tIns="0" bIns="0">
-            <a:spAutoFit/>
-          </a:bodyPr>
-          <a:lstStyle/>
-          <a:p>
-            <a:pPr algn="l">
-              <a:lnSpc>
-                <a:spcPct val="120000"/>
-              </a:lnSpc>
-            </a:pPr>
-            <a:r>
-              <a:rPr sz="1200" b="1" i="0">
-                <a:solidFill>
-                  <a:srgbClr val="00FF85"/>
-                </a:solidFill>
-                <a:latin typeface="JetBrains Mono"/>
-              </a:rPr>
-              <a:t>Phase 8</a:t>
-            </a:r>
-          </a:p>
-        </p:txBody>
-      </p:sp>
-      <p:sp>
-        <p:nvSpPr>
-          <p:cNvPr id="30" name="TextBox 29"/>
-          <p:cNvSpPr txBox="1"/>
-          <p:nvPr/>
-        </p:nvSpPr>
-        <p:spPr>
-          <a:xfrm>
-            <a:off x="7772400" y="3657600"/>
-            <a:ext cx="4389120" cy="292608"/>
-          </a:xfrm>
-          <a:prstGeom prst="rect">
-            <a:avLst/>
-          </a:prstGeom>
-          <a:noFill/>
-        </p:spPr>
-        <p:txBody>
-          <a:bodyPr wrap="square" anchor="t" lIns="0" rIns="0" tIns="0" bIns="0">
-            <a:spAutoFit/>
-          </a:bodyPr>
-          <a:lstStyle/>
-          <a:p>
-            <a:pPr algn="l">
-              <a:lnSpc>
-                <a:spcPct val="120000"/>
-              </a:lnSpc>
-            </a:pPr>
-            <a:r>
-              <a:rPr sz="1100" b="0" i="0">
-                <a:solidFill>
-                  <a:srgbClr val="A0A0A0"/>
-                </a:solidFill>
-                <a:latin typeface="Inter"/>
+                <a:latin typeface="Liberation Sans"/>
               </a:rPr>
               <a:t>Frontend redesign (mission control, reveal, landing)</a:t>
             </a:r>
